--- a/images/2017_11_ruebel_sfn_nwb_future_vision.pptx
+++ b/images/2017_11_ruebel_sfn_nwb_future_vision.pptx
@@ -5,18 +5,19 @@
     <p:sldMasterId id="2147483648" r:id="rId1"/>
   </p:sldMasterIdLst>
   <p:notesMasterIdLst>
-    <p:notesMasterId r:id="rId11"/>
+    <p:notesMasterId r:id="rId12"/>
   </p:notesMasterIdLst>
   <p:sldIdLst>
     <p:sldId id="265" r:id="rId2"/>
     <p:sldId id="266" r:id="rId3"/>
-    <p:sldId id="264" r:id="rId4"/>
-    <p:sldId id="258" r:id="rId5"/>
-    <p:sldId id="262" r:id="rId6"/>
-    <p:sldId id="263" r:id="rId7"/>
-    <p:sldId id="257" r:id="rId8"/>
-    <p:sldId id="260" r:id="rId9"/>
-    <p:sldId id="259" r:id="rId10"/>
+    <p:sldId id="267" r:id="rId4"/>
+    <p:sldId id="264" r:id="rId5"/>
+    <p:sldId id="258" r:id="rId6"/>
+    <p:sldId id="262" r:id="rId7"/>
+    <p:sldId id="263" r:id="rId8"/>
+    <p:sldId id="257" r:id="rId9"/>
+    <p:sldId id="260" r:id="rId10"/>
+    <p:sldId id="259" r:id="rId11"/>
   </p:sldIdLst>
   <p:sldSz cx="13716000" cy="13716000"/>
   <p:notesSz cx="6858000" cy="9144000"/>
@@ -4169,7 +4170,7 @@
           <a:p>
             <a:fld id="{BE05CF3C-7F5D-5D4C-90E4-2D761B03BC4B}" type="datetimeFigureOut">
               <a:rPr lang="en-US" smtClean="0"/>
-              <a:t>4/13/18</a:t>
+              <a:t>9/18/19</a:t>
             </a:fld>
             <a:endParaRPr lang="en-US"/>
           </a:p>
@@ -4502,7 +4503,7 @@
           <a:p>
             <a:fld id="{AEA300B7-6535-6042-AE41-B6EF46C2742C}" type="slidenum">
               <a:rPr lang="en-US" smtClean="0"/>
-              <a:t>3</a:t>
+              <a:t>4</a:t>
             </a:fld>
             <a:endParaRPr lang="en-US"/>
           </a:p>
@@ -4586,7 +4587,7 @@
           <a:p>
             <a:fld id="{AEA300B7-6535-6042-AE41-B6EF46C2742C}" type="slidenum">
               <a:rPr lang="en-US" smtClean="0"/>
-              <a:t>5</a:t>
+              <a:t>6</a:t>
             </a:fld>
             <a:endParaRPr lang="en-US"/>
           </a:p>
@@ -4670,7 +4671,7 @@
           <a:p>
             <a:fld id="{AEA300B7-6535-6042-AE41-B6EF46C2742C}" type="slidenum">
               <a:rPr lang="en-US" smtClean="0"/>
-              <a:t>6</a:t>
+              <a:t>7</a:t>
             </a:fld>
             <a:endParaRPr lang="en-US"/>
           </a:p>
@@ -4870,7 +4871,7 @@
           <a:p>
             <a:fld id="{2913C170-B25F-0548-9B6A-46272D39EBDA}" type="datetimeFigureOut">
               <a:rPr lang="en-US" smtClean="0"/>
-              <a:t>4/13/18</a:t>
+              <a:t>9/18/19</a:t>
             </a:fld>
             <a:endParaRPr lang="en-US"/>
           </a:p>
@@ -5040,7 +5041,7 @@
           <a:p>
             <a:fld id="{2913C170-B25F-0548-9B6A-46272D39EBDA}" type="datetimeFigureOut">
               <a:rPr lang="en-US" smtClean="0"/>
-              <a:t>4/13/18</a:t>
+              <a:t>9/18/19</a:t>
             </a:fld>
             <a:endParaRPr lang="en-US"/>
           </a:p>
@@ -5220,7 +5221,7 @@
           <a:p>
             <a:fld id="{2913C170-B25F-0548-9B6A-46272D39EBDA}" type="datetimeFigureOut">
               <a:rPr lang="en-US" smtClean="0"/>
-              <a:t>4/13/18</a:t>
+              <a:t>9/18/19</a:t>
             </a:fld>
             <a:endParaRPr lang="en-US"/>
           </a:p>
@@ -5390,7 +5391,7 @@
           <a:p>
             <a:fld id="{2913C170-B25F-0548-9B6A-46272D39EBDA}" type="datetimeFigureOut">
               <a:rPr lang="en-US" smtClean="0"/>
-              <a:t>4/13/18</a:t>
+              <a:t>9/18/19</a:t>
             </a:fld>
             <a:endParaRPr lang="en-US"/>
           </a:p>
@@ -5636,7 +5637,7 @@
           <a:p>
             <a:fld id="{2913C170-B25F-0548-9B6A-46272D39EBDA}" type="datetimeFigureOut">
               <a:rPr lang="en-US" smtClean="0"/>
-              <a:t>4/13/18</a:t>
+              <a:t>9/18/19</a:t>
             </a:fld>
             <a:endParaRPr lang="en-US"/>
           </a:p>
@@ -5924,7 +5925,7 @@
           <a:p>
             <a:fld id="{2913C170-B25F-0548-9B6A-46272D39EBDA}" type="datetimeFigureOut">
               <a:rPr lang="en-US" smtClean="0"/>
-              <a:t>4/13/18</a:t>
+              <a:t>9/18/19</a:t>
             </a:fld>
             <a:endParaRPr lang="en-US"/>
           </a:p>
@@ -6351,7 +6352,7 @@
           <a:p>
             <a:fld id="{2913C170-B25F-0548-9B6A-46272D39EBDA}" type="datetimeFigureOut">
               <a:rPr lang="en-US" smtClean="0"/>
-              <a:t>4/13/18</a:t>
+              <a:t>9/18/19</a:t>
             </a:fld>
             <a:endParaRPr lang="en-US"/>
           </a:p>
@@ -6469,7 +6470,7 @@
           <a:p>
             <a:fld id="{2913C170-B25F-0548-9B6A-46272D39EBDA}" type="datetimeFigureOut">
               <a:rPr lang="en-US" smtClean="0"/>
-              <a:t>4/13/18</a:t>
+              <a:t>9/18/19</a:t>
             </a:fld>
             <a:endParaRPr lang="en-US"/>
           </a:p>
@@ -6564,7 +6565,7 @@
           <a:p>
             <a:fld id="{2913C170-B25F-0548-9B6A-46272D39EBDA}" type="datetimeFigureOut">
               <a:rPr lang="en-US" smtClean="0"/>
-              <a:t>4/13/18</a:t>
+              <a:t>9/18/19</a:t>
             </a:fld>
             <a:endParaRPr lang="en-US"/>
           </a:p>
@@ -6841,7 +6842,7 @@
           <a:p>
             <a:fld id="{2913C170-B25F-0548-9B6A-46272D39EBDA}" type="datetimeFigureOut">
               <a:rPr lang="en-US" smtClean="0"/>
-              <a:t>4/13/18</a:t>
+              <a:t>9/18/19</a:t>
             </a:fld>
             <a:endParaRPr lang="en-US"/>
           </a:p>
@@ -7094,7 +7095,7 @@
           <a:p>
             <a:fld id="{2913C170-B25F-0548-9B6A-46272D39EBDA}" type="datetimeFigureOut">
               <a:rPr lang="en-US" smtClean="0"/>
-              <a:t>4/13/18</a:t>
+              <a:t>9/18/19</a:t>
             </a:fld>
             <a:endParaRPr lang="en-US"/>
           </a:p>
@@ -7307,7 +7308,7 @@
           <a:p>
             <a:fld id="{2913C170-B25F-0548-9B6A-46272D39EBDA}" type="datetimeFigureOut">
               <a:rPr lang="en-US" smtClean="0"/>
-              <a:t>4/13/18</a:t>
+              <a:t>9/18/19</a:t>
             </a:fld>
             <a:endParaRPr lang="en-US"/>
           </a:p>
@@ -7666,6 +7667,5513 @@
 </file>
 
 <file path=ppt/slides/slide1.xml><?xml version="1.0" encoding="utf-8"?>
+<p:sld xmlns:a="http://schemas.openxmlformats.org/drawingml/2006/main" xmlns:r="http://schemas.openxmlformats.org/officeDocument/2006/relationships" xmlns:p="http://schemas.openxmlformats.org/presentationml/2006/main">
+  <p:cSld>
+    <p:spTree>
+      <p:nvGrpSpPr>
+        <p:cNvPr id="1" name=""/>
+        <p:cNvGrpSpPr/>
+        <p:nvPr/>
+      </p:nvGrpSpPr>
+      <p:grpSpPr>
+        <a:xfrm>
+          <a:off x="0" y="0"/>
+          <a:ext cx="0" cy="0"/>
+          <a:chOff x="0" y="0"/>
+          <a:chExt cx="0" cy="0"/>
+        </a:xfrm>
+      </p:grpSpPr>
+      <p:sp>
+        <p:nvSpPr>
+          <p:cNvPr id="5" name="Rectangle 4"/>
+          <p:cNvSpPr/>
+          <p:nvPr/>
+        </p:nvSpPr>
+        <p:spPr>
+          <a:xfrm>
+            <a:off x="333912" y="-89796"/>
+            <a:ext cx="13195702" cy="707886"/>
+          </a:xfrm>
+          <a:prstGeom prst="rect">
+            <a:avLst/>
+          </a:prstGeom>
+        </p:spPr>
+        <p:txBody>
+          <a:bodyPr wrap="square">
+            <a:spAutoFit/>
+          </a:bodyPr>
+          <a:lstStyle/>
+          <a:p>
+            <a:pPr algn="ctr"/>
+            <a:r>
+              <a:rPr lang="en-US" sz="2000" b="1" dirty="0" smtClean="0">
+                <a:solidFill>
+                  <a:srgbClr val="052B48"/>
+                </a:solidFill>
+              </a:rPr>
+              <a:t>Vision and future directions</a:t>
+            </a:r>
+          </a:p>
+          <a:p>
+            <a:pPr algn="ctr"/>
+            <a:r>
+              <a:rPr lang="en-US" sz="2000" b="1" dirty="0" smtClean="0">
+                <a:solidFill>
+                  <a:srgbClr val="052B48"/>
+                </a:solidFill>
+              </a:rPr>
+              <a:t>NWB:N technologies at the heart of the </a:t>
+            </a:r>
+            <a:r>
+              <a:rPr lang="en-US" sz="2000" b="1" dirty="0" err="1" smtClean="0">
+                <a:solidFill>
+                  <a:srgbClr val="052B48"/>
+                </a:solidFill>
+              </a:rPr>
+              <a:t>neurodata</a:t>
+            </a:r>
+            <a:r>
+              <a:rPr lang="en-US" sz="2000" b="1" dirty="0" smtClean="0">
+                <a:solidFill>
+                  <a:srgbClr val="052B48"/>
+                </a:solidFill>
+              </a:rPr>
+              <a:t> lifecycle</a:t>
+            </a:r>
+          </a:p>
+        </p:txBody>
+      </p:sp>
+      <p:grpSp>
+        <p:nvGrpSpPr>
+          <p:cNvPr id="2" name="Group 1"/>
+          <p:cNvGrpSpPr/>
+          <p:nvPr/>
+        </p:nvGrpSpPr>
+        <p:grpSpPr>
+          <a:xfrm>
+            <a:off x="314595" y="665695"/>
+            <a:ext cx="13104387" cy="13055441"/>
+            <a:chOff x="314595" y="665695"/>
+            <a:chExt cx="13104387" cy="13055441"/>
+          </a:xfrm>
+        </p:grpSpPr>
+        <p:grpSp>
+          <p:nvGrpSpPr>
+            <p:cNvPr id="6" name="Group 5"/>
+            <p:cNvGrpSpPr/>
+            <p:nvPr/>
+          </p:nvGrpSpPr>
+          <p:grpSpPr>
+            <a:xfrm>
+              <a:off x="314595" y="665695"/>
+              <a:ext cx="13104387" cy="13055441"/>
+              <a:chOff x="241260" y="118552"/>
+              <a:chExt cx="13104387" cy="13055441"/>
+            </a:xfrm>
+          </p:grpSpPr>
+          <p:sp>
+            <p:nvSpPr>
+              <p:cNvPr id="7" name="Freeform 6"/>
+              <p:cNvSpPr/>
+              <p:nvPr/>
+            </p:nvSpPr>
+            <p:spPr>
+              <a:xfrm rot="10800000">
+                <a:off x="6689812" y="6646744"/>
+                <a:ext cx="5935322" cy="4137120"/>
+              </a:xfrm>
+              <a:custGeom>
+                <a:avLst/>
+                <a:gdLst>
+                  <a:gd name="connsiteX0" fmla="*/ 50300 w 5935322"/>
+                  <a:gd name="connsiteY0" fmla="*/ 4111971 h 4137120"/>
+                  <a:gd name="connsiteX1" fmla="*/ 5935322 w 5935322"/>
+                  <a:gd name="connsiteY1" fmla="*/ 4137120 h 4137120"/>
+                  <a:gd name="connsiteX2" fmla="*/ 1785627 w 5935322"/>
+                  <a:gd name="connsiteY2" fmla="*/ 0 h 4137120"/>
+                  <a:gd name="connsiteX3" fmla="*/ 880239 w 5935322"/>
+                  <a:gd name="connsiteY3" fmla="*/ 1207184 h 4137120"/>
+                  <a:gd name="connsiteX4" fmla="*/ 289222 w 5935322"/>
+                  <a:gd name="connsiteY4" fmla="*/ 2540117 h 4137120"/>
+                  <a:gd name="connsiteX5" fmla="*/ 0 w 5935322"/>
+                  <a:gd name="connsiteY5" fmla="*/ 3533528 h 4137120"/>
+                  <a:gd name="connsiteX6" fmla="*/ 62875 w 5935322"/>
+                  <a:gd name="connsiteY6" fmla="*/ 4049097 h 4137120"/>
+                </a:gdLst>
+                <a:ahLst/>
+                <a:cxnLst>
+                  <a:cxn ang="0">
+                    <a:pos x="connsiteX0" y="connsiteY0"/>
+                  </a:cxn>
+                  <a:cxn ang="0">
+                    <a:pos x="connsiteX1" y="connsiteY1"/>
+                  </a:cxn>
+                  <a:cxn ang="0">
+                    <a:pos x="connsiteX2" y="connsiteY2"/>
+                  </a:cxn>
+                  <a:cxn ang="0">
+                    <a:pos x="connsiteX3" y="connsiteY3"/>
+                  </a:cxn>
+                  <a:cxn ang="0">
+                    <a:pos x="connsiteX4" y="connsiteY4"/>
+                  </a:cxn>
+                  <a:cxn ang="0">
+                    <a:pos x="connsiteX5" y="connsiteY5"/>
+                  </a:cxn>
+                  <a:cxn ang="0">
+                    <a:pos x="connsiteX6" y="connsiteY6"/>
+                  </a:cxn>
+                </a:cxnLst>
+                <a:rect l="l" t="t" r="r" b="b"/>
+                <a:pathLst>
+                  <a:path w="5935322" h="4137120">
+                    <a:moveTo>
+                      <a:pt x="50300" y="4111971"/>
+                    </a:moveTo>
+                    <a:lnTo>
+                      <a:pt x="5935322" y="4137120"/>
+                    </a:lnTo>
+                    <a:lnTo>
+                      <a:pt x="1785627" y="0"/>
+                    </a:lnTo>
+                    <a:lnTo>
+                      <a:pt x="880239" y="1207184"/>
+                    </a:lnTo>
+                    <a:lnTo>
+                      <a:pt x="289222" y="2540117"/>
+                    </a:lnTo>
+                    <a:lnTo>
+                      <a:pt x="0" y="3533528"/>
+                    </a:lnTo>
+                    <a:lnTo>
+                      <a:pt x="62875" y="4049097"/>
+                    </a:lnTo>
+                  </a:path>
+                </a:pathLst>
+              </a:custGeom>
+              <a:gradFill flip="none" rotWithShape="1">
+                <a:gsLst>
+                  <a:gs pos="57000">
+                    <a:srgbClr val="5CB46F"/>
+                  </a:gs>
+                  <a:gs pos="0">
+                    <a:srgbClr val="FFFFFF"/>
+                  </a:gs>
+                </a:gsLst>
+                <a:lin ang="1740000" scaled="0"/>
+                <a:tileRect/>
+              </a:gradFill>
+              <a:ln>
+                <a:noFill/>
+              </a:ln>
+            </p:spPr>
+            <p:style>
+              <a:lnRef idx="2">
+                <a:schemeClr val="accent1"/>
+              </a:lnRef>
+              <a:fillRef idx="0">
+                <a:schemeClr val="accent1"/>
+              </a:fillRef>
+              <a:effectRef idx="1">
+                <a:schemeClr val="accent1"/>
+              </a:effectRef>
+              <a:fontRef idx="minor">
+                <a:schemeClr val="tx1"/>
+              </a:fontRef>
+            </p:style>
+            <p:txBody>
+              <a:bodyPr rtlCol="0" anchor="ctr"/>
+              <a:lstStyle/>
+              <a:p>
+                <a:pPr algn="ctr"/>
+                <a:endParaRPr lang="en-US"/>
+              </a:p>
+            </p:txBody>
+          </p:sp>
+          <p:sp>
+            <p:nvSpPr>
+              <p:cNvPr id="8" name="Freeform 7"/>
+              <p:cNvSpPr/>
+              <p:nvPr/>
+            </p:nvSpPr>
+            <p:spPr>
+              <a:xfrm rot="13513081">
+                <a:off x="4415267" y="8114964"/>
+                <a:ext cx="5935322" cy="4137120"/>
+              </a:xfrm>
+              <a:custGeom>
+                <a:avLst/>
+                <a:gdLst>
+                  <a:gd name="connsiteX0" fmla="*/ 50300 w 5935322"/>
+                  <a:gd name="connsiteY0" fmla="*/ 4111971 h 4137120"/>
+                  <a:gd name="connsiteX1" fmla="*/ 5935322 w 5935322"/>
+                  <a:gd name="connsiteY1" fmla="*/ 4137120 h 4137120"/>
+                  <a:gd name="connsiteX2" fmla="*/ 1785627 w 5935322"/>
+                  <a:gd name="connsiteY2" fmla="*/ 0 h 4137120"/>
+                  <a:gd name="connsiteX3" fmla="*/ 880239 w 5935322"/>
+                  <a:gd name="connsiteY3" fmla="*/ 1207184 h 4137120"/>
+                  <a:gd name="connsiteX4" fmla="*/ 289222 w 5935322"/>
+                  <a:gd name="connsiteY4" fmla="*/ 2540117 h 4137120"/>
+                  <a:gd name="connsiteX5" fmla="*/ 0 w 5935322"/>
+                  <a:gd name="connsiteY5" fmla="*/ 3533528 h 4137120"/>
+                  <a:gd name="connsiteX6" fmla="*/ 62875 w 5935322"/>
+                  <a:gd name="connsiteY6" fmla="*/ 4049097 h 4137120"/>
+                </a:gdLst>
+                <a:ahLst/>
+                <a:cxnLst>
+                  <a:cxn ang="0">
+                    <a:pos x="connsiteX0" y="connsiteY0"/>
+                  </a:cxn>
+                  <a:cxn ang="0">
+                    <a:pos x="connsiteX1" y="connsiteY1"/>
+                  </a:cxn>
+                  <a:cxn ang="0">
+                    <a:pos x="connsiteX2" y="connsiteY2"/>
+                  </a:cxn>
+                  <a:cxn ang="0">
+                    <a:pos x="connsiteX3" y="connsiteY3"/>
+                  </a:cxn>
+                  <a:cxn ang="0">
+                    <a:pos x="connsiteX4" y="connsiteY4"/>
+                  </a:cxn>
+                  <a:cxn ang="0">
+                    <a:pos x="connsiteX5" y="connsiteY5"/>
+                  </a:cxn>
+                  <a:cxn ang="0">
+                    <a:pos x="connsiteX6" y="connsiteY6"/>
+                  </a:cxn>
+                </a:cxnLst>
+                <a:rect l="l" t="t" r="r" b="b"/>
+                <a:pathLst>
+                  <a:path w="5935322" h="4137120">
+                    <a:moveTo>
+                      <a:pt x="50300" y="4111971"/>
+                    </a:moveTo>
+                    <a:lnTo>
+                      <a:pt x="5935322" y="4137120"/>
+                    </a:lnTo>
+                    <a:lnTo>
+                      <a:pt x="1785627" y="0"/>
+                    </a:lnTo>
+                    <a:lnTo>
+                      <a:pt x="880239" y="1207184"/>
+                    </a:lnTo>
+                    <a:lnTo>
+                      <a:pt x="289222" y="2540117"/>
+                    </a:lnTo>
+                    <a:lnTo>
+                      <a:pt x="0" y="3533528"/>
+                    </a:lnTo>
+                    <a:lnTo>
+                      <a:pt x="62875" y="4049097"/>
+                    </a:lnTo>
+                  </a:path>
+                </a:pathLst>
+              </a:custGeom>
+              <a:gradFill flip="none" rotWithShape="1">
+                <a:gsLst>
+                  <a:gs pos="57000">
+                    <a:srgbClr val="5DB195"/>
+                  </a:gs>
+                  <a:gs pos="0">
+                    <a:srgbClr val="FFFFFF"/>
+                  </a:gs>
+                </a:gsLst>
+                <a:lin ang="1740000" scaled="0"/>
+                <a:tileRect/>
+              </a:gradFill>
+              <a:ln>
+                <a:noFill/>
+              </a:ln>
+              <a:effectLst/>
+            </p:spPr>
+            <p:style>
+              <a:lnRef idx="2">
+                <a:schemeClr val="accent1"/>
+              </a:lnRef>
+              <a:fillRef idx="0">
+                <a:schemeClr val="accent1"/>
+              </a:fillRef>
+              <a:effectRef idx="1">
+                <a:schemeClr val="accent1"/>
+              </a:effectRef>
+              <a:fontRef idx="minor">
+                <a:schemeClr val="tx1"/>
+              </a:fontRef>
+            </p:style>
+            <p:txBody>
+              <a:bodyPr rtlCol="0" anchor="ctr"/>
+              <a:lstStyle/>
+              <a:p>
+                <a:pPr algn="ctr"/>
+                <a:endParaRPr lang="en-US"/>
+              </a:p>
+            </p:txBody>
+          </p:sp>
+          <p:sp>
+            <p:nvSpPr>
+              <p:cNvPr id="9" name="Freeform 8"/>
+              <p:cNvSpPr/>
+              <p:nvPr/>
+            </p:nvSpPr>
+            <p:spPr>
+              <a:xfrm rot="16200000">
+                <a:off x="1685027" y="7673880"/>
+                <a:ext cx="5935322" cy="4137120"/>
+              </a:xfrm>
+              <a:custGeom>
+                <a:avLst/>
+                <a:gdLst>
+                  <a:gd name="connsiteX0" fmla="*/ 50300 w 5935322"/>
+                  <a:gd name="connsiteY0" fmla="*/ 4111971 h 4137120"/>
+                  <a:gd name="connsiteX1" fmla="*/ 5935322 w 5935322"/>
+                  <a:gd name="connsiteY1" fmla="*/ 4137120 h 4137120"/>
+                  <a:gd name="connsiteX2" fmla="*/ 1785627 w 5935322"/>
+                  <a:gd name="connsiteY2" fmla="*/ 0 h 4137120"/>
+                  <a:gd name="connsiteX3" fmla="*/ 880239 w 5935322"/>
+                  <a:gd name="connsiteY3" fmla="*/ 1207184 h 4137120"/>
+                  <a:gd name="connsiteX4" fmla="*/ 289222 w 5935322"/>
+                  <a:gd name="connsiteY4" fmla="*/ 2540117 h 4137120"/>
+                  <a:gd name="connsiteX5" fmla="*/ 0 w 5935322"/>
+                  <a:gd name="connsiteY5" fmla="*/ 3533528 h 4137120"/>
+                  <a:gd name="connsiteX6" fmla="*/ 62875 w 5935322"/>
+                  <a:gd name="connsiteY6" fmla="*/ 4049097 h 4137120"/>
+                </a:gdLst>
+                <a:ahLst/>
+                <a:cxnLst>
+                  <a:cxn ang="0">
+                    <a:pos x="connsiteX0" y="connsiteY0"/>
+                  </a:cxn>
+                  <a:cxn ang="0">
+                    <a:pos x="connsiteX1" y="connsiteY1"/>
+                  </a:cxn>
+                  <a:cxn ang="0">
+                    <a:pos x="connsiteX2" y="connsiteY2"/>
+                  </a:cxn>
+                  <a:cxn ang="0">
+                    <a:pos x="connsiteX3" y="connsiteY3"/>
+                  </a:cxn>
+                  <a:cxn ang="0">
+                    <a:pos x="connsiteX4" y="connsiteY4"/>
+                  </a:cxn>
+                  <a:cxn ang="0">
+                    <a:pos x="connsiteX5" y="connsiteY5"/>
+                  </a:cxn>
+                  <a:cxn ang="0">
+                    <a:pos x="connsiteX6" y="connsiteY6"/>
+                  </a:cxn>
+                </a:cxnLst>
+                <a:rect l="l" t="t" r="r" b="b"/>
+                <a:pathLst>
+                  <a:path w="5935322" h="4137120">
+                    <a:moveTo>
+                      <a:pt x="50300" y="4111971"/>
+                    </a:moveTo>
+                    <a:lnTo>
+                      <a:pt x="5935322" y="4137120"/>
+                    </a:lnTo>
+                    <a:lnTo>
+                      <a:pt x="1785627" y="0"/>
+                    </a:lnTo>
+                    <a:lnTo>
+                      <a:pt x="880239" y="1207184"/>
+                    </a:lnTo>
+                    <a:lnTo>
+                      <a:pt x="289222" y="2540117"/>
+                    </a:lnTo>
+                    <a:lnTo>
+                      <a:pt x="0" y="3533528"/>
+                    </a:lnTo>
+                    <a:lnTo>
+                      <a:pt x="62875" y="4049097"/>
+                    </a:lnTo>
+                  </a:path>
+                </a:pathLst>
+              </a:custGeom>
+              <a:gradFill flip="none" rotWithShape="1">
+                <a:gsLst>
+                  <a:gs pos="57000">
+                    <a:srgbClr val="5FA4AD"/>
+                  </a:gs>
+                  <a:gs pos="0">
+                    <a:srgbClr val="FFFFFF"/>
+                  </a:gs>
+                </a:gsLst>
+                <a:lin ang="1740000" scaled="0"/>
+                <a:tileRect/>
+              </a:gradFill>
+              <a:ln>
+                <a:noFill/>
+              </a:ln>
+              <a:effectLst/>
+            </p:spPr>
+            <p:style>
+              <a:lnRef idx="2">
+                <a:schemeClr val="accent1"/>
+              </a:lnRef>
+              <a:fillRef idx="0">
+                <a:schemeClr val="accent1"/>
+              </a:fillRef>
+              <a:effectRef idx="1">
+                <a:schemeClr val="accent1"/>
+              </a:effectRef>
+              <a:fontRef idx="minor">
+                <a:schemeClr val="tx1"/>
+              </a:fontRef>
+            </p:style>
+            <p:txBody>
+              <a:bodyPr rtlCol="0" anchor="ctr"/>
+              <a:lstStyle/>
+              <a:p>
+                <a:pPr algn="ctr"/>
+                <a:endParaRPr lang="en-US"/>
+              </a:p>
+            </p:txBody>
+          </p:sp>
+          <p:sp>
+            <p:nvSpPr>
+              <p:cNvPr id="10" name="Freeform 9"/>
+              <p:cNvSpPr/>
+              <p:nvPr/>
+            </p:nvSpPr>
+            <p:spPr>
+              <a:xfrm rot="18908369">
+                <a:off x="335149" y="5142789"/>
+                <a:ext cx="5935322" cy="4225917"/>
+              </a:xfrm>
+              <a:custGeom>
+                <a:avLst/>
+                <a:gdLst>
+                  <a:gd name="connsiteX0" fmla="*/ 50300 w 5935322"/>
+                  <a:gd name="connsiteY0" fmla="*/ 4111971 h 4137120"/>
+                  <a:gd name="connsiteX1" fmla="*/ 5935322 w 5935322"/>
+                  <a:gd name="connsiteY1" fmla="*/ 4137120 h 4137120"/>
+                  <a:gd name="connsiteX2" fmla="*/ 1785627 w 5935322"/>
+                  <a:gd name="connsiteY2" fmla="*/ 0 h 4137120"/>
+                  <a:gd name="connsiteX3" fmla="*/ 880239 w 5935322"/>
+                  <a:gd name="connsiteY3" fmla="*/ 1207184 h 4137120"/>
+                  <a:gd name="connsiteX4" fmla="*/ 289222 w 5935322"/>
+                  <a:gd name="connsiteY4" fmla="*/ 2540117 h 4137120"/>
+                  <a:gd name="connsiteX5" fmla="*/ 0 w 5935322"/>
+                  <a:gd name="connsiteY5" fmla="*/ 3533528 h 4137120"/>
+                  <a:gd name="connsiteX6" fmla="*/ 62875 w 5935322"/>
+                  <a:gd name="connsiteY6" fmla="*/ 4049097 h 4137120"/>
+                  <a:gd name="connsiteX0" fmla="*/ 43876 w 5935322"/>
+                  <a:gd name="connsiteY0" fmla="*/ 4225917 h 4225917"/>
+                  <a:gd name="connsiteX1" fmla="*/ 5935322 w 5935322"/>
+                  <a:gd name="connsiteY1" fmla="*/ 4137120 h 4225917"/>
+                  <a:gd name="connsiteX2" fmla="*/ 1785627 w 5935322"/>
+                  <a:gd name="connsiteY2" fmla="*/ 0 h 4225917"/>
+                  <a:gd name="connsiteX3" fmla="*/ 880239 w 5935322"/>
+                  <a:gd name="connsiteY3" fmla="*/ 1207184 h 4225917"/>
+                  <a:gd name="connsiteX4" fmla="*/ 289222 w 5935322"/>
+                  <a:gd name="connsiteY4" fmla="*/ 2540117 h 4225917"/>
+                  <a:gd name="connsiteX5" fmla="*/ 0 w 5935322"/>
+                  <a:gd name="connsiteY5" fmla="*/ 3533528 h 4225917"/>
+                  <a:gd name="connsiteX6" fmla="*/ 62875 w 5935322"/>
+                  <a:gd name="connsiteY6" fmla="*/ 4049097 h 4225917"/>
+                </a:gdLst>
+                <a:ahLst/>
+                <a:cxnLst>
+                  <a:cxn ang="0">
+                    <a:pos x="connsiteX0" y="connsiteY0"/>
+                  </a:cxn>
+                  <a:cxn ang="0">
+                    <a:pos x="connsiteX1" y="connsiteY1"/>
+                  </a:cxn>
+                  <a:cxn ang="0">
+                    <a:pos x="connsiteX2" y="connsiteY2"/>
+                  </a:cxn>
+                  <a:cxn ang="0">
+                    <a:pos x="connsiteX3" y="connsiteY3"/>
+                  </a:cxn>
+                  <a:cxn ang="0">
+                    <a:pos x="connsiteX4" y="connsiteY4"/>
+                  </a:cxn>
+                  <a:cxn ang="0">
+                    <a:pos x="connsiteX5" y="connsiteY5"/>
+                  </a:cxn>
+                  <a:cxn ang="0">
+                    <a:pos x="connsiteX6" y="connsiteY6"/>
+                  </a:cxn>
+                </a:cxnLst>
+                <a:rect l="l" t="t" r="r" b="b"/>
+                <a:pathLst>
+                  <a:path w="5935322" h="4225917">
+                    <a:moveTo>
+                      <a:pt x="43876" y="4225917"/>
+                    </a:moveTo>
+                    <a:lnTo>
+                      <a:pt x="5935322" y="4137120"/>
+                    </a:lnTo>
+                    <a:lnTo>
+                      <a:pt x="1785627" y="0"/>
+                    </a:lnTo>
+                    <a:lnTo>
+                      <a:pt x="880239" y="1207184"/>
+                    </a:lnTo>
+                    <a:lnTo>
+                      <a:pt x="289222" y="2540117"/>
+                    </a:lnTo>
+                    <a:lnTo>
+                      <a:pt x="0" y="3533528"/>
+                    </a:lnTo>
+                    <a:lnTo>
+                      <a:pt x="62875" y="4049097"/>
+                    </a:lnTo>
+                  </a:path>
+                </a:pathLst>
+              </a:custGeom>
+              <a:gradFill flip="none" rotWithShape="1">
+                <a:gsLst>
+                  <a:gs pos="57000">
+                    <a:srgbClr val="6181A9"/>
+                  </a:gs>
+                  <a:gs pos="0">
+                    <a:srgbClr val="FFFFFF"/>
+                  </a:gs>
+                </a:gsLst>
+                <a:lin ang="1740000" scaled="0"/>
+                <a:tileRect/>
+              </a:gradFill>
+              <a:ln>
+                <a:noFill/>
+              </a:ln>
+              <a:effectLst/>
+            </p:spPr>
+            <p:style>
+              <a:lnRef idx="2">
+                <a:schemeClr val="accent1"/>
+              </a:lnRef>
+              <a:fillRef idx="0">
+                <a:schemeClr val="accent1"/>
+              </a:fillRef>
+              <a:effectRef idx="1">
+                <a:schemeClr val="accent1"/>
+              </a:effectRef>
+              <a:fontRef idx="minor">
+                <a:schemeClr val="tx1"/>
+              </a:fontRef>
+            </p:style>
+            <p:txBody>
+              <a:bodyPr rtlCol="0" anchor="ctr"/>
+              <a:lstStyle/>
+              <a:p>
+                <a:pPr algn="ctr"/>
+                <a:endParaRPr lang="en-US"/>
+              </a:p>
+            </p:txBody>
+          </p:sp>
+          <p:sp>
+            <p:nvSpPr>
+              <p:cNvPr id="11" name="Freeform 10"/>
+              <p:cNvSpPr/>
+              <p:nvPr/>
+            </p:nvSpPr>
+            <p:spPr>
+              <a:xfrm rot="8100282">
+                <a:off x="7467725" y="3969818"/>
+                <a:ext cx="5871780" cy="4069291"/>
+              </a:xfrm>
+              <a:custGeom>
+                <a:avLst/>
+                <a:gdLst>
+                  <a:gd name="connsiteX0" fmla="*/ 50300 w 5935322"/>
+                  <a:gd name="connsiteY0" fmla="*/ 4111971 h 4137120"/>
+                  <a:gd name="connsiteX1" fmla="*/ 5935322 w 5935322"/>
+                  <a:gd name="connsiteY1" fmla="*/ 4137120 h 4137120"/>
+                  <a:gd name="connsiteX2" fmla="*/ 1785627 w 5935322"/>
+                  <a:gd name="connsiteY2" fmla="*/ 0 h 4137120"/>
+                  <a:gd name="connsiteX3" fmla="*/ 880239 w 5935322"/>
+                  <a:gd name="connsiteY3" fmla="*/ 1207184 h 4137120"/>
+                  <a:gd name="connsiteX4" fmla="*/ 289222 w 5935322"/>
+                  <a:gd name="connsiteY4" fmla="*/ 2540117 h 4137120"/>
+                  <a:gd name="connsiteX5" fmla="*/ 0 w 5935322"/>
+                  <a:gd name="connsiteY5" fmla="*/ 3533528 h 4137120"/>
+                  <a:gd name="connsiteX6" fmla="*/ 62875 w 5935322"/>
+                  <a:gd name="connsiteY6" fmla="*/ 4049097 h 4137120"/>
+                </a:gdLst>
+                <a:ahLst/>
+                <a:cxnLst>
+                  <a:cxn ang="0">
+                    <a:pos x="connsiteX0" y="connsiteY0"/>
+                  </a:cxn>
+                  <a:cxn ang="0">
+                    <a:pos x="connsiteX1" y="connsiteY1"/>
+                  </a:cxn>
+                  <a:cxn ang="0">
+                    <a:pos x="connsiteX2" y="connsiteY2"/>
+                  </a:cxn>
+                  <a:cxn ang="0">
+                    <a:pos x="connsiteX3" y="connsiteY3"/>
+                  </a:cxn>
+                  <a:cxn ang="0">
+                    <a:pos x="connsiteX4" y="connsiteY4"/>
+                  </a:cxn>
+                  <a:cxn ang="0">
+                    <a:pos x="connsiteX5" y="connsiteY5"/>
+                  </a:cxn>
+                  <a:cxn ang="0">
+                    <a:pos x="connsiteX6" y="connsiteY6"/>
+                  </a:cxn>
+                </a:cxnLst>
+                <a:rect l="l" t="t" r="r" b="b"/>
+                <a:pathLst>
+                  <a:path w="5935322" h="4137120">
+                    <a:moveTo>
+                      <a:pt x="50300" y="4111971"/>
+                    </a:moveTo>
+                    <a:lnTo>
+                      <a:pt x="5935322" y="4137120"/>
+                    </a:lnTo>
+                    <a:lnTo>
+                      <a:pt x="1785627" y="0"/>
+                    </a:lnTo>
+                    <a:lnTo>
+                      <a:pt x="880239" y="1207184"/>
+                    </a:lnTo>
+                    <a:lnTo>
+                      <a:pt x="289222" y="2540117"/>
+                    </a:lnTo>
+                    <a:lnTo>
+                      <a:pt x="0" y="3533528"/>
+                    </a:lnTo>
+                    <a:lnTo>
+                      <a:pt x="62875" y="4049097"/>
+                    </a:lnTo>
+                  </a:path>
+                </a:pathLst>
+              </a:custGeom>
+              <a:gradFill flip="none" rotWithShape="1">
+                <a:gsLst>
+                  <a:gs pos="57000">
+                    <a:srgbClr val="70B85A"/>
+                  </a:gs>
+                  <a:gs pos="0">
+                    <a:srgbClr val="FFFFFF"/>
+                  </a:gs>
+                </a:gsLst>
+                <a:lin ang="1740000" scaled="0"/>
+                <a:tileRect/>
+              </a:gradFill>
+              <a:ln>
+                <a:noFill/>
+              </a:ln>
+            </p:spPr>
+            <p:style>
+              <a:lnRef idx="2">
+                <a:schemeClr val="accent1"/>
+              </a:lnRef>
+              <a:fillRef idx="0">
+                <a:schemeClr val="accent1"/>
+              </a:fillRef>
+              <a:effectRef idx="1">
+                <a:schemeClr val="accent1"/>
+              </a:effectRef>
+              <a:fontRef idx="minor">
+                <a:schemeClr val="tx1"/>
+              </a:fontRef>
+            </p:style>
+            <p:txBody>
+              <a:bodyPr rtlCol="0" anchor="ctr"/>
+              <a:lstStyle/>
+              <a:p>
+                <a:pPr algn="ctr"/>
+                <a:endParaRPr lang="en-US"/>
+              </a:p>
+            </p:txBody>
+          </p:sp>
+          <p:sp>
+            <p:nvSpPr>
+              <p:cNvPr id="12" name="Freeform 11"/>
+              <p:cNvSpPr/>
+              <p:nvPr/>
+            </p:nvSpPr>
+            <p:spPr>
+              <a:xfrm rot="5400000">
+                <a:off x="5882198" y="1757684"/>
+                <a:ext cx="5871780" cy="4143377"/>
+              </a:xfrm>
+              <a:custGeom>
+                <a:avLst/>
+                <a:gdLst>
+                  <a:gd name="connsiteX0" fmla="*/ 50300 w 5935322"/>
+                  <a:gd name="connsiteY0" fmla="*/ 4111971 h 4137120"/>
+                  <a:gd name="connsiteX1" fmla="*/ 5935322 w 5935322"/>
+                  <a:gd name="connsiteY1" fmla="*/ 4137120 h 4137120"/>
+                  <a:gd name="connsiteX2" fmla="*/ 1785627 w 5935322"/>
+                  <a:gd name="connsiteY2" fmla="*/ 0 h 4137120"/>
+                  <a:gd name="connsiteX3" fmla="*/ 880239 w 5935322"/>
+                  <a:gd name="connsiteY3" fmla="*/ 1207184 h 4137120"/>
+                  <a:gd name="connsiteX4" fmla="*/ 289222 w 5935322"/>
+                  <a:gd name="connsiteY4" fmla="*/ 2540117 h 4137120"/>
+                  <a:gd name="connsiteX5" fmla="*/ 0 w 5935322"/>
+                  <a:gd name="connsiteY5" fmla="*/ 3533528 h 4137120"/>
+                  <a:gd name="connsiteX6" fmla="*/ 62875 w 5935322"/>
+                  <a:gd name="connsiteY6" fmla="*/ 4049097 h 4137120"/>
+                  <a:gd name="connsiteX0" fmla="*/ 50300 w 5935322"/>
+                  <a:gd name="connsiteY0" fmla="*/ 4149631 h 4174780"/>
+                  <a:gd name="connsiteX1" fmla="*/ 5935322 w 5935322"/>
+                  <a:gd name="connsiteY1" fmla="*/ 4174780 h 4174780"/>
+                  <a:gd name="connsiteX2" fmla="*/ 1812375 w 5935322"/>
+                  <a:gd name="connsiteY2" fmla="*/ 0 h 4174780"/>
+                  <a:gd name="connsiteX3" fmla="*/ 880239 w 5935322"/>
+                  <a:gd name="connsiteY3" fmla="*/ 1244844 h 4174780"/>
+                  <a:gd name="connsiteX4" fmla="*/ 289222 w 5935322"/>
+                  <a:gd name="connsiteY4" fmla="*/ 2577777 h 4174780"/>
+                  <a:gd name="connsiteX5" fmla="*/ 0 w 5935322"/>
+                  <a:gd name="connsiteY5" fmla="*/ 3571188 h 4174780"/>
+                  <a:gd name="connsiteX6" fmla="*/ 62875 w 5935322"/>
+                  <a:gd name="connsiteY6" fmla="*/ 4086757 h 4174780"/>
+                  <a:gd name="connsiteX0" fmla="*/ 50300 w 5935322"/>
+                  <a:gd name="connsiteY0" fmla="*/ 4192670 h 4217819"/>
+                  <a:gd name="connsiteX1" fmla="*/ 5935322 w 5935322"/>
+                  <a:gd name="connsiteY1" fmla="*/ 4217819 h 4217819"/>
+                  <a:gd name="connsiteX2" fmla="*/ 1817724 w 5935322"/>
+                  <a:gd name="connsiteY2" fmla="*/ 0 h 4217819"/>
+                  <a:gd name="connsiteX3" fmla="*/ 880239 w 5935322"/>
+                  <a:gd name="connsiteY3" fmla="*/ 1287883 h 4217819"/>
+                  <a:gd name="connsiteX4" fmla="*/ 289222 w 5935322"/>
+                  <a:gd name="connsiteY4" fmla="*/ 2620816 h 4217819"/>
+                  <a:gd name="connsiteX5" fmla="*/ 0 w 5935322"/>
+                  <a:gd name="connsiteY5" fmla="*/ 3614227 h 4217819"/>
+                  <a:gd name="connsiteX6" fmla="*/ 62875 w 5935322"/>
+                  <a:gd name="connsiteY6" fmla="*/ 4129796 h 4217819"/>
+                  <a:gd name="connsiteX0" fmla="*/ 50300 w 5935322"/>
+                  <a:gd name="connsiteY0" fmla="*/ 4149632 h 4174781"/>
+                  <a:gd name="connsiteX1" fmla="*/ 5935322 w 5935322"/>
+                  <a:gd name="connsiteY1" fmla="*/ 4174781 h 4174781"/>
+                  <a:gd name="connsiteX2" fmla="*/ 1790981 w 5935322"/>
+                  <a:gd name="connsiteY2" fmla="*/ 0 h 4174781"/>
+                  <a:gd name="connsiteX3" fmla="*/ 880239 w 5935322"/>
+                  <a:gd name="connsiteY3" fmla="*/ 1244845 h 4174781"/>
+                  <a:gd name="connsiteX4" fmla="*/ 289222 w 5935322"/>
+                  <a:gd name="connsiteY4" fmla="*/ 2577778 h 4174781"/>
+                  <a:gd name="connsiteX5" fmla="*/ 0 w 5935322"/>
+                  <a:gd name="connsiteY5" fmla="*/ 3571189 h 4174781"/>
+                  <a:gd name="connsiteX6" fmla="*/ 62875 w 5935322"/>
+                  <a:gd name="connsiteY6" fmla="*/ 4086758 h 4174781"/>
+                  <a:gd name="connsiteX0" fmla="*/ 50300 w 5935322"/>
+                  <a:gd name="connsiteY0" fmla="*/ 4187291 h 4212440"/>
+                  <a:gd name="connsiteX1" fmla="*/ 5935322 w 5935322"/>
+                  <a:gd name="connsiteY1" fmla="*/ 4212440 h 4212440"/>
+                  <a:gd name="connsiteX2" fmla="*/ 1801682 w 5935322"/>
+                  <a:gd name="connsiteY2" fmla="*/ 0 h 4212440"/>
+                  <a:gd name="connsiteX3" fmla="*/ 880239 w 5935322"/>
+                  <a:gd name="connsiteY3" fmla="*/ 1282504 h 4212440"/>
+                  <a:gd name="connsiteX4" fmla="*/ 289222 w 5935322"/>
+                  <a:gd name="connsiteY4" fmla="*/ 2615437 h 4212440"/>
+                  <a:gd name="connsiteX5" fmla="*/ 0 w 5935322"/>
+                  <a:gd name="connsiteY5" fmla="*/ 3608848 h 4212440"/>
+                  <a:gd name="connsiteX6" fmla="*/ 62875 w 5935322"/>
+                  <a:gd name="connsiteY6" fmla="*/ 4124417 h 4212440"/>
+                </a:gdLst>
+                <a:ahLst/>
+                <a:cxnLst>
+                  <a:cxn ang="0">
+                    <a:pos x="connsiteX0" y="connsiteY0"/>
+                  </a:cxn>
+                  <a:cxn ang="0">
+                    <a:pos x="connsiteX1" y="connsiteY1"/>
+                  </a:cxn>
+                  <a:cxn ang="0">
+                    <a:pos x="connsiteX2" y="connsiteY2"/>
+                  </a:cxn>
+                  <a:cxn ang="0">
+                    <a:pos x="connsiteX3" y="connsiteY3"/>
+                  </a:cxn>
+                  <a:cxn ang="0">
+                    <a:pos x="connsiteX4" y="connsiteY4"/>
+                  </a:cxn>
+                  <a:cxn ang="0">
+                    <a:pos x="connsiteX5" y="connsiteY5"/>
+                  </a:cxn>
+                  <a:cxn ang="0">
+                    <a:pos x="connsiteX6" y="connsiteY6"/>
+                  </a:cxn>
+                </a:cxnLst>
+                <a:rect l="l" t="t" r="r" b="b"/>
+                <a:pathLst>
+                  <a:path w="5935322" h="4212440">
+                    <a:moveTo>
+                      <a:pt x="50300" y="4187291"/>
+                    </a:moveTo>
+                    <a:lnTo>
+                      <a:pt x="5935322" y="4212440"/>
+                    </a:lnTo>
+                    <a:lnTo>
+                      <a:pt x="1801682" y="0"/>
+                    </a:lnTo>
+                    <a:lnTo>
+                      <a:pt x="880239" y="1282504"/>
+                    </a:lnTo>
+                    <a:lnTo>
+                      <a:pt x="289222" y="2615437"/>
+                    </a:lnTo>
+                    <a:lnTo>
+                      <a:pt x="0" y="3608848"/>
+                    </a:lnTo>
+                    <a:lnTo>
+                      <a:pt x="62875" y="4124417"/>
+                    </a:lnTo>
+                  </a:path>
+                </a:pathLst>
+              </a:custGeom>
+              <a:gradFill flip="none" rotWithShape="1">
+                <a:gsLst>
+                  <a:gs pos="57000">
+                    <a:srgbClr val="9BBB59"/>
+                  </a:gs>
+                  <a:gs pos="0">
+                    <a:srgbClr val="FFFFFF"/>
+                  </a:gs>
+                </a:gsLst>
+                <a:lin ang="1740000" scaled="0"/>
+                <a:tileRect/>
+              </a:gradFill>
+              <a:ln>
+                <a:noFill/>
+              </a:ln>
+              <a:effectLst/>
+            </p:spPr>
+            <p:style>
+              <a:lnRef idx="2">
+                <a:schemeClr val="accent1"/>
+              </a:lnRef>
+              <a:fillRef idx="0">
+                <a:schemeClr val="accent1"/>
+              </a:fillRef>
+              <a:effectRef idx="1">
+                <a:schemeClr val="accent1"/>
+              </a:effectRef>
+              <a:fontRef idx="minor">
+                <a:schemeClr val="tx1"/>
+              </a:fontRef>
+            </p:style>
+            <p:txBody>
+              <a:bodyPr rtlCol="0" anchor="ctr"/>
+              <a:lstStyle/>
+              <a:p>
+                <a:pPr algn="ctr"/>
+                <a:endParaRPr lang="en-US"/>
+              </a:p>
+            </p:txBody>
+          </p:sp>
+          <p:sp>
+            <p:nvSpPr>
+              <p:cNvPr id="13" name="Freeform 12"/>
+              <p:cNvSpPr/>
+              <p:nvPr/>
+            </p:nvSpPr>
+            <p:spPr>
+              <a:xfrm rot="2706850">
+                <a:off x="3208160" y="1106101"/>
+                <a:ext cx="5871780" cy="4069291"/>
+              </a:xfrm>
+              <a:custGeom>
+                <a:avLst/>
+                <a:gdLst>
+                  <a:gd name="connsiteX0" fmla="*/ 50300 w 5935322"/>
+                  <a:gd name="connsiteY0" fmla="*/ 4111971 h 4137120"/>
+                  <a:gd name="connsiteX1" fmla="*/ 5935322 w 5935322"/>
+                  <a:gd name="connsiteY1" fmla="*/ 4137120 h 4137120"/>
+                  <a:gd name="connsiteX2" fmla="*/ 1785627 w 5935322"/>
+                  <a:gd name="connsiteY2" fmla="*/ 0 h 4137120"/>
+                  <a:gd name="connsiteX3" fmla="*/ 880239 w 5935322"/>
+                  <a:gd name="connsiteY3" fmla="*/ 1207184 h 4137120"/>
+                  <a:gd name="connsiteX4" fmla="*/ 289222 w 5935322"/>
+                  <a:gd name="connsiteY4" fmla="*/ 2540117 h 4137120"/>
+                  <a:gd name="connsiteX5" fmla="*/ 0 w 5935322"/>
+                  <a:gd name="connsiteY5" fmla="*/ 3533528 h 4137120"/>
+                  <a:gd name="connsiteX6" fmla="*/ 62875 w 5935322"/>
+                  <a:gd name="connsiteY6" fmla="*/ 4049097 h 4137120"/>
+                </a:gdLst>
+                <a:ahLst/>
+                <a:cxnLst>
+                  <a:cxn ang="0">
+                    <a:pos x="connsiteX0" y="connsiteY0"/>
+                  </a:cxn>
+                  <a:cxn ang="0">
+                    <a:pos x="connsiteX1" y="connsiteY1"/>
+                  </a:cxn>
+                  <a:cxn ang="0">
+                    <a:pos x="connsiteX2" y="connsiteY2"/>
+                  </a:cxn>
+                  <a:cxn ang="0">
+                    <a:pos x="connsiteX3" y="connsiteY3"/>
+                  </a:cxn>
+                  <a:cxn ang="0">
+                    <a:pos x="connsiteX4" y="connsiteY4"/>
+                  </a:cxn>
+                  <a:cxn ang="0">
+                    <a:pos x="connsiteX5" y="connsiteY5"/>
+                  </a:cxn>
+                  <a:cxn ang="0">
+                    <a:pos x="connsiteX6" y="connsiteY6"/>
+                  </a:cxn>
+                </a:cxnLst>
+                <a:rect l="l" t="t" r="r" b="b"/>
+                <a:pathLst>
+                  <a:path w="5935322" h="4137120">
+                    <a:moveTo>
+                      <a:pt x="50300" y="4111971"/>
+                    </a:moveTo>
+                    <a:lnTo>
+                      <a:pt x="5935322" y="4137120"/>
+                    </a:lnTo>
+                    <a:lnTo>
+                      <a:pt x="1785627" y="0"/>
+                    </a:lnTo>
+                    <a:lnTo>
+                      <a:pt x="880239" y="1207184"/>
+                    </a:lnTo>
+                    <a:lnTo>
+                      <a:pt x="289222" y="2540117"/>
+                    </a:lnTo>
+                    <a:lnTo>
+                      <a:pt x="0" y="3533528"/>
+                    </a:lnTo>
+                    <a:lnTo>
+                      <a:pt x="62875" y="4049097"/>
+                    </a:lnTo>
+                  </a:path>
+                </a:pathLst>
+              </a:custGeom>
+              <a:gradFill flip="none" rotWithShape="1">
+                <a:gsLst>
+                  <a:gs pos="57000">
+                    <a:srgbClr val="8064A2"/>
+                  </a:gs>
+                  <a:gs pos="0">
+                    <a:srgbClr val="FFFFFF"/>
+                  </a:gs>
+                </a:gsLst>
+                <a:lin ang="1740000" scaled="0"/>
+                <a:tileRect/>
+              </a:gradFill>
+              <a:ln>
+                <a:noFill/>
+              </a:ln>
+              <a:effectLst/>
+            </p:spPr>
+            <p:style>
+              <a:lnRef idx="2">
+                <a:schemeClr val="accent1"/>
+              </a:lnRef>
+              <a:fillRef idx="0">
+                <a:schemeClr val="accent1"/>
+              </a:fillRef>
+              <a:effectRef idx="1">
+                <a:schemeClr val="accent1"/>
+              </a:effectRef>
+              <a:fontRef idx="minor">
+                <a:schemeClr val="tx1"/>
+              </a:fontRef>
+            </p:style>
+            <p:txBody>
+              <a:bodyPr rtlCol="0" anchor="ctr"/>
+              <a:lstStyle/>
+              <a:p>
+                <a:pPr algn="ctr"/>
+                <a:endParaRPr lang="en-US"/>
+              </a:p>
+            </p:txBody>
+          </p:sp>
+          <p:sp>
+            <p:nvSpPr>
+              <p:cNvPr id="14" name="Freeform 13"/>
+              <p:cNvSpPr/>
+              <p:nvPr/>
+            </p:nvSpPr>
+            <p:spPr>
+              <a:xfrm>
+                <a:off x="880238" y="2489817"/>
+                <a:ext cx="5935322" cy="4137120"/>
+              </a:xfrm>
+              <a:custGeom>
+                <a:avLst/>
+                <a:gdLst>
+                  <a:gd name="connsiteX0" fmla="*/ 50300 w 5935322"/>
+                  <a:gd name="connsiteY0" fmla="*/ 4111971 h 4137120"/>
+                  <a:gd name="connsiteX1" fmla="*/ 5935322 w 5935322"/>
+                  <a:gd name="connsiteY1" fmla="*/ 4137120 h 4137120"/>
+                  <a:gd name="connsiteX2" fmla="*/ 1785627 w 5935322"/>
+                  <a:gd name="connsiteY2" fmla="*/ 0 h 4137120"/>
+                  <a:gd name="connsiteX3" fmla="*/ 880239 w 5935322"/>
+                  <a:gd name="connsiteY3" fmla="*/ 1207184 h 4137120"/>
+                  <a:gd name="connsiteX4" fmla="*/ 289222 w 5935322"/>
+                  <a:gd name="connsiteY4" fmla="*/ 2540117 h 4137120"/>
+                  <a:gd name="connsiteX5" fmla="*/ 0 w 5935322"/>
+                  <a:gd name="connsiteY5" fmla="*/ 3533528 h 4137120"/>
+                  <a:gd name="connsiteX6" fmla="*/ 62875 w 5935322"/>
+                  <a:gd name="connsiteY6" fmla="*/ 4049097 h 4137120"/>
+                </a:gdLst>
+                <a:ahLst/>
+                <a:cxnLst>
+                  <a:cxn ang="0">
+                    <a:pos x="connsiteX0" y="connsiteY0"/>
+                  </a:cxn>
+                  <a:cxn ang="0">
+                    <a:pos x="connsiteX1" y="connsiteY1"/>
+                  </a:cxn>
+                  <a:cxn ang="0">
+                    <a:pos x="connsiteX2" y="connsiteY2"/>
+                  </a:cxn>
+                  <a:cxn ang="0">
+                    <a:pos x="connsiteX3" y="connsiteY3"/>
+                  </a:cxn>
+                  <a:cxn ang="0">
+                    <a:pos x="connsiteX4" y="connsiteY4"/>
+                  </a:cxn>
+                  <a:cxn ang="0">
+                    <a:pos x="connsiteX5" y="connsiteY5"/>
+                  </a:cxn>
+                  <a:cxn ang="0">
+                    <a:pos x="connsiteX6" y="connsiteY6"/>
+                  </a:cxn>
+                </a:cxnLst>
+                <a:rect l="l" t="t" r="r" b="b"/>
+                <a:pathLst>
+                  <a:path w="5935322" h="4137120">
+                    <a:moveTo>
+                      <a:pt x="50300" y="4111971"/>
+                    </a:moveTo>
+                    <a:lnTo>
+                      <a:pt x="5935322" y="4137120"/>
+                    </a:lnTo>
+                    <a:lnTo>
+                      <a:pt x="1785627" y="0"/>
+                    </a:lnTo>
+                    <a:lnTo>
+                      <a:pt x="880239" y="1207184"/>
+                    </a:lnTo>
+                    <a:lnTo>
+                      <a:pt x="289222" y="2540117"/>
+                    </a:lnTo>
+                    <a:lnTo>
+                      <a:pt x="0" y="3533528"/>
+                    </a:lnTo>
+                    <a:lnTo>
+                      <a:pt x="62875" y="4049097"/>
+                    </a:lnTo>
+                  </a:path>
+                </a:pathLst>
+              </a:custGeom>
+              <a:gradFill flip="none" rotWithShape="1">
+                <a:gsLst>
+                  <a:gs pos="57000">
+                    <a:srgbClr val="6361A6"/>
+                  </a:gs>
+                  <a:gs pos="0">
+                    <a:srgbClr val="FFFFFF"/>
+                  </a:gs>
+                </a:gsLst>
+                <a:lin ang="1740000" scaled="0"/>
+                <a:tileRect/>
+              </a:gradFill>
+              <a:ln>
+                <a:noFill/>
+              </a:ln>
+              <a:effectLst/>
+            </p:spPr>
+            <p:style>
+              <a:lnRef idx="2">
+                <a:schemeClr val="accent1"/>
+              </a:lnRef>
+              <a:fillRef idx="0">
+                <a:schemeClr val="accent1"/>
+              </a:fillRef>
+              <a:effectRef idx="1">
+                <a:schemeClr val="accent1"/>
+              </a:effectRef>
+              <a:fontRef idx="minor">
+                <a:schemeClr val="tx1"/>
+              </a:fontRef>
+            </p:style>
+            <p:txBody>
+              <a:bodyPr rtlCol="0" anchor="ctr"/>
+              <a:lstStyle/>
+              <a:p>
+                <a:pPr algn="ctr"/>
+                <a:endParaRPr lang="en-US"/>
+              </a:p>
+            </p:txBody>
+          </p:sp>
+          <p:sp>
+            <p:nvSpPr>
+              <p:cNvPr id="15" name="Block Arc 14"/>
+              <p:cNvSpPr/>
+              <p:nvPr/>
+            </p:nvSpPr>
+            <p:spPr>
+              <a:xfrm>
+                <a:off x="519450" y="383997"/>
+                <a:ext cx="12545802" cy="12545802"/>
+              </a:xfrm>
+              <a:prstGeom prst="blockArc">
+                <a:avLst>
+                  <a:gd name="adj1" fmla="val 13500000"/>
+                  <a:gd name="adj2" fmla="val 16219615"/>
+                  <a:gd name="adj3" fmla="val 6041"/>
+                </a:avLst>
+              </a:prstGeom>
+            </p:spPr>
+            <p:style>
+              <a:lnRef idx="0">
+                <a:schemeClr val="lt1">
+                  <a:hueOff val="0"/>
+                  <a:satOff val="0"/>
+                  <a:lumOff val="0"/>
+                  <a:alphaOff val="0"/>
+                </a:schemeClr>
+              </a:lnRef>
+              <a:fillRef idx="1">
+                <a:schemeClr val="accent3">
+                  <a:hueOff val="11250266"/>
+                  <a:satOff val="-16880"/>
+                  <a:lumOff val="-2745"/>
+                  <a:alphaOff val="0"/>
+                </a:schemeClr>
+              </a:fillRef>
+              <a:effectRef idx="0">
+                <a:schemeClr val="accent3">
+                  <a:hueOff val="11250266"/>
+                  <a:satOff val="-16880"/>
+                  <a:lumOff val="-2745"/>
+                  <a:alphaOff val="0"/>
+                </a:schemeClr>
+              </a:effectRef>
+              <a:fontRef idx="minor">
+                <a:schemeClr val="lt1"/>
+              </a:fontRef>
+            </p:style>
+          </p:sp>
+          <p:sp>
+            <p:nvSpPr>
+              <p:cNvPr id="16" name="Block Arc 15"/>
+              <p:cNvSpPr/>
+              <p:nvPr/>
+            </p:nvSpPr>
+            <p:spPr>
+              <a:xfrm>
+                <a:off x="519450" y="383997"/>
+                <a:ext cx="12545802" cy="12545802"/>
+              </a:xfrm>
+              <a:prstGeom prst="blockArc">
+                <a:avLst>
+                  <a:gd name="adj1" fmla="val 10800000"/>
+                  <a:gd name="adj2" fmla="val 13522234"/>
+                  <a:gd name="adj3" fmla="val 6057"/>
+                </a:avLst>
+              </a:prstGeom>
+            </p:spPr>
+            <p:style>
+              <a:lnRef idx="0">
+                <a:schemeClr val="lt1">
+                  <a:hueOff val="0"/>
+                  <a:satOff val="0"/>
+                  <a:lumOff val="0"/>
+                  <a:alphaOff val="0"/>
+                </a:schemeClr>
+              </a:lnRef>
+              <a:fillRef idx="1">
+                <a:schemeClr val="accent3">
+                  <a:hueOff val="9643085"/>
+                  <a:satOff val="-14469"/>
+                  <a:lumOff val="-2353"/>
+                  <a:alphaOff val="0"/>
+                </a:schemeClr>
+              </a:fillRef>
+              <a:effectRef idx="0">
+                <a:schemeClr val="accent3">
+                  <a:hueOff val="9643085"/>
+                  <a:satOff val="-14469"/>
+                  <a:lumOff val="-2353"/>
+                  <a:alphaOff val="0"/>
+                </a:schemeClr>
+              </a:effectRef>
+              <a:fontRef idx="minor">
+                <a:schemeClr val="lt1"/>
+              </a:fontRef>
+            </p:style>
+          </p:sp>
+          <p:sp>
+            <p:nvSpPr>
+              <p:cNvPr id="17" name="Block Arc 16"/>
+              <p:cNvSpPr/>
+              <p:nvPr/>
+            </p:nvSpPr>
+            <p:spPr>
+              <a:xfrm>
+                <a:off x="519450" y="383997"/>
+                <a:ext cx="12545802" cy="12545802"/>
+              </a:xfrm>
+              <a:prstGeom prst="blockArc">
+                <a:avLst>
+                  <a:gd name="adj1" fmla="val 8041157"/>
+                  <a:gd name="adj2" fmla="val 10811777"/>
+                  <a:gd name="adj3" fmla="val 6045"/>
+                </a:avLst>
+              </a:prstGeom>
+            </p:spPr>
+            <p:style>
+              <a:lnRef idx="0">
+                <a:schemeClr val="lt1">
+                  <a:hueOff val="0"/>
+                  <a:satOff val="0"/>
+                  <a:lumOff val="0"/>
+                  <a:alphaOff val="0"/>
+                </a:schemeClr>
+              </a:lnRef>
+              <a:fillRef idx="1">
+                <a:schemeClr val="accent3">
+                  <a:hueOff val="8035904"/>
+                  <a:satOff val="-12057"/>
+                  <a:lumOff val="-1961"/>
+                  <a:alphaOff val="0"/>
+                </a:schemeClr>
+              </a:fillRef>
+              <a:effectRef idx="0">
+                <a:schemeClr val="accent3">
+                  <a:hueOff val="8035904"/>
+                  <a:satOff val="-12057"/>
+                  <a:lumOff val="-1961"/>
+                  <a:alphaOff val="0"/>
+                </a:schemeClr>
+              </a:effectRef>
+              <a:fontRef idx="minor">
+                <a:schemeClr val="lt1"/>
+              </a:fontRef>
+            </p:style>
+          </p:sp>
+          <p:sp>
+            <p:nvSpPr>
+              <p:cNvPr id="18" name="Block Arc 17"/>
+              <p:cNvSpPr/>
+              <p:nvPr/>
+            </p:nvSpPr>
+            <p:spPr>
+              <a:xfrm>
+                <a:off x="519450" y="383997"/>
+                <a:ext cx="12545802" cy="12545802"/>
+              </a:xfrm>
+              <a:prstGeom prst="blockArc">
+                <a:avLst>
+                  <a:gd name="adj1" fmla="val 5372435"/>
+                  <a:gd name="adj2" fmla="val 8088855"/>
+                  <a:gd name="adj3" fmla="val 6056"/>
+                </a:avLst>
+              </a:prstGeom>
+            </p:spPr>
+            <p:style>
+              <a:lnRef idx="0">
+                <a:schemeClr val="lt1">
+                  <a:hueOff val="0"/>
+                  <a:satOff val="0"/>
+                  <a:lumOff val="0"/>
+                  <a:alphaOff val="0"/>
+                </a:schemeClr>
+              </a:lnRef>
+              <a:fillRef idx="1">
+                <a:schemeClr val="accent3">
+                  <a:hueOff val="6428724"/>
+                  <a:satOff val="-9646"/>
+                  <a:lumOff val="-1569"/>
+                  <a:alphaOff val="0"/>
+                </a:schemeClr>
+              </a:fillRef>
+              <a:effectRef idx="0">
+                <a:schemeClr val="accent3">
+                  <a:hueOff val="6428724"/>
+                  <a:satOff val="-9646"/>
+                  <a:lumOff val="-1569"/>
+                  <a:alphaOff val="0"/>
+                </a:schemeClr>
+              </a:effectRef>
+              <a:fontRef idx="minor">
+                <a:schemeClr val="lt1"/>
+              </a:fontRef>
+            </p:style>
+          </p:sp>
+          <p:sp>
+            <p:nvSpPr>
+              <p:cNvPr id="19" name="Block Arc 18"/>
+              <p:cNvSpPr/>
+              <p:nvPr/>
+            </p:nvSpPr>
+            <p:spPr>
+              <a:xfrm>
+                <a:off x="519450" y="383997"/>
+                <a:ext cx="12545802" cy="12545802"/>
+              </a:xfrm>
+              <a:prstGeom prst="blockArc">
+                <a:avLst>
+                  <a:gd name="adj1" fmla="val 2700000"/>
+                  <a:gd name="adj2" fmla="val 5384323"/>
+                  <a:gd name="adj3" fmla="val 6040"/>
+                </a:avLst>
+              </a:prstGeom>
+            </p:spPr>
+            <p:style>
+              <a:lnRef idx="0">
+                <a:schemeClr val="lt1">
+                  <a:hueOff val="0"/>
+                  <a:satOff val="0"/>
+                  <a:lumOff val="0"/>
+                  <a:alphaOff val="0"/>
+                </a:schemeClr>
+              </a:lnRef>
+              <a:fillRef idx="1">
+                <a:schemeClr val="accent3">
+                  <a:hueOff val="4821542"/>
+                  <a:satOff val="-7234"/>
+                  <a:lumOff val="-1176"/>
+                  <a:alphaOff val="0"/>
+                </a:schemeClr>
+              </a:fillRef>
+              <a:effectRef idx="0">
+                <a:schemeClr val="accent3">
+                  <a:hueOff val="4821542"/>
+                  <a:satOff val="-7234"/>
+                  <a:lumOff val="-1176"/>
+                  <a:alphaOff val="0"/>
+                </a:schemeClr>
+              </a:effectRef>
+              <a:fontRef idx="minor">
+                <a:schemeClr val="lt1"/>
+              </a:fontRef>
+            </p:style>
+          </p:sp>
+          <p:sp>
+            <p:nvSpPr>
+              <p:cNvPr id="20" name="Block Arc 19"/>
+              <p:cNvSpPr/>
+              <p:nvPr/>
+            </p:nvSpPr>
+            <p:spPr>
+              <a:xfrm>
+                <a:off x="519450" y="383997"/>
+                <a:ext cx="12545802" cy="12545802"/>
+              </a:xfrm>
+              <a:prstGeom prst="blockArc">
+                <a:avLst>
+                  <a:gd name="adj1" fmla="val 0"/>
+                  <a:gd name="adj2" fmla="val 2766419"/>
+                  <a:gd name="adj3" fmla="val 5977"/>
+                </a:avLst>
+              </a:prstGeom>
+            </p:spPr>
+            <p:style>
+              <a:lnRef idx="0">
+                <a:schemeClr val="lt1">
+                  <a:hueOff val="0"/>
+                  <a:satOff val="0"/>
+                  <a:lumOff val="0"/>
+                  <a:alphaOff val="0"/>
+                </a:schemeClr>
+              </a:lnRef>
+              <a:fillRef idx="1">
+                <a:schemeClr val="accent3">
+                  <a:hueOff val="3214362"/>
+                  <a:satOff val="-4823"/>
+                  <a:lumOff val="-784"/>
+                  <a:alphaOff val="0"/>
+                </a:schemeClr>
+              </a:fillRef>
+              <a:effectRef idx="0">
+                <a:schemeClr val="accent3">
+                  <a:hueOff val="3214362"/>
+                  <a:satOff val="-4823"/>
+                  <a:lumOff val="-784"/>
+                  <a:alphaOff val="0"/>
+                </a:schemeClr>
+              </a:effectRef>
+              <a:fontRef idx="minor">
+                <a:schemeClr val="lt1"/>
+              </a:fontRef>
+            </p:style>
+          </p:sp>
+          <p:sp>
+            <p:nvSpPr>
+              <p:cNvPr id="21" name="Block Arc 20"/>
+              <p:cNvSpPr/>
+              <p:nvPr/>
+            </p:nvSpPr>
+            <p:spPr>
+              <a:xfrm>
+                <a:off x="519450" y="383997"/>
+                <a:ext cx="12545802" cy="12545802"/>
+              </a:xfrm>
+              <a:prstGeom prst="blockArc">
+                <a:avLst>
+                  <a:gd name="adj1" fmla="val 18900000"/>
+                  <a:gd name="adj2" fmla="val 21599999"/>
+                  <a:gd name="adj3" fmla="val 6040"/>
+                </a:avLst>
+              </a:prstGeom>
+            </p:spPr>
+            <p:style>
+              <a:lnRef idx="0">
+                <a:schemeClr val="lt1">
+                  <a:hueOff val="0"/>
+                  <a:satOff val="0"/>
+                  <a:lumOff val="0"/>
+                  <a:alphaOff val="0"/>
+                </a:schemeClr>
+              </a:lnRef>
+              <a:fillRef idx="1">
+                <a:schemeClr val="accent3">
+                  <a:hueOff val="1607181"/>
+                  <a:satOff val="-2411"/>
+                  <a:lumOff val="-392"/>
+                  <a:alphaOff val="0"/>
+                </a:schemeClr>
+              </a:fillRef>
+              <a:effectRef idx="0">
+                <a:schemeClr val="accent3">
+                  <a:hueOff val="1607181"/>
+                  <a:satOff val="-2411"/>
+                  <a:lumOff val="-392"/>
+                  <a:alphaOff val="0"/>
+                </a:schemeClr>
+              </a:effectRef>
+              <a:fontRef idx="minor">
+                <a:schemeClr val="lt1"/>
+              </a:fontRef>
+            </p:style>
+          </p:sp>
+          <p:sp>
+            <p:nvSpPr>
+              <p:cNvPr id="22" name="Block Arc 21"/>
+              <p:cNvSpPr/>
+              <p:nvPr/>
+            </p:nvSpPr>
+            <p:spPr>
+              <a:xfrm>
+                <a:off x="519449" y="383997"/>
+                <a:ext cx="12545802" cy="12545802"/>
+              </a:xfrm>
+              <a:prstGeom prst="blockArc">
+                <a:avLst>
+                  <a:gd name="adj1" fmla="val 16200000"/>
+                  <a:gd name="adj2" fmla="val 18955174"/>
+                  <a:gd name="adj3" fmla="val 5839"/>
+                </a:avLst>
+              </a:prstGeom>
+              <a:solidFill>
+                <a:schemeClr val="accent3"/>
+              </a:solidFill>
+            </p:spPr>
+            <p:style>
+              <a:lnRef idx="0">
+                <a:schemeClr val="lt1">
+                  <a:hueOff val="0"/>
+                  <a:satOff val="0"/>
+                  <a:lumOff val="0"/>
+                  <a:alphaOff val="0"/>
+                </a:schemeClr>
+              </a:lnRef>
+              <a:fillRef idx="1">
+                <a:schemeClr val="accent3">
+                  <a:hueOff val="0"/>
+                  <a:satOff val="0"/>
+                  <a:lumOff val="0"/>
+                  <a:alphaOff val="0"/>
+                </a:schemeClr>
+              </a:fillRef>
+              <a:effectRef idx="0">
+                <a:schemeClr val="accent3">
+                  <a:hueOff val="0"/>
+                  <a:satOff val="0"/>
+                  <a:lumOff val="0"/>
+                  <a:alphaOff val="0"/>
+                </a:schemeClr>
+              </a:effectRef>
+              <a:fontRef idx="minor">
+                <a:schemeClr val="lt1"/>
+              </a:fontRef>
+            </p:style>
+          </p:sp>
+          <p:sp>
+            <p:nvSpPr>
+              <p:cNvPr id="23" name="TextBox 22"/>
+              <p:cNvSpPr txBox="1"/>
+              <p:nvPr/>
+            </p:nvSpPr>
+            <p:spPr>
+              <a:xfrm rot="20226140">
+                <a:off x="3062212" y="1156488"/>
+                <a:ext cx="3324463" cy="971705"/>
+              </a:xfrm>
+              <a:prstGeom prst="rect">
+                <a:avLst/>
+              </a:prstGeom>
+              <a:noFill/>
+            </p:spPr>
+            <p:txBody>
+              <a:bodyPr wrap="none" rtlCol="0">
+                <a:prstTxWarp prst="textArchUp">
+                  <a:avLst>
+                    <a:gd name="adj" fmla="val 13015010"/>
+                  </a:avLst>
+                </a:prstTxWarp>
+                <a:spAutoFit/>
+              </a:bodyPr>
+              <a:lstStyle/>
+              <a:p>
+                <a:r>
+                  <a:rPr lang="en-US" sz="5400" dirty="0" smtClean="0">
+                    <a:solidFill>
+                      <a:schemeClr val="bg1"/>
+                    </a:solidFill>
+                  </a:rPr>
+                  <a:t>Preservation</a:t>
+                </a:r>
+                <a:endParaRPr lang="en-US" sz="5400" dirty="0">
+                  <a:solidFill>
+                    <a:schemeClr val="bg1"/>
+                  </a:solidFill>
+                </a:endParaRPr>
+              </a:p>
+            </p:txBody>
+          </p:sp>
+          <p:sp>
+            <p:nvSpPr>
+              <p:cNvPr id="24" name="TextBox 23"/>
+              <p:cNvSpPr txBox="1"/>
+              <p:nvPr/>
+            </p:nvSpPr>
+            <p:spPr>
+              <a:xfrm rot="17419409">
+                <a:off x="137665" y="4097829"/>
+                <a:ext cx="3304092" cy="971705"/>
+              </a:xfrm>
+              <a:prstGeom prst="rect">
+                <a:avLst/>
+              </a:prstGeom>
+              <a:noFill/>
+            </p:spPr>
+            <p:txBody>
+              <a:bodyPr wrap="none" rtlCol="0">
+                <a:prstTxWarp prst="textArchUp">
+                  <a:avLst>
+                    <a:gd name="adj" fmla="val 13443625"/>
+                  </a:avLst>
+                </a:prstTxWarp>
+                <a:spAutoFit/>
+              </a:bodyPr>
+              <a:lstStyle/>
+              <a:p>
+                <a:r>
+                  <a:rPr lang="en-US" sz="5400" dirty="0" smtClean="0">
+                    <a:solidFill>
+                      <a:schemeClr val="bg1"/>
+                    </a:solidFill>
+                  </a:rPr>
+                  <a:t>Publication</a:t>
+                </a:r>
+                <a:endParaRPr lang="en-US" sz="5400" dirty="0">
+                  <a:solidFill>
+                    <a:schemeClr val="bg1"/>
+                  </a:solidFill>
+                </a:endParaRPr>
+              </a:p>
+            </p:txBody>
+          </p:sp>
+          <p:sp>
+            <p:nvSpPr>
+              <p:cNvPr id="25" name="Freeform 24"/>
+              <p:cNvSpPr>
+                <a:spLocks noChangeAspect="1"/>
+              </p:cNvSpPr>
+              <p:nvPr/>
+            </p:nvSpPr>
+            <p:spPr>
+              <a:xfrm>
+                <a:off x="1282058" y="1136354"/>
+                <a:ext cx="11018520" cy="11018520"/>
+              </a:xfrm>
+              <a:custGeom>
+                <a:avLst/>
+                <a:gdLst>
+                  <a:gd name="connsiteX0" fmla="*/ 0 w 3536155"/>
+                  <a:gd name="connsiteY0" fmla="*/ 1768078 h 3536155"/>
+                  <a:gd name="connsiteX1" fmla="*/ 1768078 w 3536155"/>
+                  <a:gd name="connsiteY1" fmla="*/ 0 h 3536155"/>
+                  <a:gd name="connsiteX2" fmla="*/ 3536156 w 3536155"/>
+                  <a:gd name="connsiteY2" fmla="*/ 1768078 h 3536155"/>
+                  <a:gd name="connsiteX3" fmla="*/ 1768078 w 3536155"/>
+                  <a:gd name="connsiteY3" fmla="*/ 3536156 h 3536155"/>
+                  <a:gd name="connsiteX4" fmla="*/ 0 w 3536155"/>
+                  <a:gd name="connsiteY4" fmla="*/ 1768078 h 3536155"/>
+                </a:gdLst>
+                <a:ahLst/>
+                <a:cxnLst>
+                  <a:cxn ang="0">
+                    <a:pos x="connsiteX0" y="connsiteY0"/>
+                  </a:cxn>
+                  <a:cxn ang="0">
+                    <a:pos x="connsiteX1" y="connsiteY1"/>
+                  </a:cxn>
+                  <a:cxn ang="0">
+                    <a:pos x="connsiteX2" y="connsiteY2"/>
+                  </a:cxn>
+                  <a:cxn ang="0">
+                    <a:pos x="connsiteX3" y="connsiteY3"/>
+                  </a:cxn>
+                  <a:cxn ang="0">
+                    <a:pos x="connsiteX4" y="connsiteY4"/>
+                  </a:cxn>
+                </a:cxnLst>
+                <a:rect l="l" t="t" r="r" b="b"/>
+                <a:pathLst>
+                  <a:path w="3536155" h="3536155">
+                    <a:moveTo>
+                      <a:pt x="0" y="1768078"/>
+                    </a:moveTo>
+                    <a:cubicBezTo>
+                      <a:pt x="0" y="791595"/>
+                      <a:pt x="791595" y="0"/>
+                      <a:pt x="1768078" y="0"/>
+                    </a:cubicBezTo>
+                    <a:cubicBezTo>
+                      <a:pt x="2744561" y="0"/>
+                      <a:pt x="3536156" y="791595"/>
+                      <a:pt x="3536156" y="1768078"/>
+                    </a:cubicBezTo>
+                    <a:cubicBezTo>
+                      <a:pt x="3536156" y="2744561"/>
+                      <a:pt x="2744561" y="3536156"/>
+                      <a:pt x="1768078" y="3536156"/>
+                    </a:cubicBezTo>
+                    <a:cubicBezTo>
+                      <a:pt x="791595" y="3536156"/>
+                      <a:pt x="0" y="2744561"/>
+                      <a:pt x="0" y="1768078"/>
+                    </a:cubicBezTo>
+                    <a:close/>
+                  </a:path>
+                </a:pathLst>
+              </a:custGeom>
+              <a:noFill/>
+              <a:ln w="38100">
+                <a:solidFill>
+                  <a:srgbClr val="FFFFFF"/>
+                </a:solidFill>
+              </a:ln>
+            </p:spPr>
+            <p:style>
+              <a:lnRef idx="2">
+                <a:schemeClr val="lt1">
+                  <a:hueOff val="0"/>
+                  <a:satOff val="0"/>
+                  <a:lumOff val="0"/>
+                  <a:alphaOff val="0"/>
+                </a:schemeClr>
+              </a:lnRef>
+              <a:fillRef idx="1">
+                <a:schemeClr val="accent2">
+                  <a:hueOff val="0"/>
+                  <a:satOff val="0"/>
+                  <a:lumOff val="0"/>
+                  <a:alphaOff val="0"/>
+                </a:schemeClr>
+              </a:fillRef>
+              <a:effectRef idx="0">
+                <a:schemeClr val="accent2">
+                  <a:hueOff val="0"/>
+                  <a:satOff val="0"/>
+                  <a:lumOff val="0"/>
+                  <a:alphaOff val="0"/>
+                </a:schemeClr>
+              </a:effectRef>
+              <a:fontRef idx="minor">
+                <a:schemeClr val="lt1"/>
+              </a:fontRef>
+            </p:style>
+            <p:txBody>
+              <a:bodyPr spcFirstLastPara="0" vert="horz" wrap="square" lIns="595328" tIns="595328" rIns="595328" bIns="595328" numCol="1" spcCol="1270" anchor="ctr" anchorCtr="0">
+                <a:noAutofit/>
+              </a:bodyPr>
+              <a:lstStyle/>
+              <a:p>
+                <a:pPr lvl="0" algn="ctr" defTabSz="2711450">
+                  <a:lnSpc>
+                    <a:spcPct val="90000"/>
+                  </a:lnSpc>
+                  <a:spcBef>
+                    <a:spcPct val="0"/>
+                  </a:spcBef>
+                  <a:spcAft>
+                    <a:spcPct val="35000"/>
+                  </a:spcAft>
+                </a:pPr>
+                <a:endParaRPr lang="en-US" sz="6100" kern="1200" dirty="0"/>
+              </a:p>
+            </p:txBody>
+          </p:sp>
+          <p:cxnSp>
+            <p:nvCxnSpPr>
+              <p:cNvPr id="26" name="Straight Connector 25"/>
+              <p:cNvCxnSpPr/>
+              <p:nvPr/>
+            </p:nvCxnSpPr>
+            <p:spPr>
+              <a:xfrm>
+                <a:off x="6746399" y="383997"/>
+                <a:ext cx="0" cy="12545806"/>
+              </a:xfrm>
+              <a:prstGeom prst="line">
+                <a:avLst/>
+              </a:prstGeom>
+              <a:ln w="57150" cmpd="sng">
+                <a:solidFill>
+                  <a:srgbClr val="FFFFFF"/>
+                </a:solidFill>
+              </a:ln>
+              <a:effectLst/>
+            </p:spPr>
+            <p:style>
+              <a:lnRef idx="2">
+                <a:schemeClr val="accent1"/>
+              </a:lnRef>
+              <a:fillRef idx="0">
+                <a:schemeClr val="accent1"/>
+              </a:fillRef>
+              <a:effectRef idx="1">
+                <a:schemeClr val="accent1"/>
+              </a:effectRef>
+              <a:fontRef idx="minor">
+                <a:schemeClr val="tx1"/>
+              </a:fontRef>
+            </p:style>
+          </p:cxnSp>
+          <p:cxnSp>
+            <p:nvCxnSpPr>
+              <p:cNvPr id="27" name="Straight Connector 26"/>
+              <p:cNvCxnSpPr/>
+              <p:nvPr/>
+            </p:nvCxnSpPr>
+            <p:spPr>
+              <a:xfrm>
+                <a:off x="519450" y="6630988"/>
+                <a:ext cx="12545802" cy="0"/>
+              </a:xfrm>
+              <a:prstGeom prst="line">
+                <a:avLst/>
+              </a:prstGeom>
+              <a:ln w="57150" cmpd="sng">
+                <a:solidFill>
+                  <a:srgbClr val="FFFFFF"/>
+                </a:solidFill>
+              </a:ln>
+              <a:effectLst/>
+            </p:spPr>
+            <p:style>
+              <a:lnRef idx="2">
+                <a:schemeClr val="accent1"/>
+              </a:lnRef>
+              <a:fillRef idx="0">
+                <a:schemeClr val="accent1"/>
+              </a:fillRef>
+              <a:effectRef idx="1">
+                <a:schemeClr val="accent1"/>
+              </a:effectRef>
+              <a:fontRef idx="minor">
+                <a:schemeClr val="tx1"/>
+              </a:fontRef>
+            </p:style>
+          </p:cxnSp>
+          <p:cxnSp>
+            <p:nvCxnSpPr>
+              <p:cNvPr id="28" name="Straight Connector 27"/>
+              <p:cNvCxnSpPr/>
+              <p:nvPr/>
+            </p:nvCxnSpPr>
+            <p:spPr>
+              <a:xfrm flipV="1">
+                <a:off x="2351494" y="2263470"/>
+                <a:ext cx="8940707" cy="8852683"/>
+              </a:xfrm>
+              <a:prstGeom prst="line">
+                <a:avLst/>
+              </a:prstGeom>
+              <a:ln w="57150" cmpd="sng">
+                <a:solidFill>
+                  <a:srgbClr val="FFFFFF"/>
+                </a:solidFill>
+              </a:ln>
+              <a:effectLst/>
+            </p:spPr>
+            <p:style>
+              <a:lnRef idx="2">
+                <a:schemeClr val="accent1"/>
+              </a:lnRef>
+              <a:fillRef idx="0">
+                <a:schemeClr val="accent1"/>
+              </a:fillRef>
+              <a:effectRef idx="1">
+                <a:schemeClr val="accent1"/>
+              </a:effectRef>
+              <a:fontRef idx="minor">
+                <a:schemeClr val="tx1"/>
+              </a:fontRef>
+            </p:style>
+          </p:cxnSp>
+          <p:cxnSp>
+            <p:nvCxnSpPr>
+              <p:cNvPr id="29" name="Straight Connector 28"/>
+              <p:cNvCxnSpPr/>
+              <p:nvPr/>
+            </p:nvCxnSpPr>
+            <p:spPr>
+              <a:xfrm>
+                <a:off x="2364069" y="2175446"/>
+                <a:ext cx="8852683" cy="8940707"/>
+              </a:xfrm>
+              <a:prstGeom prst="line">
+                <a:avLst/>
+              </a:prstGeom>
+              <a:ln w="57150" cmpd="sng">
+                <a:solidFill>
+                  <a:srgbClr val="FFFFFF"/>
+                </a:solidFill>
+              </a:ln>
+              <a:effectLst/>
+            </p:spPr>
+            <p:style>
+              <a:lnRef idx="2">
+                <a:schemeClr val="accent1"/>
+              </a:lnRef>
+              <a:fillRef idx="0">
+                <a:schemeClr val="accent1"/>
+              </a:fillRef>
+              <a:effectRef idx="1">
+                <a:schemeClr val="accent1"/>
+              </a:effectRef>
+              <a:fontRef idx="minor">
+                <a:schemeClr val="tx1"/>
+              </a:fontRef>
+            </p:style>
+          </p:cxnSp>
+          <p:sp>
+            <p:nvSpPr>
+              <p:cNvPr id="30" name="Freeform 29"/>
+              <p:cNvSpPr/>
+              <p:nvPr/>
+            </p:nvSpPr>
+            <p:spPr>
+              <a:xfrm>
+                <a:off x="5089921" y="4866444"/>
+                <a:ext cx="3536155" cy="3536155"/>
+              </a:xfrm>
+              <a:custGeom>
+                <a:avLst/>
+                <a:gdLst>
+                  <a:gd name="connsiteX0" fmla="*/ 0 w 3536155"/>
+                  <a:gd name="connsiteY0" fmla="*/ 1768078 h 3536155"/>
+                  <a:gd name="connsiteX1" fmla="*/ 1768078 w 3536155"/>
+                  <a:gd name="connsiteY1" fmla="*/ 0 h 3536155"/>
+                  <a:gd name="connsiteX2" fmla="*/ 3536156 w 3536155"/>
+                  <a:gd name="connsiteY2" fmla="*/ 1768078 h 3536155"/>
+                  <a:gd name="connsiteX3" fmla="*/ 1768078 w 3536155"/>
+                  <a:gd name="connsiteY3" fmla="*/ 3536156 h 3536155"/>
+                  <a:gd name="connsiteX4" fmla="*/ 0 w 3536155"/>
+                  <a:gd name="connsiteY4" fmla="*/ 1768078 h 3536155"/>
+                </a:gdLst>
+                <a:ahLst/>
+                <a:cxnLst>
+                  <a:cxn ang="0">
+                    <a:pos x="connsiteX0" y="connsiteY0"/>
+                  </a:cxn>
+                  <a:cxn ang="0">
+                    <a:pos x="connsiteX1" y="connsiteY1"/>
+                  </a:cxn>
+                  <a:cxn ang="0">
+                    <a:pos x="connsiteX2" y="connsiteY2"/>
+                  </a:cxn>
+                  <a:cxn ang="0">
+                    <a:pos x="connsiteX3" y="connsiteY3"/>
+                  </a:cxn>
+                  <a:cxn ang="0">
+                    <a:pos x="connsiteX4" y="connsiteY4"/>
+                  </a:cxn>
+                </a:cxnLst>
+                <a:rect l="l" t="t" r="r" b="b"/>
+                <a:pathLst>
+                  <a:path w="3536155" h="3536155">
+                    <a:moveTo>
+                      <a:pt x="0" y="1768078"/>
+                    </a:moveTo>
+                    <a:cubicBezTo>
+                      <a:pt x="0" y="791595"/>
+                      <a:pt x="791595" y="0"/>
+                      <a:pt x="1768078" y="0"/>
+                    </a:cubicBezTo>
+                    <a:cubicBezTo>
+                      <a:pt x="2744561" y="0"/>
+                      <a:pt x="3536156" y="791595"/>
+                      <a:pt x="3536156" y="1768078"/>
+                    </a:cubicBezTo>
+                    <a:cubicBezTo>
+                      <a:pt x="3536156" y="2744561"/>
+                      <a:pt x="2744561" y="3536156"/>
+                      <a:pt x="1768078" y="3536156"/>
+                    </a:cubicBezTo>
+                    <a:cubicBezTo>
+                      <a:pt x="791595" y="3536156"/>
+                      <a:pt x="0" y="2744561"/>
+                      <a:pt x="0" y="1768078"/>
+                    </a:cubicBezTo>
+                    <a:close/>
+                  </a:path>
+                </a:pathLst>
+              </a:custGeom>
+              <a:solidFill>
+                <a:schemeClr val="bg1"/>
+              </a:solidFill>
+              <a:ln w="38100" cmpd="sng"/>
+            </p:spPr>
+            <p:style>
+              <a:lnRef idx="2">
+                <a:schemeClr val="lt1">
+                  <a:hueOff val="0"/>
+                  <a:satOff val="0"/>
+                  <a:lumOff val="0"/>
+                  <a:alphaOff val="0"/>
+                </a:schemeClr>
+              </a:lnRef>
+              <a:fillRef idx="1">
+                <a:schemeClr val="accent2">
+                  <a:hueOff val="0"/>
+                  <a:satOff val="0"/>
+                  <a:lumOff val="0"/>
+                  <a:alphaOff val="0"/>
+                </a:schemeClr>
+              </a:fillRef>
+              <a:effectRef idx="0">
+                <a:schemeClr val="accent2">
+                  <a:hueOff val="0"/>
+                  <a:satOff val="0"/>
+                  <a:lumOff val="0"/>
+                  <a:alphaOff val="0"/>
+                </a:schemeClr>
+              </a:effectRef>
+              <a:fontRef idx="minor">
+                <a:schemeClr val="lt1"/>
+              </a:fontRef>
+            </p:style>
+            <p:txBody>
+              <a:bodyPr spcFirstLastPara="0" vert="horz" wrap="square" lIns="595328" tIns="595328" rIns="595328" bIns="595328" numCol="1" spcCol="1270" anchor="ctr" anchorCtr="0">
+                <a:noAutofit/>
+              </a:bodyPr>
+              <a:lstStyle/>
+              <a:p>
+                <a:pPr lvl="0" algn="ctr" defTabSz="2711450">
+                  <a:lnSpc>
+                    <a:spcPct val="90000"/>
+                  </a:lnSpc>
+                  <a:spcBef>
+                    <a:spcPct val="0"/>
+                  </a:spcBef>
+                  <a:spcAft>
+                    <a:spcPct val="35000"/>
+                  </a:spcAft>
+                </a:pPr>
+                <a:endParaRPr lang="en-US" sz="6100" kern="1200" dirty="0"/>
+              </a:p>
+            </p:txBody>
+          </p:sp>
+          <p:sp>
+            <p:nvSpPr>
+              <p:cNvPr id="31" name="Isosceles Triangle 30"/>
+              <p:cNvSpPr/>
+              <p:nvPr/>
+            </p:nvSpPr>
+            <p:spPr>
+              <a:xfrm rot="7947077">
+                <a:off x="10432951" y="2238762"/>
+                <a:ext cx="1315692" cy="659103"/>
+              </a:xfrm>
+              <a:prstGeom prst="triangle">
+                <a:avLst/>
+              </a:prstGeom>
+              <a:solidFill>
+                <a:schemeClr val="accent3"/>
+              </a:solidFill>
+              <a:ln>
+                <a:noFill/>
+              </a:ln>
+              <a:effectLst/>
+            </p:spPr>
+            <p:style>
+              <a:lnRef idx="1">
+                <a:schemeClr val="accent1"/>
+              </a:lnRef>
+              <a:fillRef idx="3">
+                <a:schemeClr val="accent1"/>
+              </a:fillRef>
+              <a:effectRef idx="2">
+                <a:schemeClr val="accent1"/>
+              </a:effectRef>
+              <a:fontRef idx="minor">
+                <a:schemeClr val="lt1"/>
+              </a:fontRef>
+            </p:style>
+            <p:txBody>
+              <a:bodyPr rtlCol="0" anchor="ctr"/>
+              <a:lstStyle/>
+              <a:p>
+                <a:pPr algn="ctr"/>
+                <a:endParaRPr lang="en-US"/>
+              </a:p>
+            </p:txBody>
+          </p:sp>
+          <p:sp>
+            <p:nvSpPr>
+              <p:cNvPr id="32" name="Isosceles Triangle 31"/>
+              <p:cNvSpPr/>
+              <p:nvPr/>
+            </p:nvSpPr>
+            <p:spPr>
+              <a:xfrm rot="10800000">
+                <a:off x="12029955" y="6425103"/>
+                <a:ext cx="1315692" cy="659103"/>
+              </a:xfrm>
+              <a:prstGeom prst="triangle">
+                <a:avLst/>
+              </a:prstGeom>
+              <a:solidFill>
+                <a:srgbClr val="70B85A"/>
+              </a:solidFill>
+              <a:ln>
+                <a:noFill/>
+              </a:ln>
+              <a:effectLst/>
+            </p:spPr>
+            <p:style>
+              <a:lnRef idx="1">
+                <a:schemeClr val="accent1"/>
+              </a:lnRef>
+              <a:fillRef idx="3">
+                <a:schemeClr val="accent1"/>
+              </a:fillRef>
+              <a:effectRef idx="2">
+                <a:schemeClr val="accent1"/>
+              </a:effectRef>
+              <a:fontRef idx="minor">
+                <a:schemeClr val="lt1"/>
+              </a:fontRef>
+            </p:style>
+            <p:txBody>
+              <a:bodyPr rtlCol="0" anchor="ctr"/>
+              <a:lstStyle/>
+              <a:p>
+                <a:pPr algn="ctr"/>
+                <a:endParaRPr lang="en-US"/>
+              </a:p>
+            </p:txBody>
+          </p:sp>
+          <p:sp>
+            <p:nvSpPr>
+              <p:cNvPr id="33" name="Isosceles Triangle 32"/>
+              <p:cNvSpPr/>
+              <p:nvPr/>
+            </p:nvSpPr>
+            <p:spPr>
+              <a:xfrm rot="13509961">
+                <a:off x="10170382" y="10575093"/>
+                <a:ext cx="1315692" cy="659103"/>
+              </a:xfrm>
+              <a:prstGeom prst="triangle">
+                <a:avLst/>
+              </a:prstGeom>
+              <a:solidFill>
+                <a:srgbClr val="5CB46F"/>
+              </a:solidFill>
+              <a:ln>
+                <a:noFill/>
+              </a:ln>
+              <a:effectLst/>
+            </p:spPr>
+            <p:style>
+              <a:lnRef idx="1">
+                <a:schemeClr val="accent1"/>
+              </a:lnRef>
+              <a:fillRef idx="3">
+                <a:schemeClr val="accent1"/>
+              </a:fillRef>
+              <a:effectRef idx="2">
+                <a:schemeClr val="accent1"/>
+              </a:effectRef>
+              <a:fontRef idx="minor">
+                <a:schemeClr val="lt1"/>
+              </a:fontRef>
+            </p:style>
+            <p:txBody>
+              <a:bodyPr rtlCol="0" anchor="ctr"/>
+              <a:lstStyle/>
+              <a:p>
+                <a:pPr algn="ctr"/>
+                <a:endParaRPr lang="en-US"/>
+              </a:p>
+            </p:txBody>
+          </p:sp>
+          <p:sp>
+            <p:nvSpPr>
+              <p:cNvPr id="34" name="Isosceles Triangle 33"/>
+              <p:cNvSpPr/>
+              <p:nvPr/>
+            </p:nvSpPr>
+            <p:spPr>
+              <a:xfrm rot="16200000">
+                <a:off x="5962805" y="12186595"/>
+                <a:ext cx="1315692" cy="659103"/>
+              </a:xfrm>
+              <a:prstGeom prst="triangle">
+                <a:avLst/>
+              </a:prstGeom>
+              <a:solidFill>
+                <a:srgbClr val="5DB195"/>
+              </a:solidFill>
+              <a:ln>
+                <a:noFill/>
+              </a:ln>
+              <a:effectLst/>
+            </p:spPr>
+            <p:style>
+              <a:lnRef idx="1">
+                <a:schemeClr val="accent1"/>
+              </a:lnRef>
+              <a:fillRef idx="3">
+                <a:schemeClr val="accent1"/>
+              </a:fillRef>
+              <a:effectRef idx="2">
+                <a:schemeClr val="accent1"/>
+              </a:effectRef>
+              <a:fontRef idx="minor">
+                <a:schemeClr val="lt1"/>
+              </a:fontRef>
+            </p:style>
+            <p:txBody>
+              <a:bodyPr rtlCol="0" anchor="ctr"/>
+              <a:lstStyle/>
+              <a:p>
+                <a:pPr algn="ctr"/>
+                <a:endParaRPr lang="en-US"/>
+              </a:p>
+            </p:txBody>
+          </p:sp>
+          <p:sp>
+            <p:nvSpPr>
+              <p:cNvPr id="35" name="Isosceles Triangle 34"/>
+              <p:cNvSpPr/>
+              <p:nvPr/>
+            </p:nvSpPr>
+            <p:spPr>
+              <a:xfrm rot="18615642">
+                <a:off x="1828766" y="10424195"/>
+                <a:ext cx="1315692" cy="659103"/>
+              </a:xfrm>
+              <a:prstGeom prst="triangle">
+                <a:avLst/>
+              </a:prstGeom>
+              <a:solidFill>
+                <a:srgbClr val="5FA4AD"/>
+              </a:solidFill>
+              <a:ln>
+                <a:noFill/>
+              </a:ln>
+              <a:effectLst/>
+            </p:spPr>
+            <p:style>
+              <a:lnRef idx="1">
+                <a:schemeClr val="accent1"/>
+              </a:lnRef>
+              <a:fillRef idx="3">
+                <a:schemeClr val="accent1"/>
+              </a:fillRef>
+              <a:effectRef idx="2">
+                <a:schemeClr val="accent1"/>
+              </a:effectRef>
+              <a:fontRef idx="minor">
+                <a:schemeClr val="lt1"/>
+              </a:fontRef>
+            </p:style>
+            <p:txBody>
+              <a:bodyPr rtlCol="0" anchor="ctr"/>
+              <a:lstStyle/>
+              <a:p>
+                <a:pPr algn="ctr"/>
+                <a:endParaRPr lang="en-US"/>
+              </a:p>
+            </p:txBody>
+          </p:sp>
+          <p:sp>
+            <p:nvSpPr>
+              <p:cNvPr id="36" name="Isosceles Triangle 35"/>
+              <p:cNvSpPr/>
+              <p:nvPr/>
+            </p:nvSpPr>
+            <p:spPr>
+              <a:xfrm>
+                <a:off x="241260" y="6221301"/>
+                <a:ext cx="1315692" cy="659103"/>
+              </a:xfrm>
+              <a:prstGeom prst="triangle">
+                <a:avLst/>
+              </a:prstGeom>
+              <a:solidFill>
+                <a:srgbClr val="6181A9"/>
+              </a:solidFill>
+              <a:ln>
+                <a:noFill/>
+              </a:ln>
+              <a:effectLst/>
+            </p:spPr>
+            <p:style>
+              <a:lnRef idx="1">
+                <a:schemeClr val="accent1"/>
+              </a:lnRef>
+              <a:fillRef idx="3">
+                <a:schemeClr val="accent1"/>
+              </a:fillRef>
+              <a:effectRef idx="2">
+                <a:schemeClr val="accent1"/>
+              </a:effectRef>
+              <a:fontRef idx="minor">
+                <a:schemeClr val="lt1"/>
+              </a:fontRef>
+            </p:style>
+            <p:txBody>
+              <a:bodyPr rtlCol="0" anchor="ctr"/>
+              <a:lstStyle/>
+              <a:p>
+                <a:pPr algn="ctr"/>
+                <a:endParaRPr lang="en-US"/>
+              </a:p>
+            </p:txBody>
+          </p:sp>
+          <p:sp>
+            <p:nvSpPr>
+              <p:cNvPr id="37" name="Isosceles Triangle 36"/>
+              <p:cNvSpPr/>
+              <p:nvPr/>
+            </p:nvSpPr>
+            <p:spPr>
+              <a:xfrm rot="2521761">
+                <a:off x="2021199" y="2067498"/>
+                <a:ext cx="1315692" cy="659103"/>
+              </a:xfrm>
+              <a:prstGeom prst="triangle">
+                <a:avLst/>
+              </a:prstGeom>
+              <a:solidFill>
+                <a:srgbClr val="6361A6"/>
+              </a:solidFill>
+              <a:ln>
+                <a:noFill/>
+              </a:ln>
+              <a:effectLst/>
+            </p:spPr>
+            <p:style>
+              <a:lnRef idx="1">
+                <a:schemeClr val="accent1"/>
+              </a:lnRef>
+              <a:fillRef idx="3">
+                <a:schemeClr val="accent1"/>
+              </a:fillRef>
+              <a:effectRef idx="2">
+                <a:schemeClr val="accent1"/>
+              </a:effectRef>
+              <a:fontRef idx="minor">
+                <a:schemeClr val="lt1"/>
+              </a:fontRef>
+            </p:style>
+            <p:txBody>
+              <a:bodyPr rtlCol="0" anchor="ctr"/>
+              <a:lstStyle/>
+              <a:p>
+                <a:pPr algn="ctr"/>
+                <a:endParaRPr lang="en-US"/>
+              </a:p>
+            </p:txBody>
+          </p:sp>
+          <p:sp>
+            <p:nvSpPr>
+              <p:cNvPr id="38" name="Isosceles Triangle 37"/>
+              <p:cNvSpPr/>
+              <p:nvPr/>
+            </p:nvSpPr>
+            <p:spPr>
+              <a:xfrm rot="5400000">
+                <a:off x="6242057" y="446846"/>
+                <a:ext cx="1315692" cy="659103"/>
+              </a:xfrm>
+              <a:prstGeom prst="triangle">
+                <a:avLst/>
+              </a:prstGeom>
+              <a:solidFill>
+                <a:srgbClr val="8064A2"/>
+              </a:solidFill>
+              <a:ln>
+                <a:noFill/>
+              </a:ln>
+              <a:effectLst/>
+            </p:spPr>
+            <p:style>
+              <a:lnRef idx="1">
+                <a:schemeClr val="accent1"/>
+              </a:lnRef>
+              <a:fillRef idx="3">
+                <a:schemeClr val="accent1"/>
+              </a:fillRef>
+              <a:effectRef idx="2">
+                <a:schemeClr val="accent1"/>
+              </a:effectRef>
+              <a:fontRef idx="minor">
+                <a:schemeClr val="lt1"/>
+              </a:fontRef>
+            </p:style>
+            <p:txBody>
+              <a:bodyPr rtlCol="0" anchor="ctr"/>
+              <a:lstStyle/>
+              <a:p>
+                <a:pPr algn="ctr"/>
+                <a:endParaRPr lang="en-US"/>
+              </a:p>
+            </p:txBody>
+          </p:sp>
+          <p:sp>
+            <p:nvSpPr>
+              <p:cNvPr id="39" name="TextBox 38"/>
+              <p:cNvSpPr txBox="1"/>
+              <p:nvPr/>
+            </p:nvSpPr>
+            <p:spPr>
+              <a:xfrm rot="1348060">
+                <a:off x="7411656" y="1173025"/>
+                <a:ext cx="2935757" cy="971705"/>
+              </a:xfrm>
+              <a:prstGeom prst="rect">
+                <a:avLst/>
+              </a:prstGeom>
+              <a:noFill/>
+            </p:spPr>
+            <p:txBody>
+              <a:bodyPr wrap="none" rtlCol="0">
+                <a:prstTxWarp prst="textArchUp">
+                  <a:avLst>
+                    <a:gd name="adj" fmla="val 13900857"/>
+                  </a:avLst>
+                </a:prstTxWarp>
+                <a:spAutoFit/>
+              </a:bodyPr>
+              <a:lstStyle/>
+              <a:p>
+                <a:r>
+                  <a:rPr lang="en-US" sz="5400" dirty="0" smtClean="0">
+                    <a:solidFill>
+                      <a:schemeClr val="bg1"/>
+                    </a:solidFill>
+                  </a:rPr>
+                  <a:t>Planning</a:t>
+                </a:r>
+                <a:endParaRPr lang="en-US" sz="5400" dirty="0">
+                  <a:solidFill>
+                    <a:schemeClr val="bg1"/>
+                  </a:solidFill>
+                </a:endParaRPr>
+              </a:p>
+            </p:txBody>
+          </p:sp>
+          <p:sp>
+            <p:nvSpPr>
+              <p:cNvPr id="40" name="TextBox 39"/>
+              <p:cNvSpPr txBox="1"/>
+              <p:nvPr/>
+            </p:nvSpPr>
+            <p:spPr>
+              <a:xfrm rot="1501794">
+                <a:off x="2578528" y="11146574"/>
+                <a:ext cx="4040987" cy="971705"/>
+              </a:xfrm>
+              <a:prstGeom prst="rect">
+                <a:avLst/>
+              </a:prstGeom>
+              <a:noFill/>
+            </p:spPr>
+            <p:txBody>
+              <a:bodyPr wrap="none" rtlCol="0">
+                <a:prstTxWarp prst="textArchDown">
+                  <a:avLst>
+                    <a:gd name="adj" fmla="val 1975460"/>
+                  </a:avLst>
+                </a:prstTxWarp>
+                <a:spAutoFit/>
+              </a:bodyPr>
+              <a:lstStyle/>
+              <a:p>
+                <a:r>
+                  <a:rPr lang="en-US" sz="5400" dirty="0" smtClean="0">
+                    <a:solidFill>
+                      <a:schemeClr val="bg1"/>
+                    </a:solidFill>
+                  </a:rPr>
+                  <a:t>Discovery &amp; Access</a:t>
+                </a:r>
+                <a:endParaRPr lang="en-US" sz="5400" dirty="0">
+                  <a:solidFill>
+                    <a:schemeClr val="bg1"/>
+                  </a:solidFill>
+                </a:endParaRPr>
+              </a:p>
+            </p:txBody>
+          </p:sp>
+          <p:sp>
+            <p:nvSpPr>
+              <p:cNvPr id="41" name="TextBox 40"/>
+              <p:cNvSpPr txBox="1"/>
+              <p:nvPr/>
+            </p:nvSpPr>
+            <p:spPr>
+              <a:xfrm rot="20231778">
+                <a:off x="6808699" y="11167482"/>
+                <a:ext cx="4187779" cy="971705"/>
+              </a:xfrm>
+              <a:prstGeom prst="rect">
+                <a:avLst/>
+              </a:prstGeom>
+              <a:noFill/>
+            </p:spPr>
+            <p:txBody>
+              <a:bodyPr wrap="none" rtlCol="0">
+                <a:prstTxWarp prst="textArchDown">
+                  <a:avLst>
+                    <a:gd name="adj" fmla="val 1975460"/>
+                  </a:avLst>
+                </a:prstTxWarp>
+                <a:spAutoFit/>
+              </a:bodyPr>
+              <a:lstStyle/>
+              <a:p>
+                <a:r>
+                  <a:rPr lang="en-US" sz="5400" dirty="0" smtClean="0">
+                    <a:solidFill>
+                      <a:schemeClr val="bg1"/>
+                    </a:solidFill>
+                  </a:rPr>
+                  <a:t>Sharing &amp; Contributing</a:t>
+                </a:r>
+                <a:endParaRPr lang="en-US" sz="5400" dirty="0">
+                  <a:solidFill>
+                    <a:schemeClr val="bg1"/>
+                  </a:solidFill>
+                </a:endParaRPr>
+              </a:p>
+            </p:txBody>
+          </p:sp>
+          <p:sp>
+            <p:nvSpPr>
+              <p:cNvPr id="42" name="TextBox 41"/>
+              <p:cNvSpPr txBox="1"/>
+              <p:nvPr/>
+            </p:nvSpPr>
+            <p:spPr>
+              <a:xfrm rot="4019582">
+                <a:off x="-28609" y="8230001"/>
+                <a:ext cx="3608468" cy="971705"/>
+              </a:xfrm>
+              <a:prstGeom prst="rect">
+                <a:avLst/>
+              </a:prstGeom>
+              <a:noFill/>
+            </p:spPr>
+            <p:txBody>
+              <a:bodyPr wrap="none" rtlCol="0">
+                <a:prstTxWarp prst="textArchDown">
+                  <a:avLst>
+                    <a:gd name="adj" fmla="val 2940312"/>
+                  </a:avLst>
+                </a:prstTxWarp>
+                <a:spAutoFit/>
+              </a:bodyPr>
+              <a:lstStyle/>
+              <a:p>
+                <a:r>
+                  <a:rPr lang="en-US" sz="5400" dirty="0" smtClean="0">
+                    <a:solidFill>
+                      <a:schemeClr val="bg1"/>
+                    </a:solidFill>
+                  </a:rPr>
+                  <a:t>Use &amp; Reuse</a:t>
+                </a:r>
+                <a:endParaRPr lang="en-US" sz="5400" dirty="0">
+                  <a:solidFill>
+                    <a:schemeClr val="bg1"/>
+                  </a:solidFill>
+                </a:endParaRPr>
+              </a:p>
+            </p:txBody>
+          </p:sp>
+          <p:sp>
+            <p:nvSpPr>
+              <p:cNvPr id="43" name="TextBox 42"/>
+              <p:cNvSpPr txBox="1"/>
+              <p:nvPr/>
+            </p:nvSpPr>
+            <p:spPr>
+              <a:xfrm rot="17542108">
+                <a:off x="9807712" y="8243930"/>
+                <a:ext cx="3955797" cy="971705"/>
+              </a:xfrm>
+              <a:prstGeom prst="rect">
+                <a:avLst/>
+              </a:prstGeom>
+              <a:noFill/>
+            </p:spPr>
+            <p:txBody>
+              <a:bodyPr wrap="none" rtlCol="0">
+                <a:prstTxWarp prst="textArchDown">
+                  <a:avLst>
+                    <a:gd name="adj" fmla="val 1590425"/>
+                  </a:avLst>
+                </a:prstTxWarp>
+                <a:spAutoFit/>
+              </a:bodyPr>
+              <a:lstStyle/>
+              <a:p>
+                <a:r>
+                  <a:rPr lang="en-US" sz="5400" dirty="0" smtClean="0">
+                    <a:solidFill>
+                      <a:schemeClr val="bg1"/>
+                    </a:solidFill>
+                  </a:rPr>
+                  <a:t>Analysis &amp; Processing</a:t>
+                </a:r>
+                <a:endParaRPr lang="en-US" sz="5400" dirty="0">
+                  <a:solidFill>
+                    <a:schemeClr val="bg1"/>
+                  </a:solidFill>
+                </a:endParaRPr>
+              </a:p>
+            </p:txBody>
+          </p:sp>
+          <p:sp>
+            <p:nvSpPr>
+              <p:cNvPr id="44" name="TextBox 43"/>
+              <p:cNvSpPr txBox="1"/>
+              <p:nvPr/>
+            </p:nvSpPr>
+            <p:spPr>
+              <a:xfrm rot="3864906">
+                <a:off x="10241026" y="3907894"/>
+                <a:ext cx="2923007" cy="971705"/>
+              </a:xfrm>
+              <a:prstGeom prst="rect">
+                <a:avLst/>
+              </a:prstGeom>
+              <a:noFill/>
+            </p:spPr>
+            <p:txBody>
+              <a:bodyPr wrap="none" rtlCol="0">
+                <a:prstTxWarp prst="textArchUp">
+                  <a:avLst>
+                    <a:gd name="adj" fmla="val 13126889"/>
+                  </a:avLst>
+                </a:prstTxWarp>
+                <a:spAutoFit/>
+              </a:bodyPr>
+              <a:lstStyle/>
+              <a:p>
+                <a:r>
+                  <a:rPr lang="en-US" sz="5400" dirty="0" smtClean="0">
+                    <a:solidFill>
+                      <a:schemeClr val="bg1"/>
+                    </a:solidFill>
+                  </a:rPr>
+                  <a:t>Acquisition</a:t>
+                </a:r>
+                <a:endParaRPr lang="en-US" sz="5400" dirty="0">
+                  <a:solidFill>
+                    <a:schemeClr val="bg1"/>
+                  </a:solidFill>
+                </a:endParaRPr>
+              </a:p>
+            </p:txBody>
+          </p:sp>
+          <p:sp>
+            <p:nvSpPr>
+              <p:cNvPr id="45" name="TextBox 44"/>
+              <p:cNvSpPr txBox="1"/>
+              <p:nvPr/>
+            </p:nvSpPr>
+            <p:spPr>
+              <a:xfrm>
+                <a:off x="8725366" y="6045319"/>
+                <a:ext cx="4094450" cy="369332"/>
+              </a:xfrm>
+              <a:prstGeom prst="rect">
+                <a:avLst/>
+              </a:prstGeom>
+              <a:noFill/>
+            </p:spPr>
+            <p:txBody>
+              <a:bodyPr wrap="square" rtlCol="0">
+                <a:spAutoFit/>
+              </a:bodyPr>
+              <a:lstStyle/>
+              <a:p>
+                <a:pPr marL="342900" indent="-342900">
+                  <a:buFont typeface="Wingdings" charset="2"/>
+                  <a:buChar char="²"/>
+                </a:pPr>
+                <a:r>
+                  <a:rPr lang="en-US" sz="1800" dirty="0" smtClean="0">
+                    <a:solidFill>
+                      <a:srgbClr val="3B6131"/>
+                    </a:solidFill>
+                  </a:rPr>
+                  <a:t>In </a:t>
+                </a:r>
+                <a:r>
+                  <a:rPr lang="en-US" sz="1800" dirty="0">
+                    <a:solidFill>
+                      <a:srgbClr val="3B6131"/>
+                    </a:solidFill>
+                  </a:rPr>
+                  <a:t>situ data </a:t>
+                </a:r>
+                <a:r>
+                  <a:rPr lang="en-US" sz="1800" dirty="0" smtClean="0">
+                    <a:solidFill>
+                      <a:srgbClr val="3B6131"/>
+                    </a:solidFill>
+                  </a:rPr>
+                  <a:t>pre-processing </a:t>
+                </a:r>
+                <a:endParaRPr lang="en-US" sz="1800" dirty="0">
+                  <a:solidFill>
+                    <a:srgbClr val="3B6131"/>
+                  </a:solidFill>
+                </a:endParaRPr>
+              </a:p>
+            </p:txBody>
+          </p:sp>
+          <p:sp>
+            <p:nvSpPr>
+              <p:cNvPr id="46" name="TextBox 45"/>
+              <p:cNvSpPr txBox="1"/>
+              <p:nvPr/>
+            </p:nvSpPr>
+            <p:spPr>
+              <a:xfrm>
+                <a:off x="6836499" y="1800865"/>
+                <a:ext cx="2894909" cy="2862323"/>
+              </a:xfrm>
+              <a:prstGeom prst="rect">
+                <a:avLst/>
+              </a:prstGeom>
+              <a:noFill/>
+            </p:spPr>
+            <p:txBody>
+              <a:bodyPr wrap="square" rtlCol="0">
+                <a:spAutoFit/>
+              </a:bodyPr>
+              <a:lstStyle/>
+              <a:p>
+                <a:pPr marL="342900" indent="-342900">
+                  <a:buFont typeface="Wingdings" charset="2"/>
+                  <a:buChar char="²"/>
+                </a:pPr>
+                <a:r>
+                  <a:rPr lang="en-US" sz="1800" dirty="0">
+                    <a:solidFill>
+                      <a:srgbClr val="5F7237"/>
+                    </a:solidFill>
+                  </a:rPr>
+                  <a:t>Data lifecycle management </a:t>
+                </a:r>
+                <a:r>
+                  <a:rPr lang="en-US" sz="1800" dirty="0" smtClean="0">
+                    <a:solidFill>
+                      <a:srgbClr val="5F7237"/>
+                    </a:solidFill>
+                  </a:rPr>
+                  <a:t>strategies</a:t>
+                </a:r>
+              </a:p>
+              <a:p>
+                <a:pPr marL="342900" indent="-342900">
+                  <a:buFont typeface="Wingdings" charset="2"/>
+                  <a:buChar char="²"/>
+                </a:pPr>
+                <a:r>
+                  <a:rPr lang="en-US" sz="1800" dirty="0" smtClean="0">
+                    <a:solidFill>
+                      <a:srgbClr val="5F7237"/>
+                    </a:solidFill>
+                  </a:rPr>
+                  <a:t>Data Protocols</a:t>
+                </a:r>
+              </a:p>
+              <a:p>
+                <a:pPr marL="342900" indent="-342900">
+                  <a:buFont typeface="Wingdings" charset="2"/>
+                  <a:buChar char="²"/>
+                </a:pPr>
+                <a:r>
+                  <a:rPr lang="en-US" sz="1800" dirty="0" smtClean="0">
+                    <a:solidFill>
+                      <a:srgbClr val="5F7237"/>
+                    </a:solidFill>
+                  </a:rPr>
+                  <a:t>NWB:N-Hub extension archive</a:t>
+                </a:r>
+              </a:p>
+              <a:p>
+                <a:pPr marL="342900" indent="-342900">
+                  <a:buFont typeface="Wingdings" charset="2"/>
+                  <a:buChar char="²"/>
+                </a:pPr>
+                <a:r>
+                  <a:rPr lang="en-US" sz="1800" dirty="0" smtClean="0">
+                    <a:solidFill>
+                      <a:srgbClr val="5F7237"/>
+                    </a:solidFill>
+                  </a:rPr>
+                  <a:t>NWB:N software ecosystem &amp; core technologies</a:t>
+                </a:r>
+              </a:p>
+              <a:p>
+                <a:pPr marL="342900" indent="-342900">
+                  <a:buFont typeface="Wingdings" charset="2"/>
+                  <a:buChar char="²"/>
+                </a:pPr>
+                <a:r>
+                  <a:rPr lang="en-US" sz="1800" dirty="0" smtClean="0">
+                    <a:solidFill>
+                      <a:srgbClr val="5F7237"/>
+                    </a:solidFill>
+                  </a:rPr>
+                  <a:t>Governance</a:t>
+                </a:r>
+                <a:endParaRPr lang="en-US" sz="1800" dirty="0">
+                  <a:solidFill>
+                    <a:srgbClr val="5F7237"/>
+                  </a:solidFill>
+                </a:endParaRPr>
+              </a:p>
+              <a:p>
+                <a:pPr marL="342900" indent="-342900">
+                  <a:buFont typeface="Arial"/>
+                  <a:buChar char="•"/>
+                </a:pPr>
+                <a:endParaRPr lang="en-US" sz="1800" dirty="0">
+                  <a:solidFill>
+                    <a:srgbClr val="5F7237"/>
+                  </a:solidFill>
+                </a:endParaRPr>
+              </a:p>
+            </p:txBody>
+          </p:sp>
+          <p:sp>
+            <p:nvSpPr>
+              <p:cNvPr id="47" name="Rectangle 46"/>
+              <p:cNvSpPr/>
+              <p:nvPr/>
+            </p:nvSpPr>
+            <p:spPr>
+              <a:xfrm>
+                <a:off x="9423203" y="4034292"/>
+                <a:ext cx="2503450" cy="646331"/>
+              </a:xfrm>
+              <a:prstGeom prst="rect">
+                <a:avLst/>
+              </a:prstGeom>
+            </p:spPr>
+            <p:txBody>
+              <a:bodyPr wrap="square">
+                <a:spAutoFit/>
+              </a:bodyPr>
+              <a:lstStyle/>
+              <a:p>
+                <a:pPr marL="342900" lvl="0" indent="-342900">
+                  <a:buFont typeface="Wingdings" charset="2"/>
+                  <a:buChar char="²"/>
+                </a:pPr>
+                <a:r>
+                  <a:rPr lang="en-US" sz="1800" dirty="0" smtClean="0">
+                    <a:solidFill>
+                      <a:srgbClr val="3B6131"/>
+                    </a:solidFill>
+                  </a:rPr>
+                  <a:t>Integration with data acquisition </a:t>
+                </a:r>
+                <a:r>
+                  <a:rPr lang="en-US" sz="1800" dirty="0">
+                    <a:solidFill>
+                      <a:srgbClr val="3B6131"/>
+                    </a:solidFill>
+                  </a:rPr>
+                  <a:t>systems</a:t>
+                </a:r>
+              </a:p>
+            </p:txBody>
+          </p:sp>
+          <p:sp>
+            <p:nvSpPr>
+              <p:cNvPr id="48" name="Rectangle 47"/>
+              <p:cNvSpPr/>
+              <p:nvPr/>
+            </p:nvSpPr>
+            <p:spPr>
+              <a:xfrm>
+                <a:off x="8411120" y="5032503"/>
+                <a:ext cx="3762613" cy="923330"/>
+              </a:xfrm>
+              <a:prstGeom prst="rect">
+                <a:avLst/>
+              </a:prstGeom>
+            </p:spPr>
+            <p:txBody>
+              <a:bodyPr wrap="square">
+                <a:spAutoFit/>
+              </a:bodyPr>
+              <a:lstStyle/>
+              <a:p>
+                <a:pPr marL="342900" lvl="0" indent="-342900">
+                  <a:buFont typeface="Wingdings" charset="2"/>
+                  <a:buChar char="²"/>
+                </a:pPr>
+                <a:r>
+                  <a:rPr lang="en-US" sz="1800" dirty="0">
+                    <a:solidFill>
+                      <a:srgbClr val="3B6131"/>
+                    </a:solidFill>
+                  </a:rPr>
+                  <a:t>Advanced I/O strategies: </a:t>
+                </a:r>
+                <a:r>
+                  <a:rPr lang="en-US" sz="1800" dirty="0" smtClean="0">
+                    <a:solidFill>
+                      <a:srgbClr val="3B6131"/>
+                    </a:solidFill>
+                  </a:rPr>
+                  <a:t>streaming</a:t>
+                </a:r>
+                <a:r>
+                  <a:rPr lang="en-US" sz="1800" dirty="0">
+                    <a:solidFill>
+                      <a:srgbClr val="3B6131"/>
+                    </a:solidFill>
+                  </a:rPr>
+                  <a:t>, compression, staging, </a:t>
+                </a:r>
+                <a:r>
+                  <a:rPr lang="is-IS" sz="1800" dirty="0">
+                    <a:solidFill>
+                      <a:srgbClr val="3B6131"/>
+                    </a:solidFill>
+                  </a:rPr>
+                  <a:t>…</a:t>
+                </a:r>
+                <a:endParaRPr lang="en-US" sz="1800" dirty="0">
+                  <a:solidFill>
+                    <a:srgbClr val="3B6131"/>
+                  </a:solidFill>
+                </a:endParaRPr>
+              </a:p>
+            </p:txBody>
+          </p:sp>
+          <p:sp>
+            <p:nvSpPr>
+              <p:cNvPr id="49" name="TextBox 48"/>
+              <p:cNvSpPr txBox="1"/>
+              <p:nvPr/>
+            </p:nvSpPr>
+            <p:spPr>
+              <a:xfrm>
+                <a:off x="4040496" y="1800865"/>
+                <a:ext cx="2672467" cy="2031325"/>
+              </a:xfrm>
+              <a:prstGeom prst="rect">
+                <a:avLst/>
+              </a:prstGeom>
+              <a:noFill/>
+            </p:spPr>
+            <p:txBody>
+              <a:bodyPr wrap="square" rtlCol="0">
+                <a:spAutoFit/>
+              </a:bodyPr>
+              <a:lstStyle/>
+              <a:p>
+                <a:pPr marL="342900" indent="-342900">
+                  <a:buFont typeface="Wingdings" charset="2"/>
+                  <a:buChar char="²"/>
+                </a:pPr>
+                <a:r>
+                  <a:rPr lang="en-US" sz="1800" dirty="0" smtClean="0">
+                    <a:solidFill>
+                      <a:srgbClr val="48395E"/>
+                    </a:solidFill>
+                  </a:rPr>
+                  <a:t>Centralized </a:t>
+                </a:r>
+                <a:r>
+                  <a:rPr lang="en-US" sz="1800" dirty="0">
+                    <a:solidFill>
+                      <a:srgbClr val="48395E"/>
+                    </a:solidFill>
+                  </a:rPr>
+                  <a:t>and distributed data </a:t>
+                </a:r>
+                <a:r>
+                  <a:rPr lang="en-US" sz="1800" dirty="0" smtClean="0">
+                    <a:solidFill>
+                      <a:srgbClr val="48395E"/>
+                    </a:solidFill>
+                  </a:rPr>
+                  <a:t>archives</a:t>
+                </a:r>
+              </a:p>
+              <a:p>
+                <a:pPr marL="342900" indent="-342900">
+                  <a:buFont typeface="Wingdings" charset="2"/>
+                  <a:buChar char="²"/>
+                </a:pPr>
+                <a:r>
+                  <a:rPr lang="en-US" sz="1800" dirty="0" smtClean="0">
+                    <a:solidFill>
+                      <a:srgbClr val="48395E"/>
+                    </a:solidFill>
+                  </a:rPr>
+                  <a:t>Backward </a:t>
+                </a:r>
+                <a:r>
+                  <a:rPr lang="en-US" sz="1800" dirty="0">
+                    <a:solidFill>
+                      <a:srgbClr val="48395E"/>
+                    </a:solidFill>
+                  </a:rPr>
+                  <a:t>compatibility &amp; standardization</a:t>
+                </a:r>
+              </a:p>
+              <a:p>
+                <a:pPr marL="342900" indent="-342900">
+                  <a:buFont typeface="Wingdings" charset="2"/>
+                  <a:buChar char="²"/>
+                </a:pPr>
+                <a:endParaRPr lang="en-US" sz="1800" dirty="0" smtClean="0">
+                  <a:solidFill>
+                    <a:srgbClr val="48395E"/>
+                  </a:solidFill>
+                </a:endParaRPr>
+              </a:p>
+            </p:txBody>
+          </p:sp>
+          <p:sp>
+            <p:nvSpPr>
+              <p:cNvPr id="50" name="TextBox 49"/>
+              <p:cNvSpPr txBox="1"/>
+              <p:nvPr/>
+            </p:nvSpPr>
+            <p:spPr>
+              <a:xfrm>
+                <a:off x="1825979" y="4334966"/>
+                <a:ext cx="3104692" cy="923330"/>
+              </a:xfrm>
+              <a:prstGeom prst="rect">
+                <a:avLst/>
+              </a:prstGeom>
+              <a:noFill/>
+            </p:spPr>
+            <p:txBody>
+              <a:bodyPr wrap="square" rtlCol="0">
+                <a:spAutoFit/>
+              </a:bodyPr>
+              <a:lstStyle/>
+              <a:p>
+                <a:pPr marL="342900" indent="-342900">
+                  <a:buFont typeface="Wingdings" charset="2"/>
+                  <a:buChar char="²"/>
+                </a:pPr>
+                <a:r>
+                  <a:rPr lang="en-US" sz="1800" dirty="0" smtClean="0">
+                    <a:solidFill>
+                      <a:srgbClr val="313054"/>
+                    </a:solidFill>
+                  </a:rPr>
+                  <a:t>Data versioning</a:t>
+                </a:r>
+              </a:p>
+              <a:p>
+                <a:pPr marL="342900" indent="-342900">
+                  <a:buFont typeface="Wingdings" charset="2"/>
+                  <a:buChar char="²"/>
+                </a:pPr>
+                <a:r>
+                  <a:rPr lang="en-US" sz="1800" dirty="0" smtClean="0">
+                    <a:solidFill>
+                      <a:srgbClr val="313054"/>
+                    </a:solidFill>
+                  </a:rPr>
+                  <a:t>Data publication strategies</a:t>
+                </a:r>
+              </a:p>
+              <a:p>
+                <a:pPr marL="342900" indent="-342900">
+                  <a:buFont typeface="Wingdings" charset="2"/>
+                  <a:buChar char="²"/>
+                </a:pPr>
+                <a:r>
+                  <a:rPr lang="en-US" sz="1800" dirty="0" smtClean="0">
+                    <a:solidFill>
+                      <a:srgbClr val="313054"/>
+                    </a:solidFill>
+                  </a:rPr>
+                  <a:t>Data archives</a:t>
+                </a:r>
+              </a:p>
+            </p:txBody>
+          </p:sp>
+          <p:sp>
+            <p:nvSpPr>
+              <p:cNvPr id="51" name="TextBox 50"/>
+              <p:cNvSpPr txBox="1"/>
+              <p:nvPr/>
+            </p:nvSpPr>
+            <p:spPr>
+              <a:xfrm>
+                <a:off x="8605551" y="6715812"/>
+                <a:ext cx="3695027" cy="923330"/>
+              </a:xfrm>
+              <a:prstGeom prst="rect">
+                <a:avLst/>
+              </a:prstGeom>
+              <a:noFill/>
+            </p:spPr>
+            <p:txBody>
+              <a:bodyPr wrap="square" rtlCol="0">
+                <a:spAutoFit/>
+              </a:bodyPr>
+              <a:lstStyle/>
+              <a:p>
+                <a:pPr marL="342900" indent="-342900">
+                  <a:buFont typeface="Wingdings" charset="2"/>
+                  <a:buChar char="²"/>
+                </a:pPr>
+                <a:r>
+                  <a:rPr lang="en-US" sz="1800" dirty="0" smtClean="0">
+                    <a:solidFill>
+                      <a:srgbClr val="2F5B39"/>
+                    </a:solidFill>
+                  </a:rPr>
+                  <a:t>Semantic-aware &amp; standardized visualization, analysis, and exploration </a:t>
+                </a:r>
+              </a:p>
+            </p:txBody>
+          </p:sp>
+          <p:sp>
+            <p:nvSpPr>
+              <p:cNvPr id="52" name="TextBox 51"/>
+              <p:cNvSpPr txBox="1"/>
+              <p:nvPr/>
+            </p:nvSpPr>
+            <p:spPr>
+              <a:xfrm>
+                <a:off x="8188911" y="7655637"/>
+                <a:ext cx="4123571" cy="369332"/>
+              </a:xfrm>
+              <a:prstGeom prst="rect">
+                <a:avLst/>
+              </a:prstGeom>
+              <a:noFill/>
+            </p:spPr>
+            <p:txBody>
+              <a:bodyPr wrap="square" rtlCol="0">
+                <a:spAutoFit/>
+              </a:bodyPr>
+              <a:lstStyle/>
+              <a:p>
+                <a:pPr marL="342900" lvl="0" indent="-342900">
+                  <a:buFont typeface="Wingdings" charset="2"/>
+                  <a:buChar char="²"/>
+                </a:pPr>
+                <a:r>
+                  <a:rPr lang="en-US" sz="1800" dirty="0">
+                    <a:solidFill>
+                      <a:srgbClr val="2F5B39"/>
+                    </a:solidFill>
+                  </a:rPr>
+                  <a:t>Workflow management &amp; </a:t>
+                </a:r>
+                <a:r>
+                  <a:rPr lang="en-US" sz="1800" dirty="0" smtClean="0">
+                    <a:solidFill>
+                      <a:srgbClr val="2F5B39"/>
+                    </a:solidFill>
+                  </a:rPr>
+                  <a:t>design</a:t>
+                </a:r>
+                <a:endParaRPr lang="en-US" sz="1800" dirty="0">
+                  <a:solidFill>
+                    <a:srgbClr val="2F5B39"/>
+                  </a:solidFill>
+                </a:endParaRPr>
+              </a:p>
+            </p:txBody>
+          </p:sp>
+          <p:sp>
+            <p:nvSpPr>
+              <p:cNvPr id="53" name="Rectangle 52"/>
+              <p:cNvSpPr/>
+              <p:nvPr/>
+            </p:nvSpPr>
+            <p:spPr>
+              <a:xfrm>
+                <a:off x="8584020" y="8008685"/>
+                <a:ext cx="3692593" cy="646331"/>
+              </a:xfrm>
+              <a:prstGeom prst="rect">
+                <a:avLst/>
+              </a:prstGeom>
+            </p:spPr>
+            <p:txBody>
+              <a:bodyPr wrap="square">
+                <a:spAutoFit/>
+              </a:bodyPr>
+              <a:lstStyle/>
+              <a:p>
+                <a:pPr marL="342900" lvl="0" indent="-342900">
+                  <a:buFont typeface="Wingdings" charset="2"/>
+                  <a:buChar char="²"/>
+                </a:pPr>
+                <a:r>
+                  <a:rPr lang="en-US" sz="1800" dirty="0">
+                    <a:solidFill>
+                      <a:srgbClr val="2F5B39"/>
+                    </a:solidFill>
+                  </a:rPr>
+                  <a:t>Integration of NWB:N with </a:t>
+                </a:r>
+                <a:r>
+                  <a:rPr lang="en-US" sz="1800" dirty="0" smtClean="0">
+                    <a:solidFill>
+                      <a:srgbClr val="2F5B39"/>
+                    </a:solidFill>
+                  </a:rPr>
+                  <a:t>neuroscience tools</a:t>
+                </a:r>
+                <a:endParaRPr lang="en-US" sz="1800" dirty="0">
+                  <a:solidFill>
+                    <a:srgbClr val="2F5B39"/>
+                  </a:solidFill>
+                </a:endParaRPr>
+              </a:p>
+            </p:txBody>
+          </p:sp>
+          <p:sp>
+            <p:nvSpPr>
+              <p:cNvPr id="54" name="Rectangle 53"/>
+              <p:cNvSpPr/>
+              <p:nvPr/>
+            </p:nvSpPr>
+            <p:spPr>
+              <a:xfrm>
+                <a:off x="9201907" y="8620719"/>
+                <a:ext cx="2899937" cy="646331"/>
+              </a:xfrm>
+              <a:prstGeom prst="rect">
+                <a:avLst/>
+              </a:prstGeom>
+              <a:effectLst/>
+            </p:spPr>
+            <p:txBody>
+              <a:bodyPr wrap="square">
+                <a:spAutoFit/>
+              </a:bodyPr>
+              <a:lstStyle/>
+              <a:p>
+                <a:pPr marL="342900" lvl="0" indent="-342900">
+                  <a:buFont typeface="Wingdings" charset="2"/>
+                  <a:buChar char="²"/>
+                </a:pPr>
+                <a:r>
+                  <a:rPr lang="en-US" sz="1800" dirty="0">
+                    <a:solidFill>
+                      <a:srgbClr val="2F5B39"/>
+                    </a:solidFill>
+                  </a:rPr>
+                  <a:t>Parallel analysis </a:t>
+                </a:r>
+                <a:r>
+                  <a:rPr lang="en-US" sz="1800" dirty="0" smtClean="0">
+                    <a:solidFill>
+                      <a:srgbClr val="2F5B39"/>
+                    </a:solidFill>
+                  </a:rPr>
+                  <a:t>frameworks</a:t>
+                </a:r>
+                <a:endParaRPr lang="en-US" sz="1800" dirty="0">
+                  <a:solidFill>
+                    <a:srgbClr val="2F5B39"/>
+                  </a:solidFill>
+                </a:endParaRPr>
+              </a:p>
+            </p:txBody>
+          </p:sp>
+          <p:sp>
+            <p:nvSpPr>
+              <p:cNvPr id="55" name="Rectangle 54"/>
+              <p:cNvSpPr/>
+              <p:nvPr/>
+            </p:nvSpPr>
+            <p:spPr>
+              <a:xfrm>
+                <a:off x="9731408" y="9235686"/>
+                <a:ext cx="1746413" cy="646331"/>
+              </a:xfrm>
+              <a:prstGeom prst="rect">
+                <a:avLst/>
+              </a:prstGeom>
+            </p:spPr>
+            <p:txBody>
+              <a:bodyPr wrap="square">
+                <a:spAutoFit/>
+              </a:bodyPr>
+              <a:lstStyle/>
+              <a:p>
+                <a:pPr marL="342900" lvl="0" indent="-342900">
+                  <a:buFont typeface="Wingdings" charset="2"/>
+                  <a:buChar char="²"/>
+                </a:pPr>
+                <a:r>
+                  <a:rPr lang="en-US" sz="1800" dirty="0">
+                    <a:solidFill>
+                      <a:srgbClr val="2F5B39"/>
+                    </a:solidFill>
+                  </a:rPr>
+                  <a:t>In situ data analysis </a:t>
+                </a:r>
+              </a:p>
+            </p:txBody>
+          </p:sp>
+          <p:sp>
+            <p:nvSpPr>
+              <p:cNvPr id="56" name="TextBox 55"/>
+              <p:cNvSpPr txBox="1"/>
+              <p:nvPr/>
+            </p:nvSpPr>
+            <p:spPr>
+              <a:xfrm>
+                <a:off x="6836498" y="9172174"/>
+                <a:ext cx="2676935" cy="2585323"/>
+              </a:xfrm>
+              <a:prstGeom prst="rect">
+                <a:avLst/>
+              </a:prstGeom>
+              <a:noFill/>
+            </p:spPr>
+            <p:txBody>
+              <a:bodyPr wrap="square" rtlCol="0">
+                <a:spAutoFit/>
+              </a:bodyPr>
+              <a:lstStyle/>
+              <a:p>
+                <a:pPr marL="342900" indent="-342900">
+                  <a:buFont typeface="Wingdings" charset="2"/>
+                  <a:buChar char="²"/>
+                </a:pPr>
+                <a:r>
+                  <a:rPr lang="en-US" sz="1800" dirty="0" smtClean="0">
+                    <a:solidFill>
+                      <a:srgbClr val="2F594B"/>
+                    </a:solidFill>
+                  </a:rPr>
+                  <a:t>Quality assurance &amp; control (QA/QC)</a:t>
+                </a:r>
+              </a:p>
+              <a:p>
+                <a:pPr marL="342900" indent="-342900">
+                  <a:buFont typeface="Wingdings" charset="2"/>
+                  <a:buChar char="²"/>
+                </a:pPr>
+                <a:r>
+                  <a:rPr lang="en-US" sz="1800" dirty="0" smtClean="0">
+                    <a:solidFill>
+                      <a:srgbClr val="2F594B"/>
+                    </a:solidFill>
+                  </a:rPr>
+                  <a:t>Data </a:t>
+                </a:r>
+                <a:r>
+                  <a:rPr lang="en-US" sz="1800" dirty="0" err="1" smtClean="0">
+                    <a:solidFill>
+                      <a:srgbClr val="2F594B"/>
+                    </a:solidFill>
+                  </a:rPr>
+                  <a:t>curation</a:t>
+                </a:r>
+                <a:r>
+                  <a:rPr lang="en-US" sz="1800" dirty="0" smtClean="0">
+                    <a:solidFill>
+                      <a:srgbClr val="2F594B"/>
+                    </a:solidFill>
+                  </a:rPr>
+                  <a:t> &amp;</a:t>
+                </a:r>
+                <a:r>
+                  <a:rPr lang="en-US" sz="1800" dirty="0">
+                    <a:solidFill>
+                      <a:srgbClr val="2F594B"/>
+                    </a:solidFill>
+                  </a:rPr>
+                  <a:t> </a:t>
+                </a:r>
+                <a:r>
+                  <a:rPr lang="en-US" sz="1800" dirty="0" smtClean="0">
+                    <a:solidFill>
+                      <a:srgbClr val="2F594B"/>
+                    </a:solidFill>
+                  </a:rPr>
+                  <a:t>standardization</a:t>
+                </a:r>
+              </a:p>
+              <a:p>
+                <a:pPr marL="342900" indent="-342900">
+                  <a:buFont typeface="Wingdings" charset="2"/>
+                  <a:buChar char="²"/>
+                </a:pPr>
+                <a:r>
+                  <a:rPr lang="en-US" sz="1800" dirty="0" smtClean="0">
+                    <a:solidFill>
+                      <a:srgbClr val="2F594B"/>
+                    </a:solidFill>
+                  </a:rPr>
+                  <a:t>Governance &amp; protocols</a:t>
+                </a:r>
+              </a:p>
+              <a:p>
+                <a:pPr marL="342900" indent="-342900">
+                  <a:buFont typeface="Wingdings" charset="2"/>
+                  <a:buChar char="²"/>
+                </a:pPr>
+                <a:r>
+                  <a:rPr lang="en-US" sz="1800" dirty="0" smtClean="0">
+                    <a:solidFill>
+                      <a:srgbClr val="2F594B"/>
+                    </a:solidFill>
+                  </a:rPr>
+                  <a:t>Data ingestion</a:t>
+                </a:r>
+              </a:p>
+              <a:p>
+                <a:endParaRPr lang="en-US" sz="1800" dirty="0" smtClean="0">
+                  <a:solidFill>
+                    <a:srgbClr val="2F594B"/>
+                  </a:solidFill>
+                </a:endParaRPr>
+              </a:p>
+              <a:p>
+                <a:pPr marL="342900" indent="-342900">
+                  <a:buFont typeface="Wingdings" charset="2"/>
+                  <a:buChar char="²"/>
+                </a:pPr>
+                <a:endParaRPr lang="en-US" sz="1800" dirty="0" smtClean="0">
+                  <a:solidFill>
+                    <a:srgbClr val="2F594B"/>
+                  </a:solidFill>
+                </a:endParaRPr>
+              </a:p>
+            </p:txBody>
+          </p:sp>
+          <p:sp>
+            <p:nvSpPr>
+              <p:cNvPr id="57" name="TextBox 56"/>
+              <p:cNvSpPr txBox="1"/>
+              <p:nvPr/>
+            </p:nvSpPr>
+            <p:spPr>
+              <a:xfrm>
+                <a:off x="1471526" y="6626052"/>
+                <a:ext cx="3634391" cy="1477328"/>
+              </a:xfrm>
+              <a:prstGeom prst="rect">
+                <a:avLst/>
+              </a:prstGeom>
+              <a:noFill/>
+            </p:spPr>
+            <p:txBody>
+              <a:bodyPr wrap="square" rtlCol="0">
+                <a:spAutoFit/>
+              </a:bodyPr>
+              <a:lstStyle/>
+              <a:p>
+                <a:pPr marL="342900" indent="-342900">
+                  <a:buFont typeface="Wingdings" charset="2"/>
+                  <a:buChar char="²"/>
+                </a:pPr>
+                <a:r>
+                  <a:rPr lang="en-US" sz="1800" dirty="0" smtClean="0">
+                    <a:solidFill>
+                      <a:srgbClr val="364960"/>
+                    </a:solidFill>
+                  </a:rPr>
+                  <a:t>Modeling data relationships</a:t>
+                </a:r>
+              </a:p>
+              <a:p>
+                <a:pPr marL="342900" indent="-342900">
+                  <a:buFont typeface="Wingdings" charset="2"/>
+                  <a:buChar char="²"/>
+                </a:pPr>
+                <a:r>
+                  <a:rPr lang="en-US" sz="1800" dirty="0">
+                    <a:solidFill>
+                      <a:srgbClr val="364960"/>
+                    </a:solidFill>
+                  </a:rPr>
+                  <a:t>I</a:t>
+                </a:r>
+                <a:r>
+                  <a:rPr lang="en-US" sz="1800" dirty="0" smtClean="0">
+                    <a:solidFill>
+                      <a:srgbClr val="364960"/>
+                    </a:solidFill>
+                  </a:rPr>
+                  <a:t>nteroperability</a:t>
+                </a:r>
+              </a:p>
+              <a:p>
+                <a:pPr marL="342900" indent="-342900">
+                  <a:buFont typeface="Wingdings" charset="2"/>
+                  <a:buChar char="²"/>
+                </a:pPr>
+                <a:r>
+                  <a:rPr lang="en-US" sz="1800" dirty="0" smtClean="0">
+                    <a:solidFill>
+                      <a:srgbClr val="364960"/>
+                    </a:solidFill>
+                  </a:rPr>
+                  <a:t>Development and integration of controlled vocabularies and ontologies</a:t>
+                </a:r>
+              </a:p>
+            </p:txBody>
+          </p:sp>
+          <p:sp>
+            <p:nvSpPr>
+              <p:cNvPr id="58" name="Rectangle 57"/>
+              <p:cNvSpPr/>
+              <p:nvPr/>
+            </p:nvSpPr>
+            <p:spPr>
+              <a:xfrm>
+                <a:off x="1754090" y="8124171"/>
+                <a:ext cx="2626899" cy="1477328"/>
+              </a:xfrm>
+              <a:prstGeom prst="rect">
+                <a:avLst/>
+              </a:prstGeom>
+            </p:spPr>
+            <p:txBody>
+              <a:bodyPr wrap="square">
+                <a:spAutoFit/>
+              </a:bodyPr>
+              <a:lstStyle/>
+              <a:p>
+                <a:pPr marL="342900" indent="-342900">
+                  <a:buFont typeface="Wingdings" charset="2"/>
+                  <a:buChar char="²"/>
+                </a:pPr>
+                <a:r>
+                  <a:rPr lang="en-US" sz="1800" dirty="0">
+                    <a:solidFill>
+                      <a:srgbClr val="364960"/>
+                    </a:solidFill>
+                  </a:rPr>
+                  <a:t>Data </a:t>
+                </a:r>
+                <a:r>
+                  <a:rPr lang="en-US" sz="1800" dirty="0" smtClean="0">
+                    <a:solidFill>
+                      <a:srgbClr val="364960"/>
+                    </a:solidFill>
+                  </a:rPr>
+                  <a:t>integration</a:t>
+                </a:r>
+              </a:p>
+              <a:p>
+                <a:pPr marL="342900" lvl="0" indent="-342900">
+                  <a:buFont typeface="Wingdings" charset="2"/>
+                  <a:buChar char="²"/>
+                </a:pPr>
+                <a:r>
+                  <a:rPr lang="en-US" sz="1800" dirty="0" smtClean="0">
+                    <a:solidFill>
+                      <a:srgbClr val="364960"/>
+                    </a:solidFill>
+                  </a:rPr>
+                  <a:t>Provenance</a:t>
+                </a:r>
+                <a:endParaRPr lang="en-US" sz="1800" dirty="0">
+                  <a:solidFill>
+                    <a:srgbClr val="364960"/>
+                  </a:solidFill>
+                </a:endParaRPr>
+              </a:p>
+              <a:p>
+                <a:pPr marL="342900" lvl="0" indent="-342900">
+                  <a:buFont typeface="Wingdings" charset="2"/>
+                  <a:buChar char="²"/>
+                </a:pPr>
+                <a:r>
+                  <a:rPr lang="en-US" sz="1800" dirty="0">
+                    <a:solidFill>
+                      <a:srgbClr val="364960"/>
+                    </a:solidFill>
+                  </a:rPr>
+                  <a:t>Automatic </a:t>
+                </a:r>
+                <a:r>
+                  <a:rPr lang="en-US" sz="1800" dirty="0" smtClean="0">
+                    <a:solidFill>
+                      <a:srgbClr val="364960"/>
+                    </a:solidFill>
+                  </a:rPr>
+                  <a:t>capture &amp; </a:t>
+                </a:r>
+                <a:r>
+                  <a:rPr lang="en-US" sz="1800" dirty="0">
+                    <a:solidFill>
+                      <a:srgbClr val="364960"/>
+                    </a:solidFill>
+                  </a:rPr>
+                  <a:t>extraction of </a:t>
+                </a:r>
+                <a:r>
+                  <a:rPr lang="en-US" sz="1800" dirty="0" smtClean="0">
+                    <a:solidFill>
+                      <a:srgbClr val="364960"/>
+                    </a:solidFill>
+                  </a:rPr>
+                  <a:t>metadata</a:t>
+                </a:r>
+                <a:endParaRPr lang="en-US" sz="1800" dirty="0">
+                  <a:solidFill>
+                    <a:srgbClr val="364960"/>
+                  </a:solidFill>
+                </a:endParaRPr>
+              </a:p>
+            </p:txBody>
+          </p:sp>
+          <p:sp>
+            <p:nvSpPr>
+              <p:cNvPr id="59" name="TextBox 58"/>
+              <p:cNvSpPr txBox="1"/>
+              <p:nvPr/>
+            </p:nvSpPr>
+            <p:spPr>
+              <a:xfrm>
+                <a:off x="3824226" y="10819516"/>
+                <a:ext cx="3207001" cy="646331"/>
+              </a:xfrm>
+              <a:prstGeom prst="rect">
+                <a:avLst/>
+              </a:prstGeom>
+              <a:noFill/>
+            </p:spPr>
+            <p:txBody>
+              <a:bodyPr wrap="square" rtlCol="0">
+                <a:spAutoFit/>
+              </a:bodyPr>
+              <a:lstStyle/>
+              <a:p>
+                <a:pPr marL="342900" indent="-342900">
+                  <a:buFont typeface="Wingdings" charset="2"/>
+                  <a:buChar char="²"/>
+                </a:pPr>
+                <a:r>
+                  <a:rPr lang="en-US" sz="1800" dirty="0">
+                    <a:solidFill>
+                      <a:srgbClr val="32575C"/>
+                    </a:solidFill>
+                  </a:rPr>
+                  <a:t>F</a:t>
+                </a:r>
+                <a:r>
+                  <a:rPr lang="en-US" sz="1800" dirty="0" smtClean="0">
+                    <a:solidFill>
+                      <a:srgbClr val="32575C"/>
+                    </a:solidFill>
+                  </a:rPr>
+                  <a:t>oreign data fields and references</a:t>
+                </a:r>
+              </a:p>
+            </p:txBody>
+          </p:sp>
+          <p:sp>
+            <p:nvSpPr>
+              <p:cNvPr id="60" name="Rectangle 59"/>
+              <p:cNvSpPr/>
+              <p:nvPr/>
+            </p:nvSpPr>
+            <p:spPr>
+              <a:xfrm>
+                <a:off x="5066499" y="8347071"/>
+                <a:ext cx="1623899" cy="923330"/>
+              </a:xfrm>
+              <a:prstGeom prst="rect">
+                <a:avLst/>
+              </a:prstGeom>
+            </p:spPr>
+            <p:txBody>
+              <a:bodyPr wrap="square">
+                <a:spAutoFit/>
+              </a:bodyPr>
+              <a:lstStyle/>
+              <a:p>
+                <a:pPr marL="342900" lvl="0" indent="-342900">
+                  <a:buFont typeface="Wingdings" charset="2"/>
+                  <a:buChar char="²"/>
+                </a:pPr>
+                <a:r>
+                  <a:rPr lang="en-US" sz="1800" dirty="0">
+                    <a:solidFill>
+                      <a:srgbClr val="32575C"/>
+                    </a:solidFill>
+                  </a:rPr>
+                  <a:t>Alternate storage </a:t>
+                </a:r>
+                <a:r>
+                  <a:rPr lang="en-US" sz="1800" dirty="0" err="1">
+                    <a:solidFill>
+                      <a:srgbClr val="32575C"/>
+                    </a:solidFill>
+                  </a:rPr>
+                  <a:t>backends</a:t>
+                </a:r>
+                <a:endParaRPr lang="en-US" sz="1800" dirty="0">
+                  <a:solidFill>
+                    <a:srgbClr val="32575C"/>
+                  </a:solidFill>
+                </a:endParaRPr>
+              </a:p>
+            </p:txBody>
+          </p:sp>
+          <p:sp>
+            <p:nvSpPr>
+              <p:cNvPr id="61" name="Rectangle 60"/>
+              <p:cNvSpPr/>
+              <p:nvPr/>
+            </p:nvSpPr>
+            <p:spPr>
+              <a:xfrm>
+                <a:off x="4024997" y="9269815"/>
+                <a:ext cx="2791977" cy="923330"/>
+              </a:xfrm>
+              <a:prstGeom prst="rect">
+                <a:avLst/>
+              </a:prstGeom>
+            </p:spPr>
+            <p:txBody>
+              <a:bodyPr wrap="square">
+                <a:spAutoFit/>
+              </a:bodyPr>
+              <a:lstStyle/>
+              <a:p>
+                <a:pPr marL="342900" lvl="0" indent="-342900">
+                  <a:buFont typeface="Wingdings" charset="2"/>
+                  <a:buChar char="²"/>
+                </a:pPr>
+                <a:r>
+                  <a:rPr lang="en-US" sz="1800" dirty="0">
+                    <a:solidFill>
+                      <a:srgbClr val="32575C"/>
+                    </a:solidFill>
+                  </a:rPr>
+                  <a:t>Parallel data search, query &amp; discovery for data-driven analytics</a:t>
+                </a:r>
+              </a:p>
+            </p:txBody>
+          </p:sp>
+          <p:sp>
+            <p:nvSpPr>
+              <p:cNvPr id="62" name="Rectangle 61"/>
+              <p:cNvSpPr/>
+              <p:nvPr/>
+            </p:nvSpPr>
+            <p:spPr>
+              <a:xfrm>
+                <a:off x="3188920" y="10209635"/>
+                <a:ext cx="3689393" cy="646331"/>
+              </a:xfrm>
+              <a:prstGeom prst="rect">
+                <a:avLst/>
+              </a:prstGeom>
+            </p:spPr>
+            <p:txBody>
+              <a:bodyPr wrap="square">
+                <a:spAutoFit/>
+              </a:bodyPr>
+              <a:lstStyle/>
+              <a:p>
+                <a:pPr marL="342900" lvl="0" indent="-342900">
+                  <a:buFont typeface="Wingdings" charset="2"/>
+                  <a:buChar char="²"/>
+                </a:pPr>
+                <a:r>
+                  <a:rPr lang="en-US" sz="1800" dirty="0">
+                    <a:solidFill>
+                      <a:srgbClr val="32575C"/>
+                    </a:solidFill>
+                  </a:rPr>
+                  <a:t>Integration with data archive </a:t>
+                </a:r>
+                <a:r>
+                  <a:rPr lang="en-US" sz="1800" dirty="0" smtClean="0">
+                    <a:solidFill>
+                      <a:srgbClr val="32575C"/>
+                    </a:solidFill>
+                  </a:rPr>
+                  <a:t>&amp; management </a:t>
+                </a:r>
+                <a:r>
+                  <a:rPr lang="en-US" sz="1800" dirty="0">
+                    <a:solidFill>
+                      <a:srgbClr val="32575C"/>
+                    </a:solidFill>
+                  </a:rPr>
+                  <a:t>systems</a:t>
+                </a:r>
+              </a:p>
+            </p:txBody>
+          </p:sp>
+        </p:grpSp>
+        <p:pic>
+          <p:nvPicPr>
+            <p:cNvPr id="63" name="Picture 62" descr="(B).jpg"/>
+            <p:cNvPicPr>
+              <a:picLocks noChangeAspect="1"/>
+            </p:cNvPicPr>
+            <p:nvPr/>
+          </p:nvPicPr>
+          <p:blipFill rotWithShape="1">
+            <a:blip r:embed="rId2">
+              <a:extLst>
+                <a:ext uri="{28A0092B-C50C-407E-A947-70E740481C1C}">
+                  <a14:useLocalDpi xmlns:a14="http://schemas.microsoft.com/office/drawing/2010/main" val="0"/>
+                </a:ext>
+              </a:extLst>
+            </a:blip>
+            <a:srcRect l="22131" t="22569" r="21497" b="21860"/>
+            <a:stretch/>
+          </p:blipFill>
+          <p:spPr>
+            <a:xfrm>
+              <a:off x="5462604" y="6254882"/>
+              <a:ext cx="3028258" cy="1822317"/>
+            </a:xfrm>
+            <a:prstGeom prst="rect">
+              <a:avLst/>
+            </a:prstGeom>
+          </p:spPr>
+        </p:pic>
+      </p:grpSp>
+    </p:spTree>
+    <p:extLst>
+      <p:ext uri="{BB962C8B-B14F-4D97-AF65-F5344CB8AC3E}">
+        <p14:creationId xmlns:p14="http://schemas.microsoft.com/office/powerpoint/2010/main" val="1673711503"/>
+      </p:ext>
+    </p:extLst>
+  </p:cSld>
+  <p:clrMapOvr>
+    <a:masterClrMapping/>
+  </p:clrMapOvr>
+  <p:timing>
+    <p:tnLst>
+      <p:par>
+        <p:cTn xmlns:p14="http://schemas.microsoft.com/office/powerpoint/2010/main" id="1" dur="indefinite" restart="never" nodeType="tmRoot"/>
+      </p:par>
+    </p:tnLst>
+  </p:timing>
+</p:sld>
+</file>
+
+<file path=ppt/slides/slide10.xml><?xml version="1.0" encoding="utf-8"?>
+<p:sld xmlns:a="http://schemas.openxmlformats.org/drawingml/2006/main" xmlns:r="http://schemas.openxmlformats.org/officeDocument/2006/relationships" xmlns:p="http://schemas.openxmlformats.org/presentationml/2006/main">
+  <p:cSld>
+    <p:spTree>
+      <p:nvGrpSpPr>
+        <p:cNvPr id="1" name=""/>
+        <p:cNvGrpSpPr/>
+        <p:nvPr/>
+      </p:nvGrpSpPr>
+      <p:grpSpPr>
+        <a:xfrm>
+          <a:off x="0" y="0"/>
+          <a:ext cx="0" cy="0"/>
+          <a:chOff x="0" y="0"/>
+          <a:chExt cx="0" cy="0"/>
+        </a:xfrm>
+      </p:grpSpPr>
+      <p:grpSp>
+        <p:nvGrpSpPr>
+          <p:cNvPr id="3" name="Group 2"/>
+          <p:cNvGrpSpPr/>
+          <p:nvPr/>
+        </p:nvGrpSpPr>
+        <p:grpSpPr>
+          <a:xfrm>
+            <a:off x="519449" y="383997"/>
+            <a:ext cx="12677100" cy="12677099"/>
+            <a:chOff x="519449" y="383997"/>
+            <a:chExt cx="12677100" cy="12677099"/>
+          </a:xfrm>
+        </p:grpSpPr>
+        <p:sp>
+          <p:nvSpPr>
+            <p:cNvPr id="4" name="Block Arc 3"/>
+            <p:cNvSpPr/>
+            <p:nvPr/>
+          </p:nvSpPr>
+          <p:spPr>
+            <a:xfrm>
+              <a:off x="1667993" y="1532540"/>
+              <a:ext cx="10380012" cy="10380012"/>
+            </a:xfrm>
+            <a:prstGeom prst="blockArc">
+              <a:avLst>
+                <a:gd name="adj1" fmla="val 13500000"/>
+                <a:gd name="adj2" fmla="val 16200000"/>
+                <a:gd name="adj3" fmla="val 3434"/>
+              </a:avLst>
+            </a:prstGeom>
+          </p:spPr>
+          <p:style>
+            <a:lnRef idx="0">
+              <a:schemeClr val="lt1">
+                <a:hueOff val="0"/>
+                <a:satOff val="0"/>
+                <a:lumOff val="0"/>
+                <a:alphaOff val="0"/>
+              </a:schemeClr>
+            </a:lnRef>
+            <a:fillRef idx="1">
+              <a:schemeClr val="accent3">
+                <a:hueOff val="11250266"/>
+                <a:satOff val="-16880"/>
+                <a:lumOff val="-2745"/>
+                <a:alphaOff val="0"/>
+              </a:schemeClr>
+            </a:fillRef>
+            <a:effectRef idx="0">
+              <a:schemeClr val="accent3">
+                <a:hueOff val="11250266"/>
+                <a:satOff val="-16880"/>
+                <a:lumOff val="-2745"/>
+                <a:alphaOff val="0"/>
+              </a:schemeClr>
+            </a:effectRef>
+            <a:fontRef idx="minor">
+              <a:schemeClr val="lt1"/>
+            </a:fontRef>
+          </p:style>
+        </p:sp>
+        <p:sp>
+          <p:nvSpPr>
+            <p:cNvPr id="5" name="Block Arc 4"/>
+            <p:cNvSpPr/>
+            <p:nvPr/>
+          </p:nvSpPr>
+          <p:spPr>
+            <a:xfrm>
+              <a:off x="1667993" y="1532540"/>
+              <a:ext cx="10380012" cy="10380012"/>
+            </a:xfrm>
+            <a:prstGeom prst="blockArc">
+              <a:avLst>
+                <a:gd name="adj1" fmla="val 10800000"/>
+                <a:gd name="adj2" fmla="val 13500000"/>
+                <a:gd name="adj3" fmla="val 3434"/>
+              </a:avLst>
+            </a:prstGeom>
+          </p:spPr>
+          <p:style>
+            <a:lnRef idx="0">
+              <a:schemeClr val="lt1">
+                <a:hueOff val="0"/>
+                <a:satOff val="0"/>
+                <a:lumOff val="0"/>
+                <a:alphaOff val="0"/>
+              </a:schemeClr>
+            </a:lnRef>
+            <a:fillRef idx="1">
+              <a:schemeClr val="accent3">
+                <a:hueOff val="9643085"/>
+                <a:satOff val="-14469"/>
+                <a:lumOff val="-2353"/>
+                <a:alphaOff val="0"/>
+              </a:schemeClr>
+            </a:fillRef>
+            <a:effectRef idx="0">
+              <a:schemeClr val="accent3">
+                <a:hueOff val="9643085"/>
+                <a:satOff val="-14469"/>
+                <a:lumOff val="-2353"/>
+                <a:alphaOff val="0"/>
+              </a:schemeClr>
+            </a:effectRef>
+            <a:fontRef idx="minor">
+              <a:schemeClr val="lt1"/>
+            </a:fontRef>
+          </p:style>
+        </p:sp>
+        <p:sp>
+          <p:nvSpPr>
+            <p:cNvPr id="6" name="Block Arc 5"/>
+            <p:cNvSpPr/>
+            <p:nvPr/>
+          </p:nvSpPr>
+          <p:spPr>
+            <a:xfrm>
+              <a:off x="1667993" y="1532540"/>
+              <a:ext cx="10380012" cy="10380012"/>
+            </a:xfrm>
+            <a:prstGeom prst="blockArc">
+              <a:avLst>
+                <a:gd name="adj1" fmla="val 8100000"/>
+                <a:gd name="adj2" fmla="val 10800000"/>
+                <a:gd name="adj3" fmla="val 3434"/>
+              </a:avLst>
+            </a:prstGeom>
+          </p:spPr>
+          <p:style>
+            <a:lnRef idx="0">
+              <a:schemeClr val="lt1">
+                <a:hueOff val="0"/>
+                <a:satOff val="0"/>
+                <a:lumOff val="0"/>
+                <a:alphaOff val="0"/>
+              </a:schemeClr>
+            </a:lnRef>
+            <a:fillRef idx="1">
+              <a:schemeClr val="accent3">
+                <a:hueOff val="8035904"/>
+                <a:satOff val="-12057"/>
+                <a:lumOff val="-1961"/>
+                <a:alphaOff val="0"/>
+              </a:schemeClr>
+            </a:fillRef>
+            <a:effectRef idx="0">
+              <a:schemeClr val="accent3">
+                <a:hueOff val="8035904"/>
+                <a:satOff val="-12057"/>
+                <a:lumOff val="-1961"/>
+                <a:alphaOff val="0"/>
+              </a:schemeClr>
+            </a:effectRef>
+            <a:fontRef idx="minor">
+              <a:schemeClr val="lt1"/>
+            </a:fontRef>
+          </p:style>
+        </p:sp>
+        <p:sp>
+          <p:nvSpPr>
+            <p:cNvPr id="7" name="Block Arc 6"/>
+            <p:cNvSpPr/>
+            <p:nvPr/>
+          </p:nvSpPr>
+          <p:spPr>
+            <a:xfrm>
+              <a:off x="1667993" y="1532540"/>
+              <a:ext cx="10380012" cy="10380012"/>
+            </a:xfrm>
+            <a:prstGeom prst="blockArc">
+              <a:avLst>
+                <a:gd name="adj1" fmla="val 5400000"/>
+                <a:gd name="adj2" fmla="val 8100000"/>
+                <a:gd name="adj3" fmla="val 3434"/>
+              </a:avLst>
+            </a:prstGeom>
+          </p:spPr>
+          <p:style>
+            <a:lnRef idx="0">
+              <a:schemeClr val="lt1">
+                <a:hueOff val="0"/>
+                <a:satOff val="0"/>
+                <a:lumOff val="0"/>
+                <a:alphaOff val="0"/>
+              </a:schemeClr>
+            </a:lnRef>
+            <a:fillRef idx="1">
+              <a:schemeClr val="accent3">
+                <a:hueOff val="6428724"/>
+                <a:satOff val="-9646"/>
+                <a:lumOff val="-1569"/>
+                <a:alphaOff val="0"/>
+              </a:schemeClr>
+            </a:fillRef>
+            <a:effectRef idx="0">
+              <a:schemeClr val="accent3">
+                <a:hueOff val="6428724"/>
+                <a:satOff val="-9646"/>
+                <a:lumOff val="-1569"/>
+                <a:alphaOff val="0"/>
+              </a:schemeClr>
+            </a:effectRef>
+            <a:fontRef idx="minor">
+              <a:schemeClr val="lt1"/>
+            </a:fontRef>
+          </p:style>
+        </p:sp>
+        <p:sp>
+          <p:nvSpPr>
+            <p:cNvPr id="8" name="Block Arc 7"/>
+            <p:cNvSpPr/>
+            <p:nvPr/>
+          </p:nvSpPr>
+          <p:spPr>
+            <a:xfrm>
+              <a:off x="1667993" y="1532540"/>
+              <a:ext cx="10380012" cy="10380012"/>
+            </a:xfrm>
+            <a:prstGeom prst="blockArc">
+              <a:avLst>
+                <a:gd name="adj1" fmla="val 2700000"/>
+                <a:gd name="adj2" fmla="val 5400000"/>
+                <a:gd name="adj3" fmla="val 3434"/>
+              </a:avLst>
+            </a:prstGeom>
+          </p:spPr>
+          <p:style>
+            <a:lnRef idx="0">
+              <a:schemeClr val="lt1">
+                <a:hueOff val="0"/>
+                <a:satOff val="0"/>
+                <a:lumOff val="0"/>
+                <a:alphaOff val="0"/>
+              </a:schemeClr>
+            </a:lnRef>
+            <a:fillRef idx="1">
+              <a:schemeClr val="accent3">
+                <a:hueOff val="4821542"/>
+                <a:satOff val="-7234"/>
+                <a:lumOff val="-1176"/>
+                <a:alphaOff val="0"/>
+              </a:schemeClr>
+            </a:fillRef>
+            <a:effectRef idx="0">
+              <a:schemeClr val="accent3">
+                <a:hueOff val="4821542"/>
+                <a:satOff val="-7234"/>
+                <a:lumOff val="-1176"/>
+                <a:alphaOff val="0"/>
+              </a:schemeClr>
+            </a:effectRef>
+            <a:fontRef idx="minor">
+              <a:schemeClr val="lt1"/>
+            </a:fontRef>
+          </p:style>
+        </p:sp>
+        <p:sp>
+          <p:nvSpPr>
+            <p:cNvPr id="9" name="Block Arc 8"/>
+            <p:cNvSpPr/>
+            <p:nvPr/>
+          </p:nvSpPr>
+          <p:spPr>
+            <a:xfrm>
+              <a:off x="1667993" y="1532540"/>
+              <a:ext cx="10380012" cy="10380012"/>
+            </a:xfrm>
+            <a:prstGeom prst="blockArc">
+              <a:avLst>
+                <a:gd name="adj1" fmla="val 0"/>
+                <a:gd name="adj2" fmla="val 2700000"/>
+                <a:gd name="adj3" fmla="val 3434"/>
+              </a:avLst>
+            </a:prstGeom>
+          </p:spPr>
+          <p:style>
+            <a:lnRef idx="0">
+              <a:schemeClr val="lt1">
+                <a:hueOff val="0"/>
+                <a:satOff val="0"/>
+                <a:lumOff val="0"/>
+                <a:alphaOff val="0"/>
+              </a:schemeClr>
+            </a:lnRef>
+            <a:fillRef idx="1">
+              <a:schemeClr val="accent3">
+                <a:hueOff val="3214362"/>
+                <a:satOff val="-4823"/>
+                <a:lumOff val="-784"/>
+                <a:alphaOff val="0"/>
+              </a:schemeClr>
+            </a:fillRef>
+            <a:effectRef idx="0">
+              <a:schemeClr val="accent3">
+                <a:hueOff val="3214362"/>
+                <a:satOff val="-4823"/>
+                <a:lumOff val="-784"/>
+                <a:alphaOff val="0"/>
+              </a:schemeClr>
+            </a:effectRef>
+            <a:fontRef idx="minor">
+              <a:schemeClr val="lt1"/>
+            </a:fontRef>
+          </p:style>
+        </p:sp>
+        <p:sp>
+          <p:nvSpPr>
+            <p:cNvPr id="10" name="Block Arc 9"/>
+            <p:cNvSpPr/>
+            <p:nvPr/>
+          </p:nvSpPr>
+          <p:spPr>
+            <a:xfrm>
+              <a:off x="1667993" y="1532540"/>
+              <a:ext cx="10380012" cy="10380012"/>
+            </a:xfrm>
+            <a:prstGeom prst="blockArc">
+              <a:avLst>
+                <a:gd name="adj1" fmla="val 18900000"/>
+                <a:gd name="adj2" fmla="val 0"/>
+                <a:gd name="adj3" fmla="val 3434"/>
+              </a:avLst>
+            </a:prstGeom>
+          </p:spPr>
+          <p:style>
+            <a:lnRef idx="0">
+              <a:schemeClr val="lt1">
+                <a:hueOff val="0"/>
+                <a:satOff val="0"/>
+                <a:lumOff val="0"/>
+                <a:alphaOff val="0"/>
+              </a:schemeClr>
+            </a:lnRef>
+            <a:fillRef idx="1">
+              <a:schemeClr val="accent3">
+                <a:hueOff val="1607181"/>
+                <a:satOff val="-2411"/>
+                <a:lumOff val="-392"/>
+                <a:alphaOff val="0"/>
+              </a:schemeClr>
+            </a:fillRef>
+            <a:effectRef idx="0">
+              <a:schemeClr val="accent3">
+                <a:hueOff val="1607181"/>
+                <a:satOff val="-2411"/>
+                <a:lumOff val="-392"/>
+                <a:alphaOff val="0"/>
+              </a:schemeClr>
+            </a:effectRef>
+            <a:fontRef idx="minor">
+              <a:schemeClr val="lt1"/>
+            </a:fontRef>
+          </p:style>
+        </p:sp>
+        <p:sp>
+          <p:nvSpPr>
+            <p:cNvPr id="11" name="Block Arc 10"/>
+            <p:cNvSpPr/>
+            <p:nvPr/>
+          </p:nvSpPr>
+          <p:spPr>
+            <a:xfrm>
+              <a:off x="1667993" y="1532540"/>
+              <a:ext cx="10380012" cy="10380012"/>
+            </a:xfrm>
+            <a:prstGeom prst="blockArc">
+              <a:avLst>
+                <a:gd name="adj1" fmla="val 16200000"/>
+                <a:gd name="adj2" fmla="val 18900000"/>
+                <a:gd name="adj3" fmla="val 3434"/>
+              </a:avLst>
+            </a:prstGeom>
+          </p:spPr>
+          <p:style>
+            <a:lnRef idx="0">
+              <a:schemeClr val="lt1">
+                <a:hueOff val="0"/>
+                <a:satOff val="0"/>
+                <a:lumOff val="0"/>
+                <a:alphaOff val="0"/>
+              </a:schemeClr>
+            </a:lnRef>
+            <a:fillRef idx="1">
+              <a:schemeClr val="accent3">
+                <a:hueOff val="0"/>
+                <a:satOff val="0"/>
+                <a:lumOff val="0"/>
+                <a:alphaOff val="0"/>
+              </a:schemeClr>
+            </a:fillRef>
+            <a:effectRef idx="0">
+              <a:schemeClr val="accent3">
+                <a:hueOff val="0"/>
+                <a:satOff val="0"/>
+                <a:lumOff val="0"/>
+                <a:alphaOff val="0"/>
+              </a:schemeClr>
+            </a:effectRef>
+            <a:fontRef idx="minor">
+              <a:schemeClr val="lt1"/>
+            </a:fontRef>
+          </p:style>
+        </p:sp>
+        <p:sp>
+          <p:nvSpPr>
+            <p:cNvPr id="13" name="Freeform 12"/>
+            <p:cNvSpPr/>
+            <p:nvPr/>
+          </p:nvSpPr>
+          <p:spPr>
+            <a:xfrm>
+              <a:off x="5089921" y="4954469"/>
+              <a:ext cx="3536155" cy="3536155"/>
+            </a:xfrm>
+            <a:custGeom>
+              <a:avLst/>
+              <a:gdLst>
+                <a:gd name="connsiteX0" fmla="*/ 0 w 3536155"/>
+                <a:gd name="connsiteY0" fmla="*/ 1768078 h 3536155"/>
+                <a:gd name="connsiteX1" fmla="*/ 1768078 w 3536155"/>
+                <a:gd name="connsiteY1" fmla="*/ 0 h 3536155"/>
+                <a:gd name="connsiteX2" fmla="*/ 3536156 w 3536155"/>
+                <a:gd name="connsiteY2" fmla="*/ 1768078 h 3536155"/>
+                <a:gd name="connsiteX3" fmla="*/ 1768078 w 3536155"/>
+                <a:gd name="connsiteY3" fmla="*/ 3536156 h 3536155"/>
+                <a:gd name="connsiteX4" fmla="*/ 0 w 3536155"/>
+                <a:gd name="connsiteY4" fmla="*/ 1768078 h 3536155"/>
+              </a:gdLst>
+              <a:ahLst/>
+              <a:cxnLst>
+                <a:cxn ang="0">
+                  <a:pos x="connsiteX0" y="connsiteY0"/>
+                </a:cxn>
+                <a:cxn ang="0">
+                  <a:pos x="connsiteX1" y="connsiteY1"/>
+                </a:cxn>
+                <a:cxn ang="0">
+                  <a:pos x="connsiteX2" y="connsiteY2"/>
+                </a:cxn>
+                <a:cxn ang="0">
+                  <a:pos x="connsiteX3" y="connsiteY3"/>
+                </a:cxn>
+                <a:cxn ang="0">
+                  <a:pos x="connsiteX4" y="connsiteY4"/>
+                </a:cxn>
+              </a:cxnLst>
+              <a:rect l="l" t="t" r="r" b="b"/>
+              <a:pathLst>
+                <a:path w="3536155" h="3536155">
+                  <a:moveTo>
+                    <a:pt x="0" y="1768078"/>
+                  </a:moveTo>
+                  <a:cubicBezTo>
+                    <a:pt x="0" y="791595"/>
+                    <a:pt x="791595" y="0"/>
+                    <a:pt x="1768078" y="0"/>
+                  </a:cubicBezTo>
+                  <a:cubicBezTo>
+                    <a:pt x="2744561" y="0"/>
+                    <a:pt x="3536156" y="791595"/>
+                    <a:pt x="3536156" y="1768078"/>
+                  </a:cubicBezTo>
+                  <a:cubicBezTo>
+                    <a:pt x="3536156" y="2744561"/>
+                    <a:pt x="2744561" y="3536156"/>
+                    <a:pt x="1768078" y="3536156"/>
+                  </a:cubicBezTo>
+                  <a:cubicBezTo>
+                    <a:pt x="791595" y="3536156"/>
+                    <a:pt x="0" y="2744561"/>
+                    <a:pt x="0" y="1768078"/>
+                  </a:cubicBezTo>
+                  <a:close/>
+                </a:path>
+              </a:pathLst>
+            </a:custGeom>
+          </p:spPr>
+          <p:style>
+            <a:lnRef idx="2">
+              <a:schemeClr val="lt1">
+                <a:hueOff val="0"/>
+                <a:satOff val="0"/>
+                <a:lumOff val="0"/>
+                <a:alphaOff val="0"/>
+              </a:schemeClr>
+            </a:lnRef>
+            <a:fillRef idx="1">
+              <a:schemeClr val="accent2">
+                <a:hueOff val="0"/>
+                <a:satOff val="0"/>
+                <a:lumOff val="0"/>
+                <a:alphaOff val="0"/>
+              </a:schemeClr>
+            </a:fillRef>
+            <a:effectRef idx="0">
+              <a:schemeClr val="accent2">
+                <a:hueOff val="0"/>
+                <a:satOff val="0"/>
+                <a:lumOff val="0"/>
+                <a:alphaOff val="0"/>
+              </a:schemeClr>
+            </a:effectRef>
+            <a:fontRef idx="minor">
+              <a:schemeClr val="lt1"/>
+            </a:fontRef>
+          </p:style>
+          <p:txBody>
+            <a:bodyPr spcFirstLastPara="0" vert="horz" wrap="square" lIns="595328" tIns="595328" rIns="595328" bIns="595328" numCol="1" spcCol="1270" anchor="ctr" anchorCtr="0">
+              <a:noAutofit/>
+            </a:bodyPr>
+            <a:lstStyle/>
+            <a:p>
+              <a:pPr lvl="0" algn="ctr" defTabSz="2711450">
+                <a:lnSpc>
+                  <a:spcPct val="90000"/>
+                </a:lnSpc>
+                <a:spcBef>
+                  <a:spcPct val="0"/>
+                </a:spcBef>
+                <a:spcAft>
+                  <a:spcPct val="35000"/>
+                </a:spcAft>
+              </a:pPr>
+              <a:r>
+                <a:rPr lang="en-US" sz="6100" kern="1200" dirty="0" smtClean="0"/>
+                <a:t>NWB:N</a:t>
+              </a:r>
+              <a:endParaRPr lang="en-US" sz="6100" kern="1200" dirty="0"/>
+            </a:p>
+          </p:txBody>
+        </p:sp>
+        <p:sp>
+          <p:nvSpPr>
+            <p:cNvPr id="14" name="Freeform 13"/>
+            <p:cNvSpPr/>
+            <p:nvPr/>
+          </p:nvSpPr>
+          <p:spPr>
+            <a:xfrm>
+              <a:off x="5620344" y="383997"/>
+              <a:ext cx="2475309" cy="2475309"/>
+            </a:xfrm>
+            <a:custGeom>
+              <a:avLst/>
+              <a:gdLst>
+                <a:gd name="connsiteX0" fmla="*/ 0 w 2475309"/>
+                <a:gd name="connsiteY0" fmla="*/ 1237655 h 2475309"/>
+                <a:gd name="connsiteX1" fmla="*/ 1237655 w 2475309"/>
+                <a:gd name="connsiteY1" fmla="*/ 0 h 2475309"/>
+                <a:gd name="connsiteX2" fmla="*/ 2475310 w 2475309"/>
+                <a:gd name="connsiteY2" fmla="*/ 1237655 h 2475309"/>
+                <a:gd name="connsiteX3" fmla="*/ 1237655 w 2475309"/>
+                <a:gd name="connsiteY3" fmla="*/ 2475310 h 2475309"/>
+                <a:gd name="connsiteX4" fmla="*/ 0 w 2475309"/>
+                <a:gd name="connsiteY4" fmla="*/ 1237655 h 2475309"/>
+              </a:gdLst>
+              <a:ahLst/>
+              <a:cxnLst>
+                <a:cxn ang="0">
+                  <a:pos x="connsiteX0" y="connsiteY0"/>
+                </a:cxn>
+                <a:cxn ang="0">
+                  <a:pos x="connsiteX1" y="connsiteY1"/>
+                </a:cxn>
+                <a:cxn ang="0">
+                  <a:pos x="connsiteX2" y="connsiteY2"/>
+                </a:cxn>
+                <a:cxn ang="0">
+                  <a:pos x="connsiteX3" y="connsiteY3"/>
+                </a:cxn>
+                <a:cxn ang="0">
+                  <a:pos x="connsiteX4" y="connsiteY4"/>
+                </a:cxn>
+              </a:cxnLst>
+              <a:rect l="l" t="t" r="r" b="b"/>
+              <a:pathLst>
+                <a:path w="2475309" h="2475309">
+                  <a:moveTo>
+                    <a:pt x="0" y="1237655"/>
+                  </a:moveTo>
+                  <a:cubicBezTo>
+                    <a:pt x="0" y="554117"/>
+                    <a:pt x="554117" y="0"/>
+                    <a:pt x="1237655" y="0"/>
+                  </a:cubicBezTo>
+                  <a:cubicBezTo>
+                    <a:pt x="1921193" y="0"/>
+                    <a:pt x="2475310" y="554117"/>
+                    <a:pt x="2475310" y="1237655"/>
+                  </a:cubicBezTo>
+                  <a:cubicBezTo>
+                    <a:pt x="2475310" y="1921193"/>
+                    <a:pt x="1921193" y="2475310"/>
+                    <a:pt x="1237655" y="2475310"/>
+                  </a:cubicBezTo>
+                  <a:cubicBezTo>
+                    <a:pt x="554117" y="2475310"/>
+                    <a:pt x="0" y="1921193"/>
+                    <a:pt x="0" y="1237655"/>
+                  </a:cubicBezTo>
+                  <a:close/>
+                </a:path>
+              </a:pathLst>
+            </a:custGeom>
+          </p:spPr>
+          <p:style>
+            <a:lnRef idx="2">
+              <a:schemeClr val="lt1">
+                <a:hueOff val="0"/>
+                <a:satOff val="0"/>
+                <a:lumOff val="0"/>
+                <a:alphaOff val="0"/>
+              </a:schemeClr>
+            </a:lnRef>
+            <a:fillRef idx="1">
+              <a:schemeClr val="accent3">
+                <a:hueOff val="0"/>
+                <a:satOff val="0"/>
+                <a:lumOff val="0"/>
+                <a:alphaOff val="0"/>
+              </a:schemeClr>
+            </a:fillRef>
+            <a:effectRef idx="0">
+              <a:schemeClr val="accent3">
+                <a:hueOff val="0"/>
+                <a:satOff val="0"/>
+                <a:lumOff val="0"/>
+                <a:alphaOff val="0"/>
+              </a:schemeClr>
+            </a:effectRef>
+            <a:fontRef idx="minor">
+              <a:schemeClr val="lt1"/>
+            </a:fontRef>
+          </p:style>
+          <p:txBody>
+            <a:bodyPr spcFirstLastPara="0" vert="horz" wrap="square" lIns="394251" tIns="394251" rIns="394251" bIns="394251" numCol="1" spcCol="1270" anchor="ctr" anchorCtr="0">
+              <a:noAutofit/>
+            </a:bodyPr>
+            <a:lstStyle/>
+            <a:p>
+              <a:pPr lvl="0" algn="ctr" defTabSz="1111250">
+                <a:lnSpc>
+                  <a:spcPct val="90000"/>
+                </a:lnSpc>
+                <a:spcBef>
+                  <a:spcPct val="0"/>
+                </a:spcBef>
+                <a:spcAft>
+                  <a:spcPct val="35000"/>
+                </a:spcAft>
+              </a:pPr>
+              <a:r>
+                <a:rPr lang="en-US" sz="2500" kern="1200" dirty="0" smtClean="0"/>
+                <a:t>Planning</a:t>
+              </a:r>
+              <a:endParaRPr lang="en-US" sz="2500" kern="1200" dirty="0"/>
+            </a:p>
+          </p:txBody>
+        </p:sp>
+        <p:sp>
+          <p:nvSpPr>
+            <p:cNvPr id="17" name="Freeform 16"/>
+            <p:cNvSpPr/>
+            <p:nvPr/>
+          </p:nvSpPr>
+          <p:spPr>
+            <a:xfrm>
+              <a:off x="9227222" y="1878014"/>
+              <a:ext cx="2475309" cy="2475309"/>
+            </a:xfrm>
+            <a:custGeom>
+              <a:avLst/>
+              <a:gdLst>
+                <a:gd name="connsiteX0" fmla="*/ 0 w 2475309"/>
+                <a:gd name="connsiteY0" fmla="*/ 1237655 h 2475309"/>
+                <a:gd name="connsiteX1" fmla="*/ 1237655 w 2475309"/>
+                <a:gd name="connsiteY1" fmla="*/ 0 h 2475309"/>
+                <a:gd name="connsiteX2" fmla="*/ 2475310 w 2475309"/>
+                <a:gd name="connsiteY2" fmla="*/ 1237655 h 2475309"/>
+                <a:gd name="connsiteX3" fmla="*/ 1237655 w 2475309"/>
+                <a:gd name="connsiteY3" fmla="*/ 2475310 h 2475309"/>
+                <a:gd name="connsiteX4" fmla="*/ 0 w 2475309"/>
+                <a:gd name="connsiteY4" fmla="*/ 1237655 h 2475309"/>
+              </a:gdLst>
+              <a:ahLst/>
+              <a:cxnLst>
+                <a:cxn ang="0">
+                  <a:pos x="connsiteX0" y="connsiteY0"/>
+                </a:cxn>
+                <a:cxn ang="0">
+                  <a:pos x="connsiteX1" y="connsiteY1"/>
+                </a:cxn>
+                <a:cxn ang="0">
+                  <a:pos x="connsiteX2" y="connsiteY2"/>
+                </a:cxn>
+                <a:cxn ang="0">
+                  <a:pos x="connsiteX3" y="connsiteY3"/>
+                </a:cxn>
+                <a:cxn ang="0">
+                  <a:pos x="connsiteX4" y="connsiteY4"/>
+                </a:cxn>
+              </a:cxnLst>
+              <a:rect l="l" t="t" r="r" b="b"/>
+              <a:pathLst>
+                <a:path w="2475309" h="2475309">
+                  <a:moveTo>
+                    <a:pt x="0" y="1237655"/>
+                  </a:moveTo>
+                  <a:cubicBezTo>
+                    <a:pt x="0" y="554117"/>
+                    <a:pt x="554117" y="0"/>
+                    <a:pt x="1237655" y="0"/>
+                  </a:cubicBezTo>
+                  <a:cubicBezTo>
+                    <a:pt x="1921193" y="0"/>
+                    <a:pt x="2475310" y="554117"/>
+                    <a:pt x="2475310" y="1237655"/>
+                  </a:cubicBezTo>
+                  <a:cubicBezTo>
+                    <a:pt x="2475310" y="1921193"/>
+                    <a:pt x="1921193" y="2475310"/>
+                    <a:pt x="1237655" y="2475310"/>
+                  </a:cubicBezTo>
+                  <a:cubicBezTo>
+                    <a:pt x="554117" y="2475310"/>
+                    <a:pt x="0" y="1921193"/>
+                    <a:pt x="0" y="1237655"/>
+                  </a:cubicBezTo>
+                  <a:close/>
+                </a:path>
+              </a:pathLst>
+            </a:custGeom>
+          </p:spPr>
+          <p:style>
+            <a:lnRef idx="2">
+              <a:schemeClr val="lt1">
+                <a:hueOff val="0"/>
+                <a:satOff val="0"/>
+                <a:lumOff val="0"/>
+                <a:alphaOff val="0"/>
+              </a:schemeClr>
+            </a:lnRef>
+            <a:fillRef idx="1">
+              <a:schemeClr val="accent3">
+                <a:hueOff val="1607181"/>
+                <a:satOff val="-2411"/>
+                <a:lumOff val="-392"/>
+                <a:alphaOff val="0"/>
+              </a:schemeClr>
+            </a:fillRef>
+            <a:effectRef idx="0">
+              <a:schemeClr val="accent3">
+                <a:hueOff val="1607181"/>
+                <a:satOff val="-2411"/>
+                <a:lumOff val="-392"/>
+                <a:alphaOff val="0"/>
+              </a:schemeClr>
+            </a:effectRef>
+            <a:fontRef idx="minor">
+              <a:schemeClr val="lt1"/>
+            </a:fontRef>
+          </p:style>
+          <p:txBody>
+            <a:bodyPr spcFirstLastPara="0" vert="horz" wrap="square" lIns="394251" tIns="394251" rIns="394251" bIns="394251" numCol="1" spcCol="1270" anchor="ctr" anchorCtr="0">
+              <a:noAutofit/>
+            </a:bodyPr>
+            <a:lstStyle/>
+            <a:p>
+              <a:pPr lvl="0" algn="ctr" defTabSz="1111250">
+                <a:lnSpc>
+                  <a:spcPct val="90000"/>
+                </a:lnSpc>
+                <a:spcBef>
+                  <a:spcPct val="0"/>
+                </a:spcBef>
+                <a:spcAft>
+                  <a:spcPct val="35000"/>
+                </a:spcAft>
+              </a:pPr>
+              <a:r>
+                <a:rPr lang="en-US" sz="2500" kern="1200" dirty="0" smtClean="0"/>
+                <a:t>Acquisition</a:t>
+              </a:r>
+              <a:endParaRPr lang="en-US" sz="2500" kern="1200" dirty="0"/>
+            </a:p>
+          </p:txBody>
+        </p:sp>
+        <p:sp>
+          <p:nvSpPr>
+            <p:cNvPr id="19" name="Freeform 18"/>
+            <p:cNvSpPr/>
+            <p:nvPr/>
+          </p:nvSpPr>
+          <p:spPr>
+            <a:xfrm>
+              <a:off x="10721240" y="5484892"/>
+              <a:ext cx="2475309" cy="2475309"/>
+            </a:xfrm>
+            <a:custGeom>
+              <a:avLst/>
+              <a:gdLst>
+                <a:gd name="connsiteX0" fmla="*/ 0 w 2475309"/>
+                <a:gd name="connsiteY0" fmla="*/ 1237655 h 2475309"/>
+                <a:gd name="connsiteX1" fmla="*/ 1237655 w 2475309"/>
+                <a:gd name="connsiteY1" fmla="*/ 0 h 2475309"/>
+                <a:gd name="connsiteX2" fmla="*/ 2475310 w 2475309"/>
+                <a:gd name="connsiteY2" fmla="*/ 1237655 h 2475309"/>
+                <a:gd name="connsiteX3" fmla="*/ 1237655 w 2475309"/>
+                <a:gd name="connsiteY3" fmla="*/ 2475310 h 2475309"/>
+                <a:gd name="connsiteX4" fmla="*/ 0 w 2475309"/>
+                <a:gd name="connsiteY4" fmla="*/ 1237655 h 2475309"/>
+              </a:gdLst>
+              <a:ahLst/>
+              <a:cxnLst>
+                <a:cxn ang="0">
+                  <a:pos x="connsiteX0" y="connsiteY0"/>
+                </a:cxn>
+                <a:cxn ang="0">
+                  <a:pos x="connsiteX1" y="connsiteY1"/>
+                </a:cxn>
+                <a:cxn ang="0">
+                  <a:pos x="connsiteX2" y="connsiteY2"/>
+                </a:cxn>
+                <a:cxn ang="0">
+                  <a:pos x="connsiteX3" y="connsiteY3"/>
+                </a:cxn>
+                <a:cxn ang="0">
+                  <a:pos x="connsiteX4" y="connsiteY4"/>
+                </a:cxn>
+              </a:cxnLst>
+              <a:rect l="l" t="t" r="r" b="b"/>
+              <a:pathLst>
+                <a:path w="2475309" h="2475309">
+                  <a:moveTo>
+                    <a:pt x="0" y="1237655"/>
+                  </a:moveTo>
+                  <a:cubicBezTo>
+                    <a:pt x="0" y="554117"/>
+                    <a:pt x="554117" y="0"/>
+                    <a:pt x="1237655" y="0"/>
+                  </a:cubicBezTo>
+                  <a:cubicBezTo>
+                    <a:pt x="1921193" y="0"/>
+                    <a:pt x="2475310" y="554117"/>
+                    <a:pt x="2475310" y="1237655"/>
+                  </a:cubicBezTo>
+                  <a:cubicBezTo>
+                    <a:pt x="2475310" y="1921193"/>
+                    <a:pt x="1921193" y="2475310"/>
+                    <a:pt x="1237655" y="2475310"/>
+                  </a:cubicBezTo>
+                  <a:cubicBezTo>
+                    <a:pt x="554117" y="2475310"/>
+                    <a:pt x="0" y="1921193"/>
+                    <a:pt x="0" y="1237655"/>
+                  </a:cubicBezTo>
+                  <a:close/>
+                </a:path>
+              </a:pathLst>
+            </a:custGeom>
+          </p:spPr>
+          <p:style>
+            <a:lnRef idx="2">
+              <a:schemeClr val="lt1">
+                <a:hueOff val="0"/>
+                <a:satOff val="0"/>
+                <a:lumOff val="0"/>
+                <a:alphaOff val="0"/>
+              </a:schemeClr>
+            </a:lnRef>
+            <a:fillRef idx="1">
+              <a:schemeClr val="accent3">
+                <a:hueOff val="3214362"/>
+                <a:satOff val="-4823"/>
+                <a:lumOff val="-784"/>
+                <a:alphaOff val="0"/>
+              </a:schemeClr>
+            </a:fillRef>
+            <a:effectRef idx="0">
+              <a:schemeClr val="accent3">
+                <a:hueOff val="3214362"/>
+                <a:satOff val="-4823"/>
+                <a:lumOff val="-784"/>
+                <a:alphaOff val="0"/>
+              </a:schemeClr>
+            </a:effectRef>
+            <a:fontRef idx="minor">
+              <a:schemeClr val="lt1"/>
+            </a:fontRef>
+          </p:style>
+          <p:txBody>
+            <a:bodyPr spcFirstLastPara="0" vert="horz" wrap="square" lIns="394251" tIns="394251" rIns="394251" bIns="394251" numCol="1" spcCol="1270" anchor="ctr" anchorCtr="0">
+              <a:noAutofit/>
+            </a:bodyPr>
+            <a:lstStyle/>
+            <a:p>
+              <a:pPr lvl="0" algn="ctr" defTabSz="1111250">
+                <a:lnSpc>
+                  <a:spcPct val="90000"/>
+                </a:lnSpc>
+                <a:spcBef>
+                  <a:spcPct val="0"/>
+                </a:spcBef>
+                <a:spcAft>
+                  <a:spcPct val="35000"/>
+                </a:spcAft>
+              </a:pPr>
+              <a:r>
+                <a:rPr lang="en-US" sz="2500" kern="1200" dirty="0" smtClean="0"/>
+                <a:t>Analysis &amp; Synthesis</a:t>
+              </a:r>
+              <a:endParaRPr lang="en-US" sz="2500" kern="1200" dirty="0"/>
+            </a:p>
+          </p:txBody>
+        </p:sp>
+        <p:sp>
+          <p:nvSpPr>
+            <p:cNvPr id="25" name="Freeform 24"/>
+            <p:cNvSpPr/>
+            <p:nvPr/>
+          </p:nvSpPr>
+          <p:spPr>
+            <a:xfrm>
+              <a:off x="9227222" y="9091769"/>
+              <a:ext cx="2475309" cy="2475309"/>
+            </a:xfrm>
+            <a:custGeom>
+              <a:avLst/>
+              <a:gdLst>
+                <a:gd name="connsiteX0" fmla="*/ 0 w 2475309"/>
+                <a:gd name="connsiteY0" fmla="*/ 1237655 h 2475309"/>
+                <a:gd name="connsiteX1" fmla="*/ 1237655 w 2475309"/>
+                <a:gd name="connsiteY1" fmla="*/ 0 h 2475309"/>
+                <a:gd name="connsiteX2" fmla="*/ 2475310 w 2475309"/>
+                <a:gd name="connsiteY2" fmla="*/ 1237655 h 2475309"/>
+                <a:gd name="connsiteX3" fmla="*/ 1237655 w 2475309"/>
+                <a:gd name="connsiteY3" fmla="*/ 2475310 h 2475309"/>
+                <a:gd name="connsiteX4" fmla="*/ 0 w 2475309"/>
+                <a:gd name="connsiteY4" fmla="*/ 1237655 h 2475309"/>
+              </a:gdLst>
+              <a:ahLst/>
+              <a:cxnLst>
+                <a:cxn ang="0">
+                  <a:pos x="connsiteX0" y="connsiteY0"/>
+                </a:cxn>
+                <a:cxn ang="0">
+                  <a:pos x="connsiteX1" y="connsiteY1"/>
+                </a:cxn>
+                <a:cxn ang="0">
+                  <a:pos x="connsiteX2" y="connsiteY2"/>
+                </a:cxn>
+                <a:cxn ang="0">
+                  <a:pos x="connsiteX3" y="connsiteY3"/>
+                </a:cxn>
+                <a:cxn ang="0">
+                  <a:pos x="connsiteX4" y="connsiteY4"/>
+                </a:cxn>
+              </a:cxnLst>
+              <a:rect l="l" t="t" r="r" b="b"/>
+              <a:pathLst>
+                <a:path w="2475309" h="2475309">
+                  <a:moveTo>
+                    <a:pt x="0" y="1237655"/>
+                  </a:moveTo>
+                  <a:cubicBezTo>
+                    <a:pt x="0" y="554117"/>
+                    <a:pt x="554117" y="0"/>
+                    <a:pt x="1237655" y="0"/>
+                  </a:cubicBezTo>
+                  <a:cubicBezTo>
+                    <a:pt x="1921193" y="0"/>
+                    <a:pt x="2475310" y="554117"/>
+                    <a:pt x="2475310" y="1237655"/>
+                  </a:cubicBezTo>
+                  <a:cubicBezTo>
+                    <a:pt x="2475310" y="1921193"/>
+                    <a:pt x="1921193" y="2475310"/>
+                    <a:pt x="1237655" y="2475310"/>
+                  </a:cubicBezTo>
+                  <a:cubicBezTo>
+                    <a:pt x="554117" y="2475310"/>
+                    <a:pt x="0" y="1921193"/>
+                    <a:pt x="0" y="1237655"/>
+                  </a:cubicBezTo>
+                  <a:close/>
+                </a:path>
+              </a:pathLst>
+            </a:custGeom>
+          </p:spPr>
+          <p:style>
+            <a:lnRef idx="2">
+              <a:schemeClr val="lt1">
+                <a:hueOff val="0"/>
+                <a:satOff val="0"/>
+                <a:lumOff val="0"/>
+                <a:alphaOff val="0"/>
+              </a:schemeClr>
+            </a:lnRef>
+            <a:fillRef idx="1">
+              <a:schemeClr val="accent3">
+                <a:hueOff val="4821542"/>
+                <a:satOff val="-7234"/>
+                <a:lumOff val="-1176"/>
+                <a:alphaOff val="0"/>
+              </a:schemeClr>
+            </a:fillRef>
+            <a:effectRef idx="0">
+              <a:schemeClr val="accent3">
+                <a:hueOff val="4821542"/>
+                <a:satOff val="-7234"/>
+                <a:lumOff val="-1176"/>
+                <a:alphaOff val="0"/>
+              </a:schemeClr>
+            </a:effectRef>
+            <a:fontRef idx="minor">
+              <a:schemeClr val="lt1"/>
+            </a:fontRef>
+          </p:style>
+          <p:txBody>
+            <a:bodyPr spcFirstLastPara="0" vert="horz" wrap="square" lIns="394251" tIns="394251" rIns="394251" bIns="394251" numCol="1" spcCol="1270" anchor="ctr" anchorCtr="0">
+              <a:noAutofit/>
+            </a:bodyPr>
+            <a:lstStyle/>
+            <a:p>
+              <a:pPr lvl="0" algn="ctr" defTabSz="1111250">
+                <a:lnSpc>
+                  <a:spcPct val="90000"/>
+                </a:lnSpc>
+                <a:spcBef>
+                  <a:spcPct val="0"/>
+                </a:spcBef>
+                <a:spcAft>
+                  <a:spcPct val="35000"/>
+                </a:spcAft>
+              </a:pPr>
+              <a:r>
+                <a:rPr lang="en-US" sz="2500" kern="1200" dirty="0" smtClean="0"/>
+                <a:t>Contributing</a:t>
+              </a:r>
+              <a:endParaRPr lang="en-US" sz="2500" kern="1200" dirty="0"/>
+            </a:p>
+          </p:txBody>
+        </p:sp>
+        <p:sp>
+          <p:nvSpPr>
+            <p:cNvPr id="27" name="Freeform 26"/>
+            <p:cNvSpPr/>
+            <p:nvPr/>
+          </p:nvSpPr>
+          <p:spPr>
+            <a:xfrm>
+              <a:off x="5620344" y="10585787"/>
+              <a:ext cx="2475309" cy="2475309"/>
+            </a:xfrm>
+            <a:custGeom>
+              <a:avLst/>
+              <a:gdLst>
+                <a:gd name="connsiteX0" fmla="*/ 0 w 2475309"/>
+                <a:gd name="connsiteY0" fmla="*/ 1237655 h 2475309"/>
+                <a:gd name="connsiteX1" fmla="*/ 1237655 w 2475309"/>
+                <a:gd name="connsiteY1" fmla="*/ 0 h 2475309"/>
+                <a:gd name="connsiteX2" fmla="*/ 2475310 w 2475309"/>
+                <a:gd name="connsiteY2" fmla="*/ 1237655 h 2475309"/>
+                <a:gd name="connsiteX3" fmla="*/ 1237655 w 2475309"/>
+                <a:gd name="connsiteY3" fmla="*/ 2475310 h 2475309"/>
+                <a:gd name="connsiteX4" fmla="*/ 0 w 2475309"/>
+                <a:gd name="connsiteY4" fmla="*/ 1237655 h 2475309"/>
+              </a:gdLst>
+              <a:ahLst/>
+              <a:cxnLst>
+                <a:cxn ang="0">
+                  <a:pos x="connsiteX0" y="connsiteY0"/>
+                </a:cxn>
+                <a:cxn ang="0">
+                  <a:pos x="connsiteX1" y="connsiteY1"/>
+                </a:cxn>
+                <a:cxn ang="0">
+                  <a:pos x="connsiteX2" y="connsiteY2"/>
+                </a:cxn>
+                <a:cxn ang="0">
+                  <a:pos x="connsiteX3" y="connsiteY3"/>
+                </a:cxn>
+                <a:cxn ang="0">
+                  <a:pos x="connsiteX4" y="connsiteY4"/>
+                </a:cxn>
+              </a:cxnLst>
+              <a:rect l="l" t="t" r="r" b="b"/>
+              <a:pathLst>
+                <a:path w="2475309" h="2475309">
+                  <a:moveTo>
+                    <a:pt x="0" y="1237655"/>
+                  </a:moveTo>
+                  <a:cubicBezTo>
+                    <a:pt x="0" y="554117"/>
+                    <a:pt x="554117" y="0"/>
+                    <a:pt x="1237655" y="0"/>
+                  </a:cubicBezTo>
+                  <a:cubicBezTo>
+                    <a:pt x="1921193" y="0"/>
+                    <a:pt x="2475310" y="554117"/>
+                    <a:pt x="2475310" y="1237655"/>
+                  </a:cubicBezTo>
+                  <a:cubicBezTo>
+                    <a:pt x="2475310" y="1921193"/>
+                    <a:pt x="1921193" y="2475310"/>
+                    <a:pt x="1237655" y="2475310"/>
+                  </a:cubicBezTo>
+                  <a:cubicBezTo>
+                    <a:pt x="554117" y="2475310"/>
+                    <a:pt x="0" y="1921193"/>
+                    <a:pt x="0" y="1237655"/>
+                  </a:cubicBezTo>
+                  <a:close/>
+                </a:path>
+              </a:pathLst>
+            </a:custGeom>
+          </p:spPr>
+          <p:style>
+            <a:lnRef idx="2">
+              <a:schemeClr val="lt1">
+                <a:hueOff val="0"/>
+                <a:satOff val="0"/>
+                <a:lumOff val="0"/>
+                <a:alphaOff val="0"/>
+              </a:schemeClr>
+            </a:lnRef>
+            <a:fillRef idx="1">
+              <a:schemeClr val="accent3">
+                <a:hueOff val="6428724"/>
+                <a:satOff val="-9646"/>
+                <a:lumOff val="-1569"/>
+                <a:alphaOff val="0"/>
+              </a:schemeClr>
+            </a:fillRef>
+            <a:effectRef idx="0">
+              <a:schemeClr val="accent3">
+                <a:hueOff val="6428724"/>
+                <a:satOff val="-9646"/>
+                <a:lumOff val="-1569"/>
+                <a:alphaOff val="0"/>
+              </a:schemeClr>
+            </a:effectRef>
+            <a:fontRef idx="minor">
+              <a:schemeClr val="lt1"/>
+            </a:fontRef>
+          </p:style>
+          <p:txBody>
+            <a:bodyPr spcFirstLastPara="0" vert="horz" wrap="square" lIns="394251" tIns="394251" rIns="394251" bIns="394251" numCol="1" spcCol="1270" anchor="ctr" anchorCtr="0">
+              <a:noAutofit/>
+            </a:bodyPr>
+            <a:lstStyle/>
+            <a:p>
+              <a:pPr lvl="0" algn="ctr" defTabSz="1111250">
+                <a:lnSpc>
+                  <a:spcPct val="90000"/>
+                </a:lnSpc>
+                <a:spcBef>
+                  <a:spcPct val="0"/>
+                </a:spcBef>
+                <a:spcAft>
+                  <a:spcPct val="35000"/>
+                </a:spcAft>
+              </a:pPr>
+              <a:r>
+                <a:rPr lang="en-US" sz="2500" kern="1200" dirty="0" smtClean="0"/>
+                <a:t>Discovery &amp; Access</a:t>
+              </a:r>
+              <a:endParaRPr lang="en-US" sz="2500" kern="1200" dirty="0"/>
+            </a:p>
+          </p:txBody>
+        </p:sp>
+        <p:sp>
+          <p:nvSpPr>
+            <p:cNvPr id="28" name="Freeform 27"/>
+            <p:cNvSpPr/>
+            <p:nvPr/>
+          </p:nvSpPr>
+          <p:spPr>
+            <a:xfrm>
+              <a:off x="2013467" y="9091769"/>
+              <a:ext cx="2475309" cy="2475309"/>
+            </a:xfrm>
+            <a:custGeom>
+              <a:avLst/>
+              <a:gdLst>
+                <a:gd name="connsiteX0" fmla="*/ 0 w 2475309"/>
+                <a:gd name="connsiteY0" fmla="*/ 1237655 h 2475309"/>
+                <a:gd name="connsiteX1" fmla="*/ 1237655 w 2475309"/>
+                <a:gd name="connsiteY1" fmla="*/ 0 h 2475309"/>
+                <a:gd name="connsiteX2" fmla="*/ 2475310 w 2475309"/>
+                <a:gd name="connsiteY2" fmla="*/ 1237655 h 2475309"/>
+                <a:gd name="connsiteX3" fmla="*/ 1237655 w 2475309"/>
+                <a:gd name="connsiteY3" fmla="*/ 2475310 h 2475309"/>
+                <a:gd name="connsiteX4" fmla="*/ 0 w 2475309"/>
+                <a:gd name="connsiteY4" fmla="*/ 1237655 h 2475309"/>
+              </a:gdLst>
+              <a:ahLst/>
+              <a:cxnLst>
+                <a:cxn ang="0">
+                  <a:pos x="connsiteX0" y="connsiteY0"/>
+                </a:cxn>
+                <a:cxn ang="0">
+                  <a:pos x="connsiteX1" y="connsiteY1"/>
+                </a:cxn>
+                <a:cxn ang="0">
+                  <a:pos x="connsiteX2" y="connsiteY2"/>
+                </a:cxn>
+                <a:cxn ang="0">
+                  <a:pos x="connsiteX3" y="connsiteY3"/>
+                </a:cxn>
+                <a:cxn ang="0">
+                  <a:pos x="connsiteX4" y="connsiteY4"/>
+                </a:cxn>
+              </a:cxnLst>
+              <a:rect l="l" t="t" r="r" b="b"/>
+              <a:pathLst>
+                <a:path w="2475309" h="2475309">
+                  <a:moveTo>
+                    <a:pt x="0" y="1237655"/>
+                  </a:moveTo>
+                  <a:cubicBezTo>
+                    <a:pt x="0" y="554117"/>
+                    <a:pt x="554117" y="0"/>
+                    <a:pt x="1237655" y="0"/>
+                  </a:cubicBezTo>
+                  <a:cubicBezTo>
+                    <a:pt x="1921193" y="0"/>
+                    <a:pt x="2475310" y="554117"/>
+                    <a:pt x="2475310" y="1237655"/>
+                  </a:cubicBezTo>
+                  <a:cubicBezTo>
+                    <a:pt x="2475310" y="1921193"/>
+                    <a:pt x="1921193" y="2475310"/>
+                    <a:pt x="1237655" y="2475310"/>
+                  </a:cubicBezTo>
+                  <a:cubicBezTo>
+                    <a:pt x="554117" y="2475310"/>
+                    <a:pt x="0" y="1921193"/>
+                    <a:pt x="0" y="1237655"/>
+                  </a:cubicBezTo>
+                  <a:close/>
+                </a:path>
+              </a:pathLst>
+            </a:custGeom>
+          </p:spPr>
+          <p:style>
+            <a:lnRef idx="2">
+              <a:schemeClr val="lt1">
+                <a:hueOff val="0"/>
+                <a:satOff val="0"/>
+                <a:lumOff val="0"/>
+                <a:alphaOff val="0"/>
+              </a:schemeClr>
+            </a:lnRef>
+            <a:fillRef idx="1">
+              <a:schemeClr val="accent3">
+                <a:hueOff val="8035904"/>
+                <a:satOff val="-12057"/>
+                <a:lumOff val="-1961"/>
+                <a:alphaOff val="0"/>
+              </a:schemeClr>
+            </a:fillRef>
+            <a:effectRef idx="0">
+              <a:schemeClr val="accent3">
+                <a:hueOff val="8035904"/>
+                <a:satOff val="-12057"/>
+                <a:lumOff val="-1961"/>
+                <a:alphaOff val="0"/>
+              </a:schemeClr>
+            </a:effectRef>
+            <a:fontRef idx="minor">
+              <a:schemeClr val="lt1"/>
+            </a:fontRef>
+          </p:style>
+          <p:txBody>
+            <a:bodyPr spcFirstLastPara="0" vert="horz" wrap="square" lIns="394251" tIns="394251" rIns="394251" bIns="394251" numCol="1" spcCol="1270" anchor="ctr" anchorCtr="0">
+              <a:noAutofit/>
+            </a:bodyPr>
+            <a:lstStyle/>
+            <a:p>
+              <a:pPr lvl="0" algn="ctr" defTabSz="1111250">
+                <a:lnSpc>
+                  <a:spcPct val="90000"/>
+                </a:lnSpc>
+                <a:spcBef>
+                  <a:spcPct val="0"/>
+                </a:spcBef>
+                <a:spcAft>
+                  <a:spcPct val="35000"/>
+                </a:spcAft>
+              </a:pPr>
+              <a:r>
+                <a:rPr lang="en-US" sz="2500" kern="1200" dirty="0" smtClean="0"/>
+                <a:t>Use &amp; Reuse</a:t>
+              </a:r>
+              <a:endParaRPr lang="en-US" sz="2500" kern="1200" dirty="0"/>
+            </a:p>
+          </p:txBody>
+        </p:sp>
+        <p:sp>
+          <p:nvSpPr>
+            <p:cNvPr id="30" name="Freeform 29"/>
+            <p:cNvSpPr/>
+            <p:nvPr/>
+          </p:nvSpPr>
+          <p:spPr>
+            <a:xfrm>
+              <a:off x="519449" y="5484892"/>
+              <a:ext cx="2475309" cy="2475309"/>
+            </a:xfrm>
+            <a:custGeom>
+              <a:avLst/>
+              <a:gdLst>
+                <a:gd name="connsiteX0" fmla="*/ 0 w 2475309"/>
+                <a:gd name="connsiteY0" fmla="*/ 1237655 h 2475309"/>
+                <a:gd name="connsiteX1" fmla="*/ 1237655 w 2475309"/>
+                <a:gd name="connsiteY1" fmla="*/ 0 h 2475309"/>
+                <a:gd name="connsiteX2" fmla="*/ 2475310 w 2475309"/>
+                <a:gd name="connsiteY2" fmla="*/ 1237655 h 2475309"/>
+                <a:gd name="connsiteX3" fmla="*/ 1237655 w 2475309"/>
+                <a:gd name="connsiteY3" fmla="*/ 2475310 h 2475309"/>
+                <a:gd name="connsiteX4" fmla="*/ 0 w 2475309"/>
+                <a:gd name="connsiteY4" fmla="*/ 1237655 h 2475309"/>
+              </a:gdLst>
+              <a:ahLst/>
+              <a:cxnLst>
+                <a:cxn ang="0">
+                  <a:pos x="connsiteX0" y="connsiteY0"/>
+                </a:cxn>
+                <a:cxn ang="0">
+                  <a:pos x="connsiteX1" y="connsiteY1"/>
+                </a:cxn>
+                <a:cxn ang="0">
+                  <a:pos x="connsiteX2" y="connsiteY2"/>
+                </a:cxn>
+                <a:cxn ang="0">
+                  <a:pos x="connsiteX3" y="connsiteY3"/>
+                </a:cxn>
+                <a:cxn ang="0">
+                  <a:pos x="connsiteX4" y="connsiteY4"/>
+                </a:cxn>
+              </a:cxnLst>
+              <a:rect l="l" t="t" r="r" b="b"/>
+              <a:pathLst>
+                <a:path w="2475309" h="2475309">
+                  <a:moveTo>
+                    <a:pt x="0" y="1237655"/>
+                  </a:moveTo>
+                  <a:cubicBezTo>
+                    <a:pt x="0" y="554117"/>
+                    <a:pt x="554117" y="0"/>
+                    <a:pt x="1237655" y="0"/>
+                  </a:cubicBezTo>
+                  <a:cubicBezTo>
+                    <a:pt x="1921193" y="0"/>
+                    <a:pt x="2475310" y="554117"/>
+                    <a:pt x="2475310" y="1237655"/>
+                  </a:cubicBezTo>
+                  <a:cubicBezTo>
+                    <a:pt x="2475310" y="1921193"/>
+                    <a:pt x="1921193" y="2475310"/>
+                    <a:pt x="1237655" y="2475310"/>
+                  </a:cubicBezTo>
+                  <a:cubicBezTo>
+                    <a:pt x="554117" y="2475310"/>
+                    <a:pt x="0" y="1921193"/>
+                    <a:pt x="0" y="1237655"/>
+                  </a:cubicBezTo>
+                  <a:close/>
+                </a:path>
+              </a:pathLst>
+            </a:custGeom>
+          </p:spPr>
+          <p:style>
+            <a:lnRef idx="2">
+              <a:schemeClr val="lt1">
+                <a:hueOff val="0"/>
+                <a:satOff val="0"/>
+                <a:lumOff val="0"/>
+                <a:alphaOff val="0"/>
+              </a:schemeClr>
+            </a:lnRef>
+            <a:fillRef idx="1">
+              <a:schemeClr val="accent3">
+                <a:hueOff val="9643085"/>
+                <a:satOff val="-14469"/>
+                <a:lumOff val="-2353"/>
+                <a:alphaOff val="0"/>
+              </a:schemeClr>
+            </a:fillRef>
+            <a:effectRef idx="0">
+              <a:schemeClr val="accent3">
+                <a:hueOff val="9643085"/>
+                <a:satOff val="-14469"/>
+                <a:lumOff val="-2353"/>
+                <a:alphaOff val="0"/>
+              </a:schemeClr>
+            </a:effectRef>
+            <a:fontRef idx="minor">
+              <a:schemeClr val="lt1"/>
+            </a:fontRef>
+          </p:style>
+          <p:txBody>
+            <a:bodyPr spcFirstLastPara="0" vert="horz" wrap="square" lIns="394251" tIns="394251" rIns="394251" bIns="394251" numCol="1" spcCol="1270" anchor="ctr" anchorCtr="0">
+              <a:noAutofit/>
+            </a:bodyPr>
+            <a:lstStyle/>
+            <a:p>
+              <a:pPr lvl="0" algn="ctr" defTabSz="1111250">
+                <a:lnSpc>
+                  <a:spcPct val="90000"/>
+                </a:lnSpc>
+                <a:spcBef>
+                  <a:spcPct val="0"/>
+                </a:spcBef>
+                <a:spcAft>
+                  <a:spcPct val="35000"/>
+                </a:spcAft>
+              </a:pPr>
+              <a:r>
+                <a:rPr lang="en-US" sz="2500" kern="1200" dirty="0" smtClean="0"/>
+                <a:t>Publication</a:t>
+              </a:r>
+              <a:endParaRPr lang="en-US" sz="2500" kern="1200" dirty="0"/>
+            </a:p>
+          </p:txBody>
+        </p:sp>
+        <p:sp>
+          <p:nvSpPr>
+            <p:cNvPr id="31" name="Freeform 30"/>
+            <p:cNvSpPr/>
+            <p:nvPr/>
+          </p:nvSpPr>
+          <p:spPr>
+            <a:xfrm>
+              <a:off x="2013467" y="1878014"/>
+              <a:ext cx="2475309" cy="2475309"/>
+            </a:xfrm>
+            <a:custGeom>
+              <a:avLst/>
+              <a:gdLst>
+                <a:gd name="connsiteX0" fmla="*/ 0 w 2475309"/>
+                <a:gd name="connsiteY0" fmla="*/ 1237655 h 2475309"/>
+                <a:gd name="connsiteX1" fmla="*/ 1237655 w 2475309"/>
+                <a:gd name="connsiteY1" fmla="*/ 0 h 2475309"/>
+                <a:gd name="connsiteX2" fmla="*/ 2475310 w 2475309"/>
+                <a:gd name="connsiteY2" fmla="*/ 1237655 h 2475309"/>
+                <a:gd name="connsiteX3" fmla="*/ 1237655 w 2475309"/>
+                <a:gd name="connsiteY3" fmla="*/ 2475310 h 2475309"/>
+                <a:gd name="connsiteX4" fmla="*/ 0 w 2475309"/>
+                <a:gd name="connsiteY4" fmla="*/ 1237655 h 2475309"/>
+              </a:gdLst>
+              <a:ahLst/>
+              <a:cxnLst>
+                <a:cxn ang="0">
+                  <a:pos x="connsiteX0" y="connsiteY0"/>
+                </a:cxn>
+                <a:cxn ang="0">
+                  <a:pos x="connsiteX1" y="connsiteY1"/>
+                </a:cxn>
+                <a:cxn ang="0">
+                  <a:pos x="connsiteX2" y="connsiteY2"/>
+                </a:cxn>
+                <a:cxn ang="0">
+                  <a:pos x="connsiteX3" y="connsiteY3"/>
+                </a:cxn>
+                <a:cxn ang="0">
+                  <a:pos x="connsiteX4" y="connsiteY4"/>
+                </a:cxn>
+              </a:cxnLst>
+              <a:rect l="l" t="t" r="r" b="b"/>
+              <a:pathLst>
+                <a:path w="2475309" h="2475309">
+                  <a:moveTo>
+                    <a:pt x="0" y="1237655"/>
+                  </a:moveTo>
+                  <a:cubicBezTo>
+                    <a:pt x="0" y="554117"/>
+                    <a:pt x="554117" y="0"/>
+                    <a:pt x="1237655" y="0"/>
+                  </a:cubicBezTo>
+                  <a:cubicBezTo>
+                    <a:pt x="1921193" y="0"/>
+                    <a:pt x="2475310" y="554117"/>
+                    <a:pt x="2475310" y="1237655"/>
+                  </a:cubicBezTo>
+                  <a:cubicBezTo>
+                    <a:pt x="2475310" y="1921193"/>
+                    <a:pt x="1921193" y="2475310"/>
+                    <a:pt x="1237655" y="2475310"/>
+                  </a:cubicBezTo>
+                  <a:cubicBezTo>
+                    <a:pt x="554117" y="2475310"/>
+                    <a:pt x="0" y="1921193"/>
+                    <a:pt x="0" y="1237655"/>
+                  </a:cubicBezTo>
+                  <a:close/>
+                </a:path>
+              </a:pathLst>
+            </a:custGeom>
+          </p:spPr>
+          <p:style>
+            <a:lnRef idx="2">
+              <a:schemeClr val="lt1">
+                <a:hueOff val="0"/>
+                <a:satOff val="0"/>
+                <a:lumOff val="0"/>
+                <a:alphaOff val="0"/>
+              </a:schemeClr>
+            </a:lnRef>
+            <a:fillRef idx="1">
+              <a:schemeClr val="accent3">
+                <a:hueOff val="11250266"/>
+                <a:satOff val="-16880"/>
+                <a:lumOff val="-2745"/>
+                <a:alphaOff val="0"/>
+              </a:schemeClr>
+            </a:fillRef>
+            <a:effectRef idx="0">
+              <a:schemeClr val="accent3">
+                <a:hueOff val="11250266"/>
+                <a:satOff val="-16880"/>
+                <a:lumOff val="-2745"/>
+                <a:alphaOff val="0"/>
+              </a:schemeClr>
+            </a:effectRef>
+            <a:fontRef idx="minor">
+              <a:schemeClr val="lt1"/>
+            </a:fontRef>
+          </p:style>
+          <p:txBody>
+            <a:bodyPr spcFirstLastPara="0" vert="horz" wrap="square" lIns="394251" tIns="394251" rIns="394251" bIns="394251" numCol="1" spcCol="1270" anchor="ctr" anchorCtr="0">
+              <a:noAutofit/>
+            </a:bodyPr>
+            <a:lstStyle/>
+            <a:p>
+              <a:pPr lvl="0" algn="ctr" defTabSz="1111250">
+                <a:lnSpc>
+                  <a:spcPct val="90000"/>
+                </a:lnSpc>
+                <a:spcBef>
+                  <a:spcPct val="0"/>
+                </a:spcBef>
+                <a:spcAft>
+                  <a:spcPct val="35000"/>
+                </a:spcAft>
+              </a:pPr>
+              <a:r>
+                <a:rPr lang="en-US" sz="2500" kern="1200" dirty="0" smtClean="0"/>
+                <a:t>Preservation</a:t>
+              </a:r>
+              <a:endParaRPr lang="en-US" sz="2500" kern="1200" dirty="0"/>
+            </a:p>
+          </p:txBody>
+        </p:sp>
+      </p:grpSp>
+    </p:spTree>
+    <p:extLst>
+      <p:ext uri="{BB962C8B-B14F-4D97-AF65-F5344CB8AC3E}">
+        <p14:creationId xmlns:p14="http://schemas.microsoft.com/office/powerpoint/2010/main" val="4095117016"/>
+      </p:ext>
+    </p:extLst>
+  </p:cSld>
+  <p:clrMapOvr>
+    <a:masterClrMapping/>
+  </p:clrMapOvr>
+</p:sld>
+</file>
+
+<file path=ppt/slides/slide2.xml><?xml version="1.0" encoding="utf-8"?>
+<p:sld xmlns:a="http://schemas.openxmlformats.org/drawingml/2006/main" xmlns:r="http://schemas.openxmlformats.org/officeDocument/2006/relationships" xmlns:p="http://schemas.openxmlformats.org/presentationml/2006/main">
+  <p:cSld>
+    <p:spTree>
+      <p:nvGrpSpPr>
+        <p:cNvPr id="1" name=""/>
+        <p:cNvGrpSpPr/>
+        <p:nvPr/>
+      </p:nvGrpSpPr>
+      <p:grpSpPr>
+        <a:xfrm>
+          <a:off x="0" y="0"/>
+          <a:ext cx="0" cy="0"/>
+          <a:chOff x="0" y="0"/>
+          <a:chExt cx="0" cy="0"/>
+        </a:xfrm>
+      </p:grpSpPr>
+      <p:sp>
+        <p:nvSpPr>
+          <p:cNvPr id="2" name="Title 1"/>
+          <p:cNvSpPr>
+            <a:spLocks noGrp="1"/>
+          </p:cNvSpPr>
+          <p:nvPr>
+            <p:ph type="title"/>
+          </p:nvPr>
+        </p:nvSpPr>
+        <p:spPr/>
+        <p:txBody>
+          <a:bodyPr>
+            <a:normAutofit fontScale="90000"/>
+          </a:bodyPr>
+          <a:lstStyle/>
+          <a:p>
+            <a:r>
+              <a:rPr lang="en-US" smtClean="0"/>
+              <a:t>Previous Versions</a:t>
+            </a:r>
+            <a:br>
+              <a:rPr lang="en-US" smtClean="0"/>
+            </a:br>
+            <a:endParaRPr lang="en-US"/>
+          </a:p>
+        </p:txBody>
+      </p:sp>
+      <p:sp>
+        <p:nvSpPr>
+          <p:cNvPr id="3" name="Content Placeholder 2"/>
+          <p:cNvSpPr>
+            <a:spLocks noGrp="1"/>
+          </p:cNvSpPr>
+          <p:nvPr>
+            <p:ph idx="1"/>
+          </p:nvPr>
+        </p:nvSpPr>
+        <p:spPr/>
+        <p:txBody>
+          <a:bodyPr/>
+          <a:lstStyle/>
+          <a:p>
+            <a:endParaRPr lang="en-US"/>
+          </a:p>
+        </p:txBody>
+      </p:sp>
+    </p:spTree>
+    <p:extLst>
+      <p:ext uri="{BB962C8B-B14F-4D97-AF65-F5344CB8AC3E}">
+        <p14:creationId xmlns:p14="http://schemas.microsoft.com/office/powerpoint/2010/main" val="2093840891"/>
+      </p:ext>
+    </p:extLst>
+  </p:cSld>
+  <p:clrMapOvr>
+    <a:masterClrMapping/>
+  </p:clrMapOvr>
+  <p:timing>
+    <p:tnLst>
+      <p:par>
+        <p:cTn xmlns:p14="http://schemas.microsoft.com/office/powerpoint/2010/main" id="1" dur="indefinite" restart="never" nodeType="tmRoot"/>
+      </p:par>
+    </p:tnLst>
+  </p:timing>
+</p:sld>
+</file>
+
+<file path=ppt/slides/slide3.xml><?xml version="1.0" encoding="utf-8"?>
 <p:sld xmlns:a="http://schemas.openxmlformats.org/drawingml/2006/main" xmlns:r="http://schemas.openxmlformats.org/officeDocument/2006/relationships" xmlns:p="http://schemas.openxmlformats.org/presentationml/2006/main">
   <p:cSld>
     <p:spTree>
@@ -11444,7 +16952,7 @@
     </p:spTree>
     <p:extLst>
       <p:ext uri="{BB962C8B-B14F-4D97-AF65-F5344CB8AC3E}">
-        <p14:creationId xmlns:p14="http://schemas.microsoft.com/office/powerpoint/2010/main" val="1673711503"/>
+        <p14:creationId xmlns:p14="http://schemas.microsoft.com/office/powerpoint/2010/main" val="2567067352"/>
       </p:ext>
     </p:extLst>
   </p:cSld>
@@ -11461,91 +16969,7 @@
 </p:sld>
 </file>
 
-<file path=ppt/slides/slide2.xml><?xml version="1.0" encoding="utf-8"?>
-<p:sld xmlns:a="http://schemas.openxmlformats.org/drawingml/2006/main" xmlns:r="http://schemas.openxmlformats.org/officeDocument/2006/relationships" xmlns:p="http://schemas.openxmlformats.org/presentationml/2006/main">
-  <p:cSld>
-    <p:spTree>
-      <p:nvGrpSpPr>
-        <p:cNvPr id="1" name=""/>
-        <p:cNvGrpSpPr/>
-        <p:nvPr/>
-      </p:nvGrpSpPr>
-      <p:grpSpPr>
-        <a:xfrm>
-          <a:off x="0" y="0"/>
-          <a:ext cx="0" cy="0"/>
-          <a:chOff x="0" y="0"/>
-          <a:chExt cx="0" cy="0"/>
-        </a:xfrm>
-      </p:grpSpPr>
-      <p:sp>
-        <p:nvSpPr>
-          <p:cNvPr id="2" name="Title 1"/>
-          <p:cNvSpPr>
-            <a:spLocks noGrp="1"/>
-          </p:cNvSpPr>
-          <p:nvPr>
-            <p:ph type="title"/>
-          </p:nvPr>
-        </p:nvSpPr>
-        <p:spPr/>
-        <p:txBody>
-          <a:bodyPr>
-            <a:normAutofit fontScale="90000"/>
-          </a:bodyPr>
-          <a:lstStyle/>
-          <a:p>
-            <a:r>
-              <a:rPr lang="en-US" smtClean="0"/>
-              <a:t>Previous Versions</a:t>
-            </a:r>
-            <a:br>
-              <a:rPr lang="en-US" smtClean="0"/>
-            </a:br>
-            <a:endParaRPr lang="en-US"/>
-          </a:p>
-        </p:txBody>
-      </p:sp>
-      <p:sp>
-        <p:nvSpPr>
-          <p:cNvPr id="3" name="Content Placeholder 2"/>
-          <p:cNvSpPr>
-            <a:spLocks noGrp="1"/>
-          </p:cNvSpPr>
-          <p:nvPr>
-            <p:ph idx="1"/>
-          </p:nvPr>
-        </p:nvSpPr>
-        <p:spPr/>
-        <p:txBody>
-          <a:bodyPr/>
-          <a:lstStyle/>
-          <a:p>
-            <a:endParaRPr lang="en-US"/>
-          </a:p>
-        </p:txBody>
-      </p:sp>
-    </p:spTree>
-    <p:extLst>
-      <p:ext uri="{BB962C8B-B14F-4D97-AF65-F5344CB8AC3E}">
-        <p14:creationId xmlns:p14="http://schemas.microsoft.com/office/powerpoint/2010/main" val="2093840891"/>
-      </p:ext>
-    </p:extLst>
-  </p:cSld>
-  <p:clrMapOvr>
-    <a:masterClrMapping/>
-  </p:clrMapOvr>
-  <p:timing>
-    <p:tnLst>
-      <p:par>
-        <p:cTn xmlns:p14="http://schemas.microsoft.com/office/powerpoint/2010/main" id="1" dur="indefinite" restart="never" nodeType="tmRoot"/>
-      </p:par>
-    </p:tnLst>
-  </p:timing>
-</p:sld>
-</file>
-
-<file path=ppt/slides/slide3.xml><?xml version="1.0" encoding="utf-8"?>
+<file path=ppt/slides/slide4.xml><?xml version="1.0" encoding="utf-8"?>
 <p:sld xmlns:a="http://schemas.openxmlformats.org/drawingml/2006/main" xmlns:r="http://schemas.openxmlformats.org/officeDocument/2006/relationships" xmlns:p="http://schemas.openxmlformats.org/presentationml/2006/main">
   <p:cSld>
     <p:spTree>
@@ -15220,7 +20644,7 @@
 </p:sld>
 </file>
 
-<file path=ppt/slides/slide4.xml><?xml version="1.0" encoding="utf-8"?>
+<file path=ppt/slides/slide5.xml><?xml version="1.0" encoding="utf-8"?>
 <p:sld xmlns:a="http://schemas.openxmlformats.org/drawingml/2006/main" xmlns:r="http://schemas.openxmlformats.org/officeDocument/2006/relationships" xmlns:p="http://schemas.openxmlformats.org/presentationml/2006/main">
   <p:cSld>
     <p:spTree>
@@ -16238,7 +21662,7 @@
 </p:sld>
 </file>
 
-<file path=ppt/slides/slide5.xml><?xml version="1.0" encoding="utf-8"?>
+<file path=ppt/slides/slide6.xml><?xml version="1.0" encoding="utf-8"?>
 <p:sld xmlns:a="http://schemas.openxmlformats.org/drawingml/2006/main" xmlns:r="http://schemas.openxmlformats.org/officeDocument/2006/relationships" xmlns:p="http://schemas.openxmlformats.org/presentationml/2006/main">
   <p:cSld>
     <p:spTree>
@@ -19481,7 +24905,7 @@
 </p:sld>
 </file>
 
-<file path=ppt/slides/slide6.xml><?xml version="1.0" encoding="utf-8"?>
+<file path=ppt/slides/slide7.xml><?xml version="1.0" encoding="utf-8"?>
 <p:sld xmlns:a="http://schemas.openxmlformats.org/drawingml/2006/main" xmlns:r="http://schemas.openxmlformats.org/officeDocument/2006/relationships" xmlns:p="http://schemas.openxmlformats.org/presentationml/2006/main">
   <p:cSld>
     <p:spTree>
@@ -21972,7 +27396,7 @@
 </p:sld>
 </file>
 
-<file path=ppt/slides/slide7.xml><?xml version="1.0" encoding="utf-8"?>
+<file path=ppt/slides/slide8.xml><?xml version="1.0" encoding="utf-8"?>
 <p:sld xmlns:a="http://schemas.openxmlformats.org/drawingml/2006/main" xmlns:r="http://schemas.openxmlformats.org/officeDocument/2006/relationships" xmlns:p="http://schemas.openxmlformats.org/presentationml/2006/main">
   <p:cSld>
     <p:spTree>
@@ -22317,7 +27741,7 @@
 </p:sld>
 </file>
 
-<file path=ppt/slides/slide8.xml><?xml version="1.0" encoding="utf-8"?>
+<file path=ppt/slides/slide9.xml><?xml version="1.0" encoding="utf-8"?>
 <p:sld xmlns:a="http://schemas.openxmlformats.org/drawingml/2006/main" xmlns:r="http://schemas.openxmlformats.org/officeDocument/2006/relationships" xmlns:p="http://schemas.openxmlformats.org/presentationml/2006/main">
   <p:cSld>
     <p:spTree>
@@ -23882,1595 +29306,6 @@
     <p:extLst>
       <p:ext uri="{BB962C8B-B14F-4D97-AF65-F5344CB8AC3E}">
         <p14:creationId xmlns:p14="http://schemas.microsoft.com/office/powerpoint/2010/main" val="1624715946"/>
-      </p:ext>
-    </p:extLst>
-  </p:cSld>
-  <p:clrMapOvr>
-    <a:masterClrMapping/>
-  </p:clrMapOvr>
-</p:sld>
-</file>
-
-<file path=ppt/slides/slide9.xml><?xml version="1.0" encoding="utf-8"?>
-<p:sld xmlns:a="http://schemas.openxmlformats.org/drawingml/2006/main" xmlns:r="http://schemas.openxmlformats.org/officeDocument/2006/relationships" xmlns:p="http://schemas.openxmlformats.org/presentationml/2006/main">
-  <p:cSld>
-    <p:spTree>
-      <p:nvGrpSpPr>
-        <p:cNvPr id="1" name=""/>
-        <p:cNvGrpSpPr/>
-        <p:nvPr/>
-      </p:nvGrpSpPr>
-      <p:grpSpPr>
-        <a:xfrm>
-          <a:off x="0" y="0"/>
-          <a:ext cx="0" cy="0"/>
-          <a:chOff x="0" y="0"/>
-          <a:chExt cx="0" cy="0"/>
-        </a:xfrm>
-      </p:grpSpPr>
-      <p:grpSp>
-        <p:nvGrpSpPr>
-          <p:cNvPr id="3" name="Group 2"/>
-          <p:cNvGrpSpPr/>
-          <p:nvPr/>
-        </p:nvGrpSpPr>
-        <p:grpSpPr>
-          <a:xfrm>
-            <a:off x="519449" y="383997"/>
-            <a:ext cx="12677100" cy="12677099"/>
-            <a:chOff x="519449" y="383997"/>
-            <a:chExt cx="12677100" cy="12677099"/>
-          </a:xfrm>
-        </p:grpSpPr>
-        <p:sp>
-          <p:nvSpPr>
-            <p:cNvPr id="4" name="Block Arc 3"/>
-            <p:cNvSpPr/>
-            <p:nvPr/>
-          </p:nvSpPr>
-          <p:spPr>
-            <a:xfrm>
-              <a:off x="1667993" y="1532540"/>
-              <a:ext cx="10380012" cy="10380012"/>
-            </a:xfrm>
-            <a:prstGeom prst="blockArc">
-              <a:avLst>
-                <a:gd name="adj1" fmla="val 13500000"/>
-                <a:gd name="adj2" fmla="val 16200000"/>
-                <a:gd name="adj3" fmla="val 3434"/>
-              </a:avLst>
-            </a:prstGeom>
-          </p:spPr>
-          <p:style>
-            <a:lnRef idx="0">
-              <a:schemeClr val="lt1">
-                <a:hueOff val="0"/>
-                <a:satOff val="0"/>
-                <a:lumOff val="0"/>
-                <a:alphaOff val="0"/>
-              </a:schemeClr>
-            </a:lnRef>
-            <a:fillRef idx="1">
-              <a:schemeClr val="accent3">
-                <a:hueOff val="11250266"/>
-                <a:satOff val="-16880"/>
-                <a:lumOff val="-2745"/>
-                <a:alphaOff val="0"/>
-              </a:schemeClr>
-            </a:fillRef>
-            <a:effectRef idx="0">
-              <a:schemeClr val="accent3">
-                <a:hueOff val="11250266"/>
-                <a:satOff val="-16880"/>
-                <a:lumOff val="-2745"/>
-                <a:alphaOff val="0"/>
-              </a:schemeClr>
-            </a:effectRef>
-            <a:fontRef idx="minor">
-              <a:schemeClr val="lt1"/>
-            </a:fontRef>
-          </p:style>
-        </p:sp>
-        <p:sp>
-          <p:nvSpPr>
-            <p:cNvPr id="5" name="Block Arc 4"/>
-            <p:cNvSpPr/>
-            <p:nvPr/>
-          </p:nvSpPr>
-          <p:spPr>
-            <a:xfrm>
-              <a:off x="1667993" y="1532540"/>
-              <a:ext cx="10380012" cy="10380012"/>
-            </a:xfrm>
-            <a:prstGeom prst="blockArc">
-              <a:avLst>
-                <a:gd name="adj1" fmla="val 10800000"/>
-                <a:gd name="adj2" fmla="val 13500000"/>
-                <a:gd name="adj3" fmla="val 3434"/>
-              </a:avLst>
-            </a:prstGeom>
-          </p:spPr>
-          <p:style>
-            <a:lnRef idx="0">
-              <a:schemeClr val="lt1">
-                <a:hueOff val="0"/>
-                <a:satOff val="0"/>
-                <a:lumOff val="0"/>
-                <a:alphaOff val="0"/>
-              </a:schemeClr>
-            </a:lnRef>
-            <a:fillRef idx="1">
-              <a:schemeClr val="accent3">
-                <a:hueOff val="9643085"/>
-                <a:satOff val="-14469"/>
-                <a:lumOff val="-2353"/>
-                <a:alphaOff val="0"/>
-              </a:schemeClr>
-            </a:fillRef>
-            <a:effectRef idx="0">
-              <a:schemeClr val="accent3">
-                <a:hueOff val="9643085"/>
-                <a:satOff val="-14469"/>
-                <a:lumOff val="-2353"/>
-                <a:alphaOff val="0"/>
-              </a:schemeClr>
-            </a:effectRef>
-            <a:fontRef idx="minor">
-              <a:schemeClr val="lt1"/>
-            </a:fontRef>
-          </p:style>
-        </p:sp>
-        <p:sp>
-          <p:nvSpPr>
-            <p:cNvPr id="6" name="Block Arc 5"/>
-            <p:cNvSpPr/>
-            <p:nvPr/>
-          </p:nvSpPr>
-          <p:spPr>
-            <a:xfrm>
-              <a:off x="1667993" y="1532540"/>
-              <a:ext cx="10380012" cy="10380012"/>
-            </a:xfrm>
-            <a:prstGeom prst="blockArc">
-              <a:avLst>
-                <a:gd name="adj1" fmla="val 8100000"/>
-                <a:gd name="adj2" fmla="val 10800000"/>
-                <a:gd name="adj3" fmla="val 3434"/>
-              </a:avLst>
-            </a:prstGeom>
-          </p:spPr>
-          <p:style>
-            <a:lnRef idx="0">
-              <a:schemeClr val="lt1">
-                <a:hueOff val="0"/>
-                <a:satOff val="0"/>
-                <a:lumOff val="0"/>
-                <a:alphaOff val="0"/>
-              </a:schemeClr>
-            </a:lnRef>
-            <a:fillRef idx="1">
-              <a:schemeClr val="accent3">
-                <a:hueOff val="8035904"/>
-                <a:satOff val="-12057"/>
-                <a:lumOff val="-1961"/>
-                <a:alphaOff val="0"/>
-              </a:schemeClr>
-            </a:fillRef>
-            <a:effectRef idx="0">
-              <a:schemeClr val="accent3">
-                <a:hueOff val="8035904"/>
-                <a:satOff val="-12057"/>
-                <a:lumOff val="-1961"/>
-                <a:alphaOff val="0"/>
-              </a:schemeClr>
-            </a:effectRef>
-            <a:fontRef idx="minor">
-              <a:schemeClr val="lt1"/>
-            </a:fontRef>
-          </p:style>
-        </p:sp>
-        <p:sp>
-          <p:nvSpPr>
-            <p:cNvPr id="7" name="Block Arc 6"/>
-            <p:cNvSpPr/>
-            <p:nvPr/>
-          </p:nvSpPr>
-          <p:spPr>
-            <a:xfrm>
-              <a:off x="1667993" y="1532540"/>
-              <a:ext cx="10380012" cy="10380012"/>
-            </a:xfrm>
-            <a:prstGeom prst="blockArc">
-              <a:avLst>
-                <a:gd name="adj1" fmla="val 5400000"/>
-                <a:gd name="adj2" fmla="val 8100000"/>
-                <a:gd name="adj3" fmla="val 3434"/>
-              </a:avLst>
-            </a:prstGeom>
-          </p:spPr>
-          <p:style>
-            <a:lnRef idx="0">
-              <a:schemeClr val="lt1">
-                <a:hueOff val="0"/>
-                <a:satOff val="0"/>
-                <a:lumOff val="0"/>
-                <a:alphaOff val="0"/>
-              </a:schemeClr>
-            </a:lnRef>
-            <a:fillRef idx="1">
-              <a:schemeClr val="accent3">
-                <a:hueOff val="6428724"/>
-                <a:satOff val="-9646"/>
-                <a:lumOff val="-1569"/>
-                <a:alphaOff val="0"/>
-              </a:schemeClr>
-            </a:fillRef>
-            <a:effectRef idx="0">
-              <a:schemeClr val="accent3">
-                <a:hueOff val="6428724"/>
-                <a:satOff val="-9646"/>
-                <a:lumOff val="-1569"/>
-                <a:alphaOff val="0"/>
-              </a:schemeClr>
-            </a:effectRef>
-            <a:fontRef idx="minor">
-              <a:schemeClr val="lt1"/>
-            </a:fontRef>
-          </p:style>
-        </p:sp>
-        <p:sp>
-          <p:nvSpPr>
-            <p:cNvPr id="8" name="Block Arc 7"/>
-            <p:cNvSpPr/>
-            <p:nvPr/>
-          </p:nvSpPr>
-          <p:spPr>
-            <a:xfrm>
-              <a:off x="1667993" y="1532540"/>
-              <a:ext cx="10380012" cy="10380012"/>
-            </a:xfrm>
-            <a:prstGeom prst="blockArc">
-              <a:avLst>
-                <a:gd name="adj1" fmla="val 2700000"/>
-                <a:gd name="adj2" fmla="val 5400000"/>
-                <a:gd name="adj3" fmla="val 3434"/>
-              </a:avLst>
-            </a:prstGeom>
-          </p:spPr>
-          <p:style>
-            <a:lnRef idx="0">
-              <a:schemeClr val="lt1">
-                <a:hueOff val="0"/>
-                <a:satOff val="0"/>
-                <a:lumOff val="0"/>
-                <a:alphaOff val="0"/>
-              </a:schemeClr>
-            </a:lnRef>
-            <a:fillRef idx="1">
-              <a:schemeClr val="accent3">
-                <a:hueOff val="4821542"/>
-                <a:satOff val="-7234"/>
-                <a:lumOff val="-1176"/>
-                <a:alphaOff val="0"/>
-              </a:schemeClr>
-            </a:fillRef>
-            <a:effectRef idx="0">
-              <a:schemeClr val="accent3">
-                <a:hueOff val="4821542"/>
-                <a:satOff val="-7234"/>
-                <a:lumOff val="-1176"/>
-                <a:alphaOff val="0"/>
-              </a:schemeClr>
-            </a:effectRef>
-            <a:fontRef idx="minor">
-              <a:schemeClr val="lt1"/>
-            </a:fontRef>
-          </p:style>
-        </p:sp>
-        <p:sp>
-          <p:nvSpPr>
-            <p:cNvPr id="9" name="Block Arc 8"/>
-            <p:cNvSpPr/>
-            <p:nvPr/>
-          </p:nvSpPr>
-          <p:spPr>
-            <a:xfrm>
-              <a:off x="1667993" y="1532540"/>
-              <a:ext cx="10380012" cy="10380012"/>
-            </a:xfrm>
-            <a:prstGeom prst="blockArc">
-              <a:avLst>
-                <a:gd name="adj1" fmla="val 0"/>
-                <a:gd name="adj2" fmla="val 2700000"/>
-                <a:gd name="adj3" fmla="val 3434"/>
-              </a:avLst>
-            </a:prstGeom>
-          </p:spPr>
-          <p:style>
-            <a:lnRef idx="0">
-              <a:schemeClr val="lt1">
-                <a:hueOff val="0"/>
-                <a:satOff val="0"/>
-                <a:lumOff val="0"/>
-                <a:alphaOff val="0"/>
-              </a:schemeClr>
-            </a:lnRef>
-            <a:fillRef idx="1">
-              <a:schemeClr val="accent3">
-                <a:hueOff val="3214362"/>
-                <a:satOff val="-4823"/>
-                <a:lumOff val="-784"/>
-                <a:alphaOff val="0"/>
-              </a:schemeClr>
-            </a:fillRef>
-            <a:effectRef idx="0">
-              <a:schemeClr val="accent3">
-                <a:hueOff val="3214362"/>
-                <a:satOff val="-4823"/>
-                <a:lumOff val="-784"/>
-                <a:alphaOff val="0"/>
-              </a:schemeClr>
-            </a:effectRef>
-            <a:fontRef idx="minor">
-              <a:schemeClr val="lt1"/>
-            </a:fontRef>
-          </p:style>
-        </p:sp>
-        <p:sp>
-          <p:nvSpPr>
-            <p:cNvPr id="10" name="Block Arc 9"/>
-            <p:cNvSpPr/>
-            <p:nvPr/>
-          </p:nvSpPr>
-          <p:spPr>
-            <a:xfrm>
-              <a:off x="1667993" y="1532540"/>
-              <a:ext cx="10380012" cy="10380012"/>
-            </a:xfrm>
-            <a:prstGeom prst="blockArc">
-              <a:avLst>
-                <a:gd name="adj1" fmla="val 18900000"/>
-                <a:gd name="adj2" fmla="val 0"/>
-                <a:gd name="adj3" fmla="val 3434"/>
-              </a:avLst>
-            </a:prstGeom>
-          </p:spPr>
-          <p:style>
-            <a:lnRef idx="0">
-              <a:schemeClr val="lt1">
-                <a:hueOff val="0"/>
-                <a:satOff val="0"/>
-                <a:lumOff val="0"/>
-                <a:alphaOff val="0"/>
-              </a:schemeClr>
-            </a:lnRef>
-            <a:fillRef idx="1">
-              <a:schemeClr val="accent3">
-                <a:hueOff val="1607181"/>
-                <a:satOff val="-2411"/>
-                <a:lumOff val="-392"/>
-                <a:alphaOff val="0"/>
-              </a:schemeClr>
-            </a:fillRef>
-            <a:effectRef idx="0">
-              <a:schemeClr val="accent3">
-                <a:hueOff val="1607181"/>
-                <a:satOff val="-2411"/>
-                <a:lumOff val="-392"/>
-                <a:alphaOff val="0"/>
-              </a:schemeClr>
-            </a:effectRef>
-            <a:fontRef idx="minor">
-              <a:schemeClr val="lt1"/>
-            </a:fontRef>
-          </p:style>
-        </p:sp>
-        <p:sp>
-          <p:nvSpPr>
-            <p:cNvPr id="11" name="Block Arc 10"/>
-            <p:cNvSpPr/>
-            <p:nvPr/>
-          </p:nvSpPr>
-          <p:spPr>
-            <a:xfrm>
-              <a:off x="1667993" y="1532540"/>
-              <a:ext cx="10380012" cy="10380012"/>
-            </a:xfrm>
-            <a:prstGeom prst="blockArc">
-              <a:avLst>
-                <a:gd name="adj1" fmla="val 16200000"/>
-                <a:gd name="adj2" fmla="val 18900000"/>
-                <a:gd name="adj3" fmla="val 3434"/>
-              </a:avLst>
-            </a:prstGeom>
-          </p:spPr>
-          <p:style>
-            <a:lnRef idx="0">
-              <a:schemeClr val="lt1">
-                <a:hueOff val="0"/>
-                <a:satOff val="0"/>
-                <a:lumOff val="0"/>
-                <a:alphaOff val="0"/>
-              </a:schemeClr>
-            </a:lnRef>
-            <a:fillRef idx="1">
-              <a:schemeClr val="accent3">
-                <a:hueOff val="0"/>
-                <a:satOff val="0"/>
-                <a:lumOff val="0"/>
-                <a:alphaOff val="0"/>
-              </a:schemeClr>
-            </a:fillRef>
-            <a:effectRef idx="0">
-              <a:schemeClr val="accent3">
-                <a:hueOff val="0"/>
-                <a:satOff val="0"/>
-                <a:lumOff val="0"/>
-                <a:alphaOff val="0"/>
-              </a:schemeClr>
-            </a:effectRef>
-            <a:fontRef idx="minor">
-              <a:schemeClr val="lt1"/>
-            </a:fontRef>
-          </p:style>
-        </p:sp>
-        <p:sp>
-          <p:nvSpPr>
-            <p:cNvPr id="13" name="Freeform 12"/>
-            <p:cNvSpPr/>
-            <p:nvPr/>
-          </p:nvSpPr>
-          <p:spPr>
-            <a:xfrm>
-              <a:off x="5089921" y="4954469"/>
-              <a:ext cx="3536155" cy="3536155"/>
-            </a:xfrm>
-            <a:custGeom>
-              <a:avLst/>
-              <a:gdLst>
-                <a:gd name="connsiteX0" fmla="*/ 0 w 3536155"/>
-                <a:gd name="connsiteY0" fmla="*/ 1768078 h 3536155"/>
-                <a:gd name="connsiteX1" fmla="*/ 1768078 w 3536155"/>
-                <a:gd name="connsiteY1" fmla="*/ 0 h 3536155"/>
-                <a:gd name="connsiteX2" fmla="*/ 3536156 w 3536155"/>
-                <a:gd name="connsiteY2" fmla="*/ 1768078 h 3536155"/>
-                <a:gd name="connsiteX3" fmla="*/ 1768078 w 3536155"/>
-                <a:gd name="connsiteY3" fmla="*/ 3536156 h 3536155"/>
-                <a:gd name="connsiteX4" fmla="*/ 0 w 3536155"/>
-                <a:gd name="connsiteY4" fmla="*/ 1768078 h 3536155"/>
-              </a:gdLst>
-              <a:ahLst/>
-              <a:cxnLst>
-                <a:cxn ang="0">
-                  <a:pos x="connsiteX0" y="connsiteY0"/>
-                </a:cxn>
-                <a:cxn ang="0">
-                  <a:pos x="connsiteX1" y="connsiteY1"/>
-                </a:cxn>
-                <a:cxn ang="0">
-                  <a:pos x="connsiteX2" y="connsiteY2"/>
-                </a:cxn>
-                <a:cxn ang="0">
-                  <a:pos x="connsiteX3" y="connsiteY3"/>
-                </a:cxn>
-                <a:cxn ang="0">
-                  <a:pos x="connsiteX4" y="connsiteY4"/>
-                </a:cxn>
-              </a:cxnLst>
-              <a:rect l="l" t="t" r="r" b="b"/>
-              <a:pathLst>
-                <a:path w="3536155" h="3536155">
-                  <a:moveTo>
-                    <a:pt x="0" y="1768078"/>
-                  </a:moveTo>
-                  <a:cubicBezTo>
-                    <a:pt x="0" y="791595"/>
-                    <a:pt x="791595" y="0"/>
-                    <a:pt x="1768078" y="0"/>
-                  </a:cubicBezTo>
-                  <a:cubicBezTo>
-                    <a:pt x="2744561" y="0"/>
-                    <a:pt x="3536156" y="791595"/>
-                    <a:pt x="3536156" y="1768078"/>
-                  </a:cubicBezTo>
-                  <a:cubicBezTo>
-                    <a:pt x="3536156" y="2744561"/>
-                    <a:pt x="2744561" y="3536156"/>
-                    <a:pt x="1768078" y="3536156"/>
-                  </a:cubicBezTo>
-                  <a:cubicBezTo>
-                    <a:pt x="791595" y="3536156"/>
-                    <a:pt x="0" y="2744561"/>
-                    <a:pt x="0" y="1768078"/>
-                  </a:cubicBezTo>
-                  <a:close/>
-                </a:path>
-              </a:pathLst>
-            </a:custGeom>
-          </p:spPr>
-          <p:style>
-            <a:lnRef idx="2">
-              <a:schemeClr val="lt1">
-                <a:hueOff val="0"/>
-                <a:satOff val="0"/>
-                <a:lumOff val="0"/>
-                <a:alphaOff val="0"/>
-              </a:schemeClr>
-            </a:lnRef>
-            <a:fillRef idx="1">
-              <a:schemeClr val="accent2">
-                <a:hueOff val="0"/>
-                <a:satOff val="0"/>
-                <a:lumOff val="0"/>
-                <a:alphaOff val="0"/>
-              </a:schemeClr>
-            </a:fillRef>
-            <a:effectRef idx="0">
-              <a:schemeClr val="accent2">
-                <a:hueOff val="0"/>
-                <a:satOff val="0"/>
-                <a:lumOff val="0"/>
-                <a:alphaOff val="0"/>
-              </a:schemeClr>
-            </a:effectRef>
-            <a:fontRef idx="minor">
-              <a:schemeClr val="lt1"/>
-            </a:fontRef>
-          </p:style>
-          <p:txBody>
-            <a:bodyPr spcFirstLastPara="0" vert="horz" wrap="square" lIns="595328" tIns="595328" rIns="595328" bIns="595328" numCol="1" spcCol="1270" anchor="ctr" anchorCtr="0">
-              <a:noAutofit/>
-            </a:bodyPr>
-            <a:lstStyle/>
-            <a:p>
-              <a:pPr lvl="0" algn="ctr" defTabSz="2711450">
-                <a:lnSpc>
-                  <a:spcPct val="90000"/>
-                </a:lnSpc>
-                <a:spcBef>
-                  <a:spcPct val="0"/>
-                </a:spcBef>
-                <a:spcAft>
-                  <a:spcPct val="35000"/>
-                </a:spcAft>
-              </a:pPr>
-              <a:r>
-                <a:rPr lang="en-US" sz="6100" kern="1200" dirty="0" smtClean="0"/>
-                <a:t>NWB:N</a:t>
-              </a:r>
-              <a:endParaRPr lang="en-US" sz="6100" kern="1200" dirty="0"/>
-            </a:p>
-          </p:txBody>
-        </p:sp>
-        <p:sp>
-          <p:nvSpPr>
-            <p:cNvPr id="14" name="Freeform 13"/>
-            <p:cNvSpPr/>
-            <p:nvPr/>
-          </p:nvSpPr>
-          <p:spPr>
-            <a:xfrm>
-              <a:off x="5620344" y="383997"/>
-              <a:ext cx="2475309" cy="2475309"/>
-            </a:xfrm>
-            <a:custGeom>
-              <a:avLst/>
-              <a:gdLst>
-                <a:gd name="connsiteX0" fmla="*/ 0 w 2475309"/>
-                <a:gd name="connsiteY0" fmla="*/ 1237655 h 2475309"/>
-                <a:gd name="connsiteX1" fmla="*/ 1237655 w 2475309"/>
-                <a:gd name="connsiteY1" fmla="*/ 0 h 2475309"/>
-                <a:gd name="connsiteX2" fmla="*/ 2475310 w 2475309"/>
-                <a:gd name="connsiteY2" fmla="*/ 1237655 h 2475309"/>
-                <a:gd name="connsiteX3" fmla="*/ 1237655 w 2475309"/>
-                <a:gd name="connsiteY3" fmla="*/ 2475310 h 2475309"/>
-                <a:gd name="connsiteX4" fmla="*/ 0 w 2475309"/>
-                <a:gd name="connsiteY4" fmla="*/ 1237655 h 2475309"/>
-              </a:gdLst>
-              <a:ahLst/>
-              <a:cxnLst>
-                <a:cxn ang="0">
-                  <a:pos x="connsiteX0" y="connsiteY0"/>
-                </a:cxn>
-                <a:cxn ang="0">
-                  <a:pos x="connsiteX1" y="connsiteY1"/>
-                </a:cxn>
-                <a:cxn ang="0">
-                  <a:pos x="connsiteX2" y="connsiteY2"/>
-                </a:cxn>
-                <a:cxn ang="0">
-                  <a:pos x="connsiteX3" y="connsiteY3"/>
-                </a:cxn>
-                <a:cxn ang="0">
-                  <a:pos x="connsiteX4" y="connsiteY4"/>
-                </a:cxn>
-              </a:cxnLst>
-              <a:rect l="l" t="t" r="r" b="b"/>
-              <a:pathLst>
-                <a:path w="2475309" h="2475309">
-                  <a:moveTo>
-                    <a:pt x="0" y="1237655"/>
-                  </a:moveTo>
-                  <a:cubicBezTo>
-                    <a:pt x="0" y="554117"/>
-                    <a:pt x="554117" y="0"/>
-                    <a:pt x="1237655" y="0"/>
-                  </a:cubicBezTo>
-                  <a:cubicBezTo>
-                    <a:pt x="1921193" y="0"/>
-                    <a:pt x="2475310" y="554117"/>
-                    <a:pt x="2475310" y="1237655"/>
-                  </a:cubicBezTo>
-                  <a:cubicBezTo>
-                    <a:pt x="2475310" y="1921193"/>
-                    <a:pt x="1921193" y="2475310"/>
-                    <a:pt x="1237655" y="2475310"/>
-                  </a:cubicBezTo>
-                  <a:cubicBezTo>
-                    <a:pt x="554117" y="2475310"/>
-                    <a:pt x="0" y="1921193"/>
-                    <a:pt x="0" y="1237655"/>
-                  </a:cubicBezTo>
-                  <a:close/>
-                </a:path>
-              </a:pathLst>
-            </a:custGeom>
-          </p:spPr>
-          <p:style>
-            <a:lnRef idx="2">
-              <a:schemeClr val="lt1">
-                <a:hueOff val="0"/>
-                <a:satOff val="0"/>
-                <a:lumOff val="0"/>
-                <a:alphaOff val="0"/>
-              </a:schemeClr>
-            </a:lnRef>
-            <a:fillRef idx="1">
-              <a:schemeClr val="accent3">
-                <a:hueOff val="0"/>
-                <a:satOff val="0"/>
-                <a:lumOff val="0"/>
-                <a:alphaOff val="0"/>
-              </a:schemeClr>
-            </a:fillRef>
-            <a:effectRef idx="0">
-              <a:schemeClr val="accent3">
-                <a:hueOff val="0"/>
-                <a:satOff val="0"/>
-                <a:lumOff val="0"/>
-                <a:alphaOff val="0"/>
-              </a:schemeClr>
-            </a:effectRef>
-            <a:fontRef idx="minor">
-              <a:schemeClr val="lt1"/>
-            </a:fontRef>
-          </p:style>
-          <p:txBody>
-            <a:bodyPr spcFirstLastPara="0" vert="horz" wrap="square" lIns="394251" tIns="394251" rIns="394251" bIns="394251" numCol="1" spcCol="1270" anchor="ctr" anchorCtr="0">
-              <a:noAutofit/>
-            </a:bodyPr>
-            <a:lstStyle/>
-            <a:p>
-              <a:pPr lvl="0" algn="ctr" defTabSz="1111250">
-                <a:lnSpc>
-                  <a:spcPct val="90000"/>
-                </a:lnSpc>
-                <a:spcBef>
-                  <a:spcPct val="0"/>
-                </a:spcBef>
-                <a:spcAft>
-                  <a:spcPct val="35000"/>
-                </a:spcAft>
-              </a:pPr>
-              <a:r>
-                <a:rPr lang="en-US" sz="2500" kern="1200" dirty="0" smtClean="0"/>
-                <a:t>Planning</a:t>
-              </a:r>
-              <a:endParaRPr lang="en-US" sz="2500" kern="1200" dirty="0"/>
-            </a:p>
-          </p:txBody>
-        </p:sp>
-        <p:sp>
-          <p:nvSpPr>
-            <p:cNvPr id="17" name="Freeform 16"/>
-            <p:cNvSpPr/>
-            <p:nvPr/>
-          </p:nvSpPr>
-          <p:spPr>
-            <a:xfrm>
-              <a:off x="9227222" y="1878014"/>
-              <a:ext cx="2475309" cy="2475309"/>
-            </a:xfrm>
-            <a:custGeom>
-              <a:avLst/>
-              <a:gdLst>
-                <a:gd name="connsiteX0" fmla="*/ 0 w 2475309"/>
-                <a:gd name="connsiteY0" fmla="*/ 1237655 h 2475309"/>
-                <a:gd name="connsiteX1" fmla="*/ 1237655 w 2475309"/>
-                <a:gd name="connsiteY1" fmla="*/ 0 h 2475309"/>
-                <a:gd name="connsiteX2" fmla="*/ 2475310 w 2475309"/>
-                <a:gd name="connsiteY2" fmla="*/ 1237655 h 2475309"/>
-                <a:gd name="connsiteX3" fmla="*/ 1237655 w 2475309"/>
-                <a:gd name="connsiteY3" fmla="*/ 2475310 h 2475309"/>
-                <a:gd name="connsiteX4" fmla="*/ 0 w 2475309"/>
-                <a:gd name="connsiteY4" fmla="*/ 1237655 h 2475309"/>
-              </a:gdLst>
-              <a:ahLst/>
-              <a:cxnLst>
-                <a:cxn ang="0">
-                  <a:pos x="connsiteX0" y="connsiteY0"/>
-                </a:cxn>
-                <a:cxn ang="0">
-                  <a:pos x="connsiteX1" y="connsiteY1"/>
-                </a:cxn>
-                <a:cxn ang="0">
-                  <a:pos x="connsiteX2" y="connsiteY2"/>
-                </a:cxn>
-                <a:cxn ang="0">
-                  <a:pos x="connsiteX3" y="connsiteY3"/>
-                </a:cxn>
-                <a:cxn ang="0">
-                  <a:pos x="connsiteX4" y="connsiteY4"/>
-                </a:cxn>
-              </a:cxnLst>
-              <a:rect l="l" t="t" r="r" b="b"/>
-              <a:pathLst>
-                <a:path w="2475309" h="2475309">
-                  <a:moveTo>
-                    <a:pt x="0" y="1237655"/>
-                  </a:moveTo>
-                  <a:cubicBezTo>
-                    <a:pt x="0" y="554117"/>
-                    <a:pt x="554117" y="0"/>
-                    <a:pt x="1237655" y="0"/>
-                  </a:cubicBezTo>
-                  <a:cubicBezTo>
-                    <a:pt x="1921193" y="0"/>
-                    <a:pt x="2475310" y="554117"/>
-                    <a:pt x="2475310" y="1237655"/>
-                  </a:cubicBezTo>
-                  <a:cubicBezTo>
-                    <a:pt x="2475310" y="1921193"/>
-                    <a:pt x="1921193" y="2475310"/>
-                    <a:pt x="1237655" y="2475310"/>
-                  </a:cubicBezTo>
-                  <a:cubicBezTo>
-                    <a:pt x="554117" y="2475310"/>
-                    <a:pt x="0" y="1921193"/>
-                    <a:pt x="0" y="1237655"/>
-                  </a:cubicBezTo>
-                  <a:close/>
-                </a:path>
-              </a:pathLst>
-            </a:custGeom>
-          </p:spPr>
-          <p:style>
-            <a:lnRef idx="2">
-              <a:schemeClr val="lt1">
-                <a:hueOff val="0"/>
-                <a:satOff val="0"/>
-                <a:lumOff val="0"/>
-                <a:alphaOff val="0"/>
-              </a:schemeClr>
-            </a:lnRef>
-            <a:fillRef idx="1">
-              <a:schemeClr val="accent3">
-                <a:hueOff val="1607181"/>
-                <a:satOff val="-2411"/>
-                <a:lumOff val="-392"/>
-                <a:alphaOff val="0"/>
-              </a:schemeClr>
-            </a:fillRef>
-            <a:effectRef idx="0">
-              <a:schemeClr val="accent3">
-                <a:hueOff val="1607181"/>
-                <a:satOff val="-2411"/>
-                <a:lumOff val="-392"/>
-                <a:alphaOff val="0"/>
-              </a:schemeClr>
-            </a:effectRef>
-            <a:fontRef idx="minor">
-              <a:schemeClr val="lt1"/>
-            </a:fontRef>
-          </p:style>
-          <p:txBody>
-            <a:bodyPr spcFirstLastPara="0" vert="horz" wrap="square" lIns="394251" tIns="394251" rIns="394251" bIns="394251" numCol="1" spcCol="1270" anchor="ctr" anchorCtr="0">
-              <a:noAutofit/>
-            </a:bodyPr>
-            <a:lstStyle/>
-            <a:p>
-              <a:pPr lvl="0" algn="ctr" defTabSz="1111250">
-                <a:lnSpc>
-                  <a:spcPct val="90000"/>
-                </a:lnSpc>
-                <a:spcBef>
-                  <a:spcPct val="0"/>
-                </a:spcBef>
-                <a:spcAft>
-                  <a:spcPct val="35000"/>
-                </a:spcAft>
-              </a:pPr>
-              <a:r>
-                <a:rPr lang="en-US" sz="2500" kern="1200" dirty="0" smtClean="0"/>
-                <a:t>Acquisition</a:t>
-              </a:r>
-              <a:endParaRPr lang="en-US" sz="2500" kern="1200" dirty="0"/>
-            </a:p>
-          </p:txBody>
-        </p:sp>
-        <p:sp>
-          <p:nvSpPr>
-            <p:cNvPr id="19" name="Freeform 18"/>
-            <p:cNvSpPr/>
-            <p:nvPr/>
-          </p:nvSpPr>
-          <p:spPr>
-            <a:xfrm>
-              <a:off x="10721240" y="5484892"/>
-              <a:ext cx="2475309" cy="2475309"/>
-            </a:xfrm>
-            <a:custGeom>
-              <a:avLst/>
-              <a:gdLst>
-                <a:gd name="connsiteX0" fmla="*/ 0 w 2475309"/>
-                <a:gd name="connsiteY0" fmla="*/ 1237655 h 2475309"/>
-                <a:gd name="connsiteX1" fmla="*/ 1237655 w 2475309"/>
-                <a:gd name="connsiteY1" fmla="*/ 0 h 2475309"/>
-                <a:gd name="connsiteX2" fmla="*/ 2475310 w 2475309"/>
-                <a:gd name="connsiteY2" fmla="*/ 1237655 h 2475309"/>
-                <a:gd name="connsiteX3" fmla="*/ 1237655 w 2475309"/>
-                <a:gd name="connsiteY3" fmla="*/ 2475310 h 2475309"/>
-                <a:gd name="connsiteX4" fmla="*/ 0 w 2475309"/>
-                <a:gd name="connsiteY4" fmla="*/ 1237655 h 2475309"/>
-              </a:gdLst>
-              <a:ahLst/>
-              <a:cxnLst>
-                <a:cxn ang="0">
-                  <a:pos x="connsiteX0" y="connsiteY0"/>
-                </a:cxn>
-                <a:cxn ang="0">
-                  <a:pos x="connsiteX1" y="connsiteY1"/>
-                </a:cxn>
-                <a:cxn ang="0">
-                  <a:pos x="connsiteX2" y="connsiteY2"/>
-                </a:cxn>
-                <a:cxn ang="0">
-                  <a:pos x="connsiteX3" y="connsiteY3"/>
-                </a:cxn>
-                <a:cxn ang="0">
-                  <a:pos x="connsiteX4" y="connsiteY4"/>
-                </a:cxn>
-              </a:cxnLst>
-              <a:rect l="l" t="t" r="r" b="b"/>
-              <a:pathLst>
-                <a:path w="2475309" h="2475309">
-                  <a:moveTo>
-                    <a:pt x="0" y="1237655"/>
-                  </a:moveTo>
-                  <a:cubicBezTo>
-                    <a:pt x="0" y="554117"/>
-                    <a:pt x="554117" y="0"/>
-                    <a:pt x="1237655" y="0"/>
-                  </a:cubicBezTo>
-                  <a:cubicBezTo>
-                    <a:pt x="1921193" y="0"/>
-                    <a:pt x="2475310" y="554117"/>
-                    <a:pt x="2475310" y="1237655"/>
-                  </a:cubicBezTo>
-                  <a:cubicBezTo>
-                    <a:pt x="2475310" y="1921193"/>
-                    <a:pt x="1921193" y="2475310"/>
-                    <a:pt x="1237655" y="2475310"/>
-                  </a:cubicBezTo>
-                  <a:cubicBezTo>
-                    <a:pt x="554117" y="2475310"/>
-                    <a:pt x="0" y="1921193"/>
-                    <a:pt x="0" y="1237655"/>
-                  </a:cubicBezTo>
-                  <a:close/>
-                </a:path>
-              </a:pathLst>
-            </a:custGeom>
-          </p:spPr>
-          <p:style>
-            <a:lnRef idx="2">
-              <a:schemeClr val="lt1">
-                <a:hueOff val="0"/>
-                <a:satOff val="0"/>
-                <a:lumOff val="0"/>
-                <a:alphaOff val="0"/>
-              </a:schemeClr>
-            </a:lnRef>
-            <a:fillRef idx="1">
-              <a:schemeClr val="accent3">
-                <a:hueOff val="3214362"/>
-                <a:satOff val="-4823"/>
-                <a:lumOff val="-784"/>
-                <a:alphaOff val="0"/>
-              </a:schemeClr>
-            </a:fillRef>
-            <a:effectRef idx="0">
-              <a:schemeClr val="accent3">
-                <a:hueOff val="3214362"/>
-                <a:satOff val="-4823"/>
-                <a:lumOff val="-784"/>
-                <a:alphaOff val="0"/>
-              </a:schemeClr>
-            </a:effectRef>
-            <a:fontRef idx="minor">
-              <a:schemeClr val="lt1"/>
-            </a:fontRef>
-          </p:style>
-          <p:txBody>
-            <a:bodyPr spcFirstLastPara="0" vert="horz" wrap="square" lIns="394251" tIns="394251" rIns="394251" bIns="394251" numCol="1" spcCol="1270" anchor="ctr" anchorCtr="0">
-              <a:noAutofit/>
-            </a:bodyPr>
-            <a:lstStyle/>
-            <a:p>
-              <a:pPr lvl="0" algn="ctr" defTabSz="1111250">
-                <a:lnSpc>
-                  <a:spcPct val="90000"/>
-                </a:lnSpc>
-                <a:spcBef>
-                  <a:spcPct val="0"/>
-                </a:spcBef>
-                <a:spcAft>
-                  <a:spcPct val="35000"/>
-                </a:spcAft>
-              </a:pPr>
-              <a:r>
-                <a:rPr lang="en-US" sz="2500" kern="1200" dirty="0" smtClean="0"/>
-                <a:t>Analysis &amp; Synthesis</a:t>
-              </a:r>
-              <a:endParaRPr lang="en-US" sz="2500" kern="1200" dirty="0"/>
-            </a:p>
-          </p:txBody>
-        </p:sp>
-        <p:sp>
-          <p:nvSpPr>
-            <p:cNvPr id="25" name="Freeform 24"/>
-            <p:cNvSpPr/>
-            <p:nvPr/>
-          </p:nvSpPr>
-          <p:spPr>
-            <a:xfrm>
-              <a:off x="9227222" y="9091769"/>
-              <a:ext cx="2475309" cy="2475309"/>
-            </a:xfrm>
-            <a:custGeom>
-              <a:avLst/>
-              <a:gdLst>
-                <a:gd name="connsiteX0" fmla="*/ 0 w 2475309"/>
-                <a:gd name="connsiteY0" fmla="*/ 1237655 h 2475309"/>
-                <a:gd name="connsiteX1" fmla="*/ 1237655 w 2475309"/>
-                <a:gd name="connsiteY1" fmla="*/ 0 h 2475309"/>
-                <a:gd name="connsiteX2" fmla="*/ 2475310 w 2475309"/>
-                <a:gd name="connsiteY2" fmla="*/ 1237655 h 2475309"/>
-                <a:gd name="connsiteX3" fmla="*/ 1237655 w 2475309"/>
-                <a:gd name="connsiteY3" fmla="*/ 2475310 h 2475309"/>
-                <a:gd name="connsiteX4" fmla="*/ 0 w 2475309"/>
-                <a:gd name="connsiteY4" fmla="*/ 1237655 h 2475309"/>
-              </a:gdLst>
-              <a:ahLst/>
-              <a:cxnLst>
-                <a:cxn ang="0">
-                  <a:pos x="connsiteX0" y="connsiteY0"/>
-                </a:cxn>
-                <a:cxn ang="0">
-                  <a:pos x="connsiteX1" y="connsiteY1"/>
-                </a:cxn>
-                <a:cxn ang="0">
-                  <a:pos x="connsiteX2" y="connsiteY2"/>
-                </a:cxn>
-                <a:cxn ang="0">
-                  <a:pos x="connsiteX3" y="connsiteY3"/>
-                </a:cxn>
-                <a:cxn ang="0">
-                  <a:pos x="connsiteX4" y="connsiteY4"/>
-                </a:cxn>
-              </a:cxnLst>
-              <a:rect l="l" t="t" r="r" b="b"/>
-              <a:pathLst>
-                <a:path w="2475309" h="2475309">
-                  <a:moveTo>
-                    <a:pt x="0" y="1237655"/>
-                  </a:moveTo>
-                  <a:cubicBezTo>
-                    <a:pt x="0" y="554117"/>
-                    <a:pt x="554117" y="0"/>
-                    <a:pt x="1237655" y="0"/>
-                  </a:cubicBezTo>
-                  <a:cubicBezTo>
-                    <a:pt x="1921193" y="0"/>
-                    <a:pt x="2475310" y="554117"/>
-                    <a:pt x="2475310" y="1237655"/>
-                  </a:cubicBezTo>
-                  <a:cubicBezTo>
-                    <a:pt x="2475310" y="1921193"/>
-                    <a:pt x="1921193" y="2475310"/>
-                    <a:pt x="1237655" y="2475310"/>
-                  </a:cubicBezTo>
-                  <a:cubicBezTo>
-                    <a:pt x="554117" y="2475310"/>
-                    <a:pt x="0" y="1921193"/>
-                    <a:pt x="0" y="1237655"/>
-                  </a:cubicBezTo>
-                  <a:close/>
-                </a:path>
-              </a:pathLst>
-            </a:custGeom>
-          </p:spPr>
-          <p:style>
-            <a:lnRef idx="2">
-              <a:schemeClr val="lt1">
-                <a:hueOff val="0"/>
-                <a:satOff val="0"/>
-                <a:lumOff val="0"/>
-                <a:alphaOff val="0"/>
-              </a:schemeClr>
-            </a:lnRef>
-            <a:fillRef idx="1">
-              <a:schemeClr val="accent3">
-                <a:hueOff val="4821542"/>
-                <a:satOff val="-7234"/>
-                <a:lumOff val="-1176"/>
-                <a:alphaOff val="0"/>
-              </a:schemeClr>
-            </a:fillRef>
-            <a:effectRef idx="0">
-              <a:schemeClr val="accent3">
-                <a:hueOff val="4821542"/>
-                <a:satOff val="-7234"/>
-                <a:lumOff val="-1176"/>
-                <a:alphaOff val="0"/>
-              </a:schemeClr>
-            </a:effectRef>
-            <a:fontRef idx="minor">
-              <a:schemeClr val="lt1"/>
-            </a:fontRef>
-          </p:style>
-          <p:txBody>
-            <a:bodyPr spcFirstLastPara="0" vert="horz" wrap="square" lIns="394251" tIns="394251" rIns="394251" bIns="394251" numCol="1" spcCol="1270" anchor="ctr" anchorCtr="0">
-              <a:noAutofit/>
-            </a:bodyPr>
-            <a:lstStyle/>
-            <a:p>
-              <a:pPr lvl="0" algn="ctr" defTabSz="1111250">
-                <a:lnSpc>
-                  <a:spcPct val="90000"/>
-                </a:lnSpc>
-                <a:spcBef>
-                  <a:spcPct val="0"/>
-                </a:spcBef>
-                <a:spcAft>
-                  <a:spcPct val="35000"/>
-                </a:spcAft>
-              </a:pPr>
-              <a:r>
-                <a:rPr lang="en-US" sz="2500" kern="1200" dirty="0" smtClean="0"/>
-                <a:t>Contributing</a:t>
-              </a:r>
-              <a:endParaRPr lang="en-US" sz="2500" kern="1200" dirty="0"/>
-            </a:p>
-          </p:txBody>
-        </p:sp>
-        <p:sp>
-          <p:nvSpPr>
-            <p:cNvPr id="27" name="Freeform 26"/>
-            <p:cNvSpPr/>
-            <p:nvPr/>
-          </p:nvSpPr>
-          <p:spPr>
-            <a:xfrm>
-              <a:off x="5620344" y="10585787"/>
-              <a:ext cx="2475309" cy="2475309"/>
-            </a:xfrm>
-            <a:custGeom>
-              <a:avLst/>
-              <a:gdLst>
-                <a:gd name="connsiteX0" fmla="*/ 0 w 2475309"/>
-                <a:gd name="connsiteY0" fmla="*/ 1237655 h 2475309"/>
-                <a:gd name="connsiteX1" fmla="*/ 1237655 w 2475309"/>
-                <a:gd name="connsiteY1" fmla="*/ 0 h 2475309"/>
-                <a:gd name="connsiteX2" fmla="*/ 2475310 w 2475309"/>
-                <a:gd name="connsiteY2" fmla="*/ 1237655 h 2475309"/>
-                <a:gd name="connsiteX3" fmla="*/ 1237655 w 2475309"/>
-                <a:gd name="connsiteY3" fmla="*/ 2475310 h 2475309"/>
-                <a:gd name="connsiteX4" fmla="*/ 0 w 2475309"/>
-                <a:gd name="connsiteY4" fmla="*/ 1237655 h 2475309"/>
-              </a:gdLst>
-              <a:ahLst/>
-              <a:cxnLst>
-                <a:cxn ang="0">
-                  <a:pos x="connsiteX0" y="connsiteY0"/>
-                </a:cxn>
-                <a:cxn ang="0">
-                  <a:pos x="connsiteX1" y="connsiteY1"/>
-                </a:cxn>
-                <a:cxn ang="0">
-                  <a:pos x="connsiteX2" y="connsiteY2"/>
-                </a:cxn>
-                <a:cxn ang="0">
-                  <a:pos x="connsiteX3" y="connsiteY3"/>
-                </a:cxn>
-                <a:cxn ang="0">
-                  <a:pos x="connsiteX4" y="connsiteY4"/>
-                </a:cxn>
-              </a:cxnLst>
-              <a:rect l="l" t="t" r="r" b="b"/>
-              <a:pathLst>
-                <a:path w="2475309" h="2475309">
-                  <a:moveTo>
-                    <a:pt x="0" y="1237655"/>
-                  </a:moveTo>
-                  <a:cubicBezTo>
-                    <a:pt x="0" y="554117"/>
-                    <a:pt x="554117" y="0"/>
-                    <a:pt x="1237655" y="0"/>
-                  </a:cubicBezTo>
-                  <a:cubicBezTo>
-                    <a:pt x="1921193" y="0"/>
-                    <a:pt x="2475310" y="554117"/>
-                    <a:pt x="2475310" y="1237655"/>
-                  </a:cubicBezTo>
-                  <a:cubicBezTo>
-                    <a:pt x="2475310" y="1921193"/>
-                    <a:pt x="1921193" y="2475310"/>
-                    <a:pt x="1237655" y="2475310"/>
-                  </a:cubicBezTo>
-                  <a:cubicBezTo>
-                    <a:pt x="554117" y="2475310"/>
-                    <a:pt x="0" y="1921193"/>
-                    <a:pt x="0" y="1237655"/>
-                  </a:cubicBezTo>
-                  <a:close/>
-                </a:path>
-              </a:pathLst>
-            </a:custGeom>
-          </p:spPr>
-          <p:style>
-            <a:lnRef idx="2">
-              <a:schemeClr val="lt1">
-                <a:hueOff val="0"/>
-                <a:satOff val="0"/>
-                <a:lumOff val="0"/>
-                <a:alphaOff val="0"/>
-              </a:schemeClr>
-            </a:lnRef>
-            <a:fillRef idx="1">
-              <a:schemeClr val="accent3">
-                <a:hueOff val="6428724"/>
-                <a:satOff val="-9646"/>
-                <a:lumOff val="-1569"/>
-                <a:alphaOff val="0"/>
-              </a:schemeClr>
-            </a:fillRef>
-            <a:effectRef idx="0">
-              <a:schemeClr val="accent3">
-                <a:hueOff val="6428724"/>
-                <a:satOff val="-9646"/>
-                <a:lumOff val="-1569"/>
-                <a:alphaOff val="0"/>
-              </a:schemeClr>
-            </a:effectRef>
-            <a:fontRef idx="minor">
-              <a:schemeClr val="lt1"/>
-            </a:fontRef>
-          </p:style>
-          <p:txBody>
-            <a:bodyPr spcFirstLastPara="0" vert="horz" wrap="square" lIns="394251" tIns="394251" rIns="394251" bIns="394251" numCol="1" spcCol="1270" anchor="ctr" anchorCtr="0">
-              <a:noAutofit/>
-            </a:bodyPr>
-            <a:lstStyle/>
-            <a:p>
-              <a:pPr lvl="0" algn="ctr" defTabSz="1111250">
-                <a:lnSpc>
-                  <a:spcPct val="90000"/>
-                </a:lnSpc>
-                <a:spcBef>
-                  <a:spcPct val="0"/>
-                </a:spcBef>
-                <a:spcAft>
-                  <a:spcPct val="35000"/>
-                </a:spcAft>
-              </a:pPr>
-              <a:r>
-                <a:rPr lang="en-US" sz="2500" kern="1200" dirty="0" smtClean="0"/>
-                <a:t>Discovery &amp; Access</a:t>
-              </a:r>
-              <a:endParaRPr lang="en-US" sz="2500" kern="1200" dirty="0"/>
-            </a:p>
-          </p:txBody>
-        </p:sp>
-        <p:sp>
-          <p:nvSpPr>
-            <p:cNvPr id="28" name="Freeform 27"/>
-            <p:cNvSpPr/>
-            <p:nvPr/>
-          </p:nvSpPr>
-          <p:spPr>
-            <a:xfrm>
-              <a:off x="2013467" y="9091769"/>
-              <a:ext cx="2475309" cy="2475309"/>
-            </a:xfrm>
-            <a:custGeom>
-              <a:avLst/>
-              <a:gdLst>
-                <a:gd name="connsiteX0" fmla="*/ 0 w 2475309"/>
-                <a:gd name="connsiteY0" fmla="*/ 1237655 h 2475309"/>
-                <a:gd name="connsiteX1" fmla="*/ 1237655 w 2475309"/>
-                <a:gd name="connsiteY1" fmla="*/ 0 h 2475309"/>
-                <a:gd name="connsiteX2" fmla="*/ 2475310 w 2475309"/>
-                <a:gd name="connsiteY2" fmla="*/ 1237655 h 2475309"/>
-                <a:gd name="connsiteX3" fmla="*/ 1237655 w 2475309"/>
-                <a:gd name="connsiteY3" fmla="*/ 2475310 h 2475309"/>
-                <a:gd name="connsiteX4" fmla="*/ 0 w 2475309"/>
-                <a:gd name="connsiteY4" fmla="*/ 1237655 h 2475309"/>
-              </a:gdLst>
-              <a:ahLst/>
-              <a:cxnLst>
-                <a:cxn ang="0">
-                  <a:pos x="connsiteX0" y="connsiteY0"/>
-                </a:cxn>
-                <a:cxn ang="0">
-                  <a:pos x="connsiteX1" y="connsiteY1"/>
-                </a:cxn>
-                <a:cxn ang="0">
-                  <a:pos x="connsiteX2" y="connsiteY2"/>
-                </a:cxn>
-                <a:cxn ang="0">
-                  <a:pos x="connsiteX3" y="connsiteY3"/>
-                </a:cxn>
-                <a:cxn ang="0">
-                  <a:pos x="connsiteX4" y="connsiteY4"/>
-                </a:cxn>
-              </a:cxnLst>
-              <a:rect l="l" t="t" r="r" b="b"/>
-              <a:pathLst>
-                <a:path w="2475309" h="2475309">
-                  <a:moveTo>
-                    <a:pt x="0" y="1237655"/>
-                  </a:moveTo>
-                  <a:cubicBezTo>
-                    <a:pt x="0" y="554117"/>
-                    <a:pt x="554117" y="0"/>
-                    <a:pt x="1237655" y="0"/>
-                  </a:cubicBezTo>
-                  <a:cubicBezTo>
-                    <a:pt x="1921193" y="0"/>
-                    <a:pt x="2475310" y="554117"/>
-                    <a:pt x="2475310" y="1237655"/>
-                  </a:cubicBezTo>
-                  <a:cubicBezTo>
-                    <a:pt x="2475310" y="1921193"/>
-                    <a:pt x="1921193" y="2475310"/>
-                    <a:pt x="1237655" y="2475310"/>
-                  </a:cubicBezTo>
-                  <a:cubicBezTo>
-                    <a:pt x="554117" y="2475310"/>
-                    <a:pt x="0" y="1921193"/>
-                    <a:pt x="0" y="1237655"/>
-                  </a:cubicBezTo>
-                  <a:close/>
-                </a:path>
-              </a:pathLst>
-            </a:custGeom>
-          </p:spPr>
-          <p:style>
-            <a:lnRef idx="2">
-              <a:schemeClr val="lt1">
-                <a:hueOff val="0"/>
-                <a:satOff val="0"/>
-                <a:lumOff val="0"/>
-                <a:alphaOff val="0"/>
-              </a:schemeClr>
-            </a:lnRef>
-            <a:fillRef idx="1">
-              <a:schemeClr val="accent3">
-                <a:hueOff val="8035904"/>
-                <a:satOff val="-12057"/>
-                <a:lumOff val="-1961"/>
-                <a:alphaOff val="0"/>
-              </a:schemeClr>
-            </a:fillRef>
-            <a:effectRef idx="0">
-              <a:schemeClr val="accent3">
-                <a:hueOff val="8035904"/>
-                <a:satOff val="-12057"/>
-                <a:lumOff val="-1961"/>
-                <a:alphaOff val="0"/>
-              </a:schemeClr>
-            </a:effectRef>
-            <a:fontRef idx="minor">
-              <a:schemeClr val="lt1"/>
-            </a:fontRef>
-          </p:style>
-          <p:txBody>
-            <a:bodyPr spcFirstLastPara="0" vert="horz" wrap="square" lIns="394251" tIns="394251" rIns="394251" bIns="394251" numCol="1" spcCol="1270" anchor="ctr" anchorCtr="0">
-              <a:noAutofit/>
-            </a:bodyPr>
-            <a:lstStyle/>
-            <a:p>
-              <a:pPr lvl="0" algn="ctr" defTabSz="1111250">
-                <a:lnSpc>
-                  <a:spcPct val="90000"/>
-                </a:lnSpc>
-                <a:spcBef>
-                  <a:spcPct val="0"/>
-                </a:spcBef>
-                <a:spcAft>
-                  <a:spcPct val="35000"/>
-                </a:spcAft>
-              </a:pPr>
-              <a:r>
-                <a:rPr lang="en-US" sz="2500" kern="1200" dirty="0" smtClean="0"/>
-                <a:t>Use &amp; Reuse</a:t>
-              </a:r>
-              <a:endParaRPr lang="en-US" sz="2500" kern="1200" dirty="0"/>
-            </a:p>
-          </p:txBody>
-        </p:sp>
-        <p:sp>
-          <p:nvSpPr>
-            <p:cNvPr id="30" name="Freeform 29"/>
-            <p:cNvSpPr/>
-            <p:nvPr/>
-          </p:nvSpPr>
-          <p:spPr>
-            <a:xfrm>
-              <a:off x="519449" y="5484892"/>
-              <a:ext cx="2475309" cy="2475309"/>
-            </a:xfrm>
-            <a:custGeom>
-              <a:avLst/>
-              <a:gdLst>
-                <a:gd name="connsiteX0" fmla="*/ 0 w 2475309"/>
-                <a:gd name="connsiteY0" fmla="*/ 1237655 h 2475309"/>
-                <a:gd name="connsiteX1" fmla="*/ 1237655 w 2475309"/>
-                <a:gd name="connsiteY1" fmla="*/ 0 h 2475309"/>
-                <a:gd name="connsiteX2" fmla="*/ 2475310 w 2475309"/>
-                <a:gd name="connsiteY2" fmla="*/ 1237655 h 2475309"/>
-                <a:gd name="connsiteX3" fmla="*/ 1237655 w 2475309"/>
-                <a:gd name="connsiteY3" fmla="*/ 2475310 h 2475309"/>
-                <a:gd name="connsiteX4" fmla="*/ 0 w 2475309"/>
-                <a:gd name="connsiteY4" fmla="*/ 1237655 h 2475309"/>
-              </a:gdLst>
-              <a:ahLst/>
-              <a:cxnLst>
-                <a:cxn ang="0">
-                  <a:pos x="connsiteX0" y="connsiteY0"/>
-                </a:cxn>
-                <a:cxn ang="0">
-                  <a:pos x="connsiteX1" y="connsiteY1"/>
-                </a:cxn>
-                <a:cxn ang="0">
-                  <a:pos x="connsiteX2" y="connsiteY2"/>
-                </a:cxn>
-                <a:cxn ang="0">
-                  <a:pos x="connsiteX3" y="connsiteY3"/>
-                </a:cxn>
-                <a:cxn ang="0">
-                  <a:pos x="connsiteX4" y="connsiteY4"/>
-                </a:cxn>
-              </a:cxnLst>
-              <a:rect l="l" t="t" r="r" b="b"/>
-              <a:pathLst>
-                <a:path w="2475309" h="2475309">
-                  <a:moveTo>
-                    <a:pt x="0" y="1237655"/>
-                  </a:moveTo>
-                  <a:cubicBezTo>
-                    <a:pt x="0" y="554117"/>
-                    <a:pt x="554117" y="0"/>
-                    <a:pt x="1237655" y="0"/>
-                  </a:cubicBezTo>
-                  <a:cubicBezTo>
-                    <a:pt x="1921193" y="0"/>
-                    <a:pt x="2475310" y="554117"/>
-                    <a:pt x="2475310" y="1237655"/>
-                  </a:cubicBezTo>
-                  <a:cubicBezTo>
-                    <a:pt x="2475310" y="1921193"/>
-                    <a:pt x="1921193" y="2475310"/>
-                    <a:pt x="1237655" y="2475310"/>
-                  </a:cubicBezTo>
-                  <a:cubicBezTo>
-                    <a:pt x="554117" y="2475310"/>
-                    <a:pt x="0" y="1921193"/>
-                    <a:pt x="0" y="1237655"/>
-                  </a:cubicBezTo>
-                  <a:close/>
-                </a:path>
-              </a:pathLst>
-            </a:custGeom>
-          </p:spPr>
-          <p:style>
-            <a:lnRef idx="2">
-              <a:schemeClr val="lt1">
-                <a:hueOff val="0"/>
-                <a:satOff val="0"/>
-                <a:lumOff val="0"/>
-                <a:alphaOff val="0"/>
-              </a:schemeClr>
-            </a:lnRef>
-            <a:fillRef idx="1">
-              <a:schemeClr val="accent3">
-                <a:hueOff val="9643085"/>
-                <a:satOff val="-14469"/>
-                <a:lumOff val="-2353"/>
-                <a:alphaOff val="0"/>
-              </a:schemeClr>
-            </a:fillRef>
-            <a:effectRef idx="0">
-              <a:schemeClr val="accent3">
-                <a:hueOff val="9643085"/>
-                <a:satOff val="-14469"/>
-                <a:lumOff val="-2353"/>
-                <a:alphaOff val="0"/>
-              </a:schemeClr>
-            </a:effectRef>
-            <a:fontRef idx="minor">
-              <a:schemeClr val="lt1"/>
-            </a:fontRef>
-          </p:style>
-          <p:txBody>
-            <a:bodyPr spcFirstLastPara="0" vert="horz" wrap="square" lIns="394251" tIns="394251" rIns="394251" bIns="394251" numCol="1" spcCol="1270" anchor="ctr" anchorCtr="0">
-              <a:noAutofit/>
-            </a:bodyPr>
-            <a:lstStyle/>
-            <a:p>
-              <a:pPr lvl="0" algn="ctr" defTabSz="1111250">
-                <a:lnSpc>
-                  <a:spcPct val="90000"/>
-                </a:lnSpc>
-                <a:spcBef>
-                  <a:spcPct val="0"/>
-                </a:spcBef>
-                <a:spcAft>
-                  <a:spcPct val="35000"/>
-                </a:spcAft>
-              </a:pPr>
-              <a:r>
-                <a:rPr lang="en-US" sz="2500" kern="1200" dirty="0" smtClean="0"/>
-                <a:t>Publication</a:t>
-              </a:r>
-              <a:endParaRPr lang="en-US" sz="2500" kern="1200" dirty="0"/>
-            </a:p>
-          </p:txBody>
-        </p:sp>
-        <p:sp>
-          <p:nvSpPr>
-            <p:cNvPr id="31" name="Freeform 30"/>
-            <p:cNvSpPr/>
-            <p:nvPr/>
-          </p:nvSpPr>
-          <p:spPr>
-            <a:xfrm>
-              <a:off x="2013467" y="1878014"/>
-              <a:ext cx="2475309" cy="2475309"/>
-            </a:xfrm>
-            <a:custGeom>
-              <a:avLst/>
-              <a:gdLst>
-                <a:gd name="connsiteX0" fmla="*/ 0 w 2475309"/>
-                <a:gd name="connsiteY0" fmla="*/ 1237655 h 2475309"/>
-                <a:gd name="connsiteX1" fmla="*/ 1237655 w 2475309"/>
-                <a:gd name="connsiteY1" fmla="*/ 0 h 2475309"/>
-                <a:gd name="connsiteX2" fmla="*/ 2475310 w 2475309"/>
-                <a:gd name="connsiteY2" fmla="*/ 1237655 h 2475309"/>
-                <a:gd name="connsiteX3" fmla="*/ 1237655 w 2475309"/>
-                <a:gd name="connsiteY3" fmla="*/ 2475310 h 2475309"/>
-                <a:gd name="connsiteX4" fmla="*/ 0 w 2475309"/>
-                <a:gd name="connsiteY4" fmla="*/ 1237655 h 2475309"/>
-              </a:gdLst>
-              <a:ahLst/>
-              <a:cxnLst>
-                <a:cxn ang="0">
-                  <a:pos x="connsiteX0" y="connsiteY0"/>
-                </a:cxn>
-                <a:cxn ang="0">
-                  <a:pos x="connsiteX1" y="connsiteY1"/>
-                </a:cxn>
-                <a:cxn ang="0">
-                  <a:pos x="connsiteX2" y="connsiteY2"/>
-                </a:cxn>
-                <a:cxn ang="0">
-                  <a:pos x="connsiteX3" y="connsiteY3"/>
-                </a:cxn>
-                <a:cxn ang="0">
-                  <a:pos x="connsiteX4" y="connsiteY4"/>
-                </a:cxn>
-              </a:cxnLst>
-              <a:rect l="l" t="t" r="r" b="b"/>
-              <a:pathLst>
-                <a:path w="2475309" h="2475309">
-                  <a:moveTo>
-                    <a:pt x="0" y="1237655"/>
-                  </a:moveTo>
-                  <a:cubicBezTo>
-                    <a:pt x="0" y="554117"/>
-                    <a:pt x="554117" y="0"/>
-                    <a:pt x="1237655" y="0"/>
-                  </a:cubicBezTo>
-                  <a:cubicBezTo>
-                    <a:pt x="1921193" y="0"/>
-                    <a:pt x="2475310" y="554117"/>
-                    <a:pt x="2475310" y="1237655"/>
-                  </a:cubicBezTo>
-                  <a:cubicBezTo>
-                    <a:pt x="2475310" y="1921193"/>
-                    <a:pt x="1921193" y="2475310"/>
-                    <a:pt x="1237655" y="2475310"/>
-                  </a:cubicBezTo>
-                  <a:cubicBezTo>
-                    <a:pt x="554117" y="2475310"/>
-                    <a:pt x="0" y="1921193"/>
-                    <a:pt x="0" y="1237655"/>
-                  </a:cubicBezTo>
-                  <a:close/>
-                </a:path>
-              </a:pathLst>
-            </a:custGeom>
-          </p:spPr>
-          <p:style>
-            <a:lnRef idx="2">
-              <a:schemeClr val="lt1">
-                <a:hueOff val="0"/>
-                <a:satOff val="0"/>
-                <a:lumOff val="0"/>
-                <a:alphaOff val="0"/>
-              </a:schemeClr>
-            </a:lnRef>
-            <a:fillRef idx="1">
-              <a:schemeClr val="accent3">
-                <a:hueOff val="11250266"/>
-                <a:satOff val="-16880"/>
-                <a:lumOff val="-2745"/>
-                <a:alphaOff val="0"/>
-              </a:schemeClr>
-            </a:fillRef>
-            <a:effectRef idx="0">
-              <a:schemeClr val="accent3">
-                <a:hueOff val="11250266"/>
-                <a:satOff val="-16880"/>
-                <a:lumOff val="-2745"/>
-                <a:alphaOff val="0"/>
-              </a:schemeClr>
-            </a:effectRef>
-            <a:fontRef idx="minor">
-              <a:schemeClr val="lt1"/>
-            </a:fontRef>
-          </p:style>
-          <p:txBody>
-            <a:bodyPr spcFirstLastPara="0" vert="horz" wrap="square" lIns="394251" tIns="394251" rIns="394251" bIns="394251" numCol="1" spcCol="1270" anchor="ctr" anchorCtr="0">
-              <a:noAutofit/>
-            </a:bodyPr>
-            <a:lstStyle/>
-            <a:p>
-              <a:pPr lvl="0" algn="ctr" defTabSz="1111250">
-                <a:lnSpc>
-                  <a:spcPct val="90000"/>
-                </a:lnSpc>
-                <a:spcBef>
-                  <a:spcPct val="0"/>
-                </a:spcBef>
-                <a:spcAft>
-                  <a:spcPct val="35000"/>
-                </a:spcAft>
-              </a:pPr>
-              <a:r>
-                <a:rPr lang="en-US" sz="2500" kern="1200" dirty="0" smtClean="0"/>
-                <a:t>Preservation</a:t>
-              </a:r>
-              <a:endParaRPr lang="en-US" sz="2500" kern="1200" dirty="0"/>
-            </a:p>
-          </p:txBody>
-        </p:sp>
-      </p:grpSp>
-    </p:spTree>
-    <p:extLst>
-      <p:ext uri="{BB962C8B-B14F-4D97-AF65-F5344CB8AC3E}">
-        <p14:creationId xmlns:p14="http://schemas.microsoft.com/office/powerpoint/2010/main" val="4095117016"/>
       </p:ext>
     </p:extLst>
   </p:cSld>
